--- a/exploratory/slides/soutenance_memoire_DORA.pptx
+++ b/exploratory/slides/soutenance_memoire_DORA.pptx
@@ -33,6 +33,8 @@
     <p:sldId id="281" r:id="rId33"/>
     <p:sldId id="282" r:id="rId34"/>
     <p:sldId id="283" r:id="rId35"/>
+    <p:sldId id="284" r:id="rId36"/>
+    <p:sldId id="285" r:id="rId37"/>
   </p:sldIdLst>
   <p:sldSz cx="12191695" cy="6858000" type="screen4x3"/>
   <p:notesSz cx="6858000" cy="9144000"/>
@@ -1359,7 +1361,7 @@
           <a:lstStyle/>
           <a:p>
             <a:r>
-              <a:t>Si le jury demande la tracabilite : chaque nombre publie sort d'un script versionne, et un harnais verifie les 2 346 nombres du document.</a:t>
+              <a:t>Si le jury demande la tracabilite : chaque nombre publie sort d'un script versionne, et un harnais verifie les 2 346 nombres du document. La colonne de droite est le point : deux statuts, jamais confondus.</a:t>
             </a:r>
           </a:p>
         </p:txBody>
@@ -1429,7 +1431,7 @@
           <a:lstStyle/>
           <a:p>
             <a:r>
-              <a:t>Le point qui desamorce la question sur les valeurs posees : la these ne depend pas de leur niveau mais de leur ORDRE, et la monotonie est demontree.</a:t>
+              <a:t>Le point qui desamorce la question sur les valeurs posees : la these ne depend pas de leur niveau mais de leur ORDRE, et la monotonie est demontree au script 66. Le p_u gele est l'exemple a citer si on demande la rigueur : l'ecart est publie au chapitre 13 au lieu d'etre corrige en silence, parce que rejouer un pipeline stochastique pour 2,4 % deplacerait des centaines de nombres sans qu'aucun deplacement soit attribuable a la correction.</a:t>
             </a:r>
           </a:p>
         </p:txBody>
@@ -2065,6 +2067,146 @@
           <a:p>
             <a:r>
               <a:t>La distinction en rouge est celle qui a produit une confusion en seance le 7 aout 2026 : le quantile de severite d'un sinistre n'est pas une mesure de capital.</a:t>
+            </a:r>
+          </a:p>
+        </p:txBody>
+      </p:sp>
+      <p:sp>
+        <p:nvSpPr>
+          <p:cNvPr id="4" name="Slide Number Placeholder 3"/>
+          <p:cNvSpPr>
+            <a:spLocks noGrp="1"/>
+          </p:cNvSpPr>
+          <p:nvPr>
+            <p:ph type="sldNum" idx="5" sz="quarter"/>
+          </p:nvPr>
+        </p:nvSpPr>
+        <p:spPr/>
+      </p:sp>
+    </p:spTree>
+  </p:cSld>
+  <p:clrMapOvr>
+    <a:masterClrMapping/>
+  </p:clrMapOvr>
+</p:notes>
+</file>
+
+<file path=ppt/notesSlides/notesSlide28.xml><?xml version="1.0" encoding="utf-8"?>
+<p:notes xmlns:a="http://schemas.openxmlformats.org/drawingml/2006/main" xmlns:p="http://schemas.openxmlformats.org/presentationml/2006/main" xmlns:r="http://schemas.openxmlformats.org/officeDocument/2006/relationships">
+  <p:cSld>
+    <p:spTree>
+      <p:nvGrpSpPr>
+        <p:cNvPr id="1" name=""/>
+        <p:cNvGrpSpPr/>
+        <p:nvPr/>
+      </p:nvGrpSpPr>
+      <p:grpSpPr>
+        <a:xfrm>
+          <a:off x="0" y="0"/>
+          <a:ext cx="0" cy="0"/>
+          <a:chOff x="0" y="0"/>
+          <a:chExt cx="0" cy="0"/>
+        </a:xfrm>
+      </p:grpSpPr>
+      <p:sp>
+        <p:nvSpPr>
+          <p:cNvPr id="2" name="Slide Image Placeholder 1"/>
+          <p:cNvSpPr>
+            <a:spLocks noGrp="1"/>
+          </p:cNvSpPr>
+          <p:nvPr>
+            <p:ph type="sldImg" idx="2"/>
+          </p:nvPr>
+        </p:nvSpPr>
+        <p:spPr/>
+      </p:sp>
+      <p:sp>
+        <p:nvSpPr>
+          <p:cNvPr id="3" name="Notes Placeholder 2"/>
+          <p:cNvSpPr>
+            <a:spLocks noGrp="1"/>
+          </p:cNvSpPr>
+          <p:nvPr>
+            <p:ph type="body" idx="3" sz="quarter"/>
+          </p:nvPr>
+        </p:nvSpPr>
+        <p:spPr/>
+        <p:txBody>
+          <a:bodyPr/>
+          <a:lstStyle/>
+          <a:p>
+            <a:r>
+              <a:t>C'est la figure du memoire. La diapositive de l'expose en montre le panneau du milieu, redessine pour etre lisible a la projection, avec les memes valeurs lues dans la sortie versionnee. Le panneau (a) porte la decomposition de Mobius, le (c) les six croises de paires. NE PAS additionner l'interaction des canaux et celle des piliers : ce sont deux partitions du meme ecart.</a:t>
+            </a:r>
+          </a:p>
+        </p:txBody>
+      </p:sp>
+      <p:sp>
+        <p:nvSpPr>
+          <p:cNvPr id="4" name="Slide Number Placeholder 3"/>
+          <p:cNvSpPr>
+            <a:spLocks noGrp="1"/>
+          </p:cNvSpPr>
+          <p:nvPr>
+            <p:ph type="sldNum" idx="5" sz="quarter"/>
+          </p:nvPr>
+        </p:nvSpPr>
+        <p:spPr/>
+      </p:sp>
+    </p:spTree>
+  </p:cSld>
+  <p:clrMapOvr>
+    <a:masterClrMapping/>
+  </p:clrMapOvr>
+</p:notes>
+</file>
+
+<file path=ppt/notesSlides/notesSlide29.xml><?xml version="1.0" encoding="utf-8"?>
+<p:notes xmlns:a="http://schemas.openxmlformats.org/drawingml/2006/main" xmlns:p="http://schemas.openxmlformats.org/presentationml/2006/main" xmlns:r="http://schemas.openxmlformats.org/officeDocument/2006/relationships">
+  <p:cSld>
+    <p:spTree>
+      <p:nvGrpSpPr>
+        <p:cNvPr id="1" name=""/>
+        <p:cNvGrpSpPr/>
+        <p:nvPr/>
+      </p:nvGrpSpPr>
+      <p:grpSpPr>
+        <a:xfrm>
+          <a:off x="0" y="0"/>
+          <a:ext cx="0" cy="0"/>
+          <a:chOff x="0" y="0"/>
+          <a:chExt cx="0" cy="0"/>
+        </a:xfrm>
+      </p:grpSpPr>
+      <p:sp>
+        <p:nvSpPr>
+          <p:cNvPr id="2" name="Slide Image Placeholder 1"/>
+          <p:cNvSpPr>
+            <a:spLocks noGrp="1"/>
+          </p:cNvSpPr>
+          <p:nvPr>
+            <p:ph type="sldImg" idx="2"/>
+          </p:nvPr>
+        </p:nvSpPr>
+        <p:spPr/>
+      </p:sp>
+      <p:sp>
+        <p:nvSpPr>
+          <p:cNvPr id="3" name="Notes Placeholder 2"/>
+          <p:cNvSpPr>
+            <a:spLocks noGrp="1"/>
+          </p:cNvSpPr>
+          <p:nvPr>
+            <p:ph type="body" idx="3" sz="quarter"/>
+          </p:nvPr>
+        </p:nvSpPr>
+        <p:spPr/>
+        <p:txBody>
+          <a:bodyPr/>
+          <a:lstStyle/>
+          <a:p>
+            <a:r>
+              <a:t>C'est la figure du memoire. La diapositive de l'expose en montre le panneau (a), redessine en bandes. Les trois autres panneaux repondent a des questions de jury : la lecture centrale bayesienne, la priorite robuste au sens du regret maximal, et la hierarchie sans cycle.</a:t>
             </a:r>
           </a:p>
         </p:txBody>
@@ -6612,33 +6754,9 @@
           </a:p>
         </p:txBody>
       </p:sp>
-      <p:pic>
-        <p:nvPicPr>
-          <p:cNvPr id="9" name="Picture 8" descr="Z_identification_partielle.png"/>
-          <p:cNvPicPr>
-            <a:picLocks noChangeAspect="1"/>
-          </p:cNvPicPr>
-          <p:nvPr/>
-        </p:nvPicPr>
-        <p:blipFill>
-          <a:blip r:embed="rId3"/>
-          <a:stretch>
-            <a:fillRect/>
-          </a:stretch>
-        </p:blipFill>
-        <p:spPr>
-          <a:xfrm>
-            <a:off x="957558" y="1389888"/>
-            <a:ext cx="4711082" cy="4288536"/>
-          </a:xfrm>
-          <a:prstGeom prst="rect">
-            <a:avLst/>
-          </a:prstGeom>
-        </p:spPr>
-      </p:pic>
       <p:cxnSp>
         <p:nvCxnSpPr>
-          <p:cNvPr id="10" name="Connector 9"/>
+          <p:cNvPr id="9" name="Connector 8"/>
           <p:cNvCxnSpPr/>
           <p:nvPr/>
         </p:nvCxnSpPr>
@@ -6674,7 +6792,1071 @@
       </p:cxnSp>
       <p:sp>
         <p:nvSpPr>
+          <p:cNvPr id="10" name="Rectangle 9"/>
+          <p:cNvSpPr/>
+          <p:nvPr/>
+        </p:nvSpPr>
+        <p:spPr>
+          <a:xfrm>
+            <a:off x="1316736" y="4892039"/>
+            <a:ext cx="4468215" cy="9525"/>
+          </a:xfrm>
+          <a:prstGeom prst="rect">
+            <a:avLst/>
+          </a:prstGeom>
+          <a:solidFill>
+            <a:srgbClr val="D9D9D9"/>
+          </a:solidFill>
+          <a:ln>
+            <a:noFill/>
+          </a:ln>
+          <a:effectLst/>
+        </p:spPr>
+        <p:style>
+          <a:lnRef idx="1">
+            <a:schemeClr val="accent1"/>
+          </a:lnRef>
+          <a:fillRef idx="3">
+            <a:schemeClr val="accent1"/>
+          </a:fillRef>
+          <a:effectRef idx="2">
+            <a:schemeClr val="accent1"/>
+          </a:effectRef>
+          <a:fontRef idx="minor">
+            <a:schemeClr val="lt1"/>
+          </a:fontRef>
+        </p:style>
+        <p:txBody>
+          <a:bodyPr rtlCol="0" anchor="ctr"/>
+          <a:lstStyle/>
+          <a:p>
+            <a:pPr algn="ctr"/>
+          </a:p>
+        </p:txBody>
+      </p:sp>
+      <p:sp>
+        <p:nvSpPr>
           <p:cNvPr id="11" name="TextBox 10"/>
+          <p:cNvSpPr txBox="1"/>
+          <p:nvPr/>
+        </p:nvSpPr>
+        <p:spPr>
+          <a:xfrm>
+            <a:off x="749808" y="4809743"/>
+            <a:ext cx="493776" cy="164592"/>
+          </a:xfrm>
+          <a:prstGeom prst="rect">
+            <a:avLst/>
+          </a:prstGeom>
+          <a:noFill/>
+        </p:spPr>
+        <p:txBody>
+          <a:bodyPr wrap="square" lIns="0" rIns="0" tIns="0" bIns="0" anchor="ctr">
+            <a:spAutoFit/>
+          </a:bodyPr>
+          <a:lstStyle/>
+          <a:p>
+            <a:pPr algn="r">
+              <a:spcBef>
+                <a:spcPts val="0"/>
+              </a:spcBef>
+            </a:pPr>
+            <a:r>
+              <a:rPr sz="1000" b="0" i="0">
+                <a:solidFill>
+                  <a:srgbClr val="A5A5A5"/>
+                </a:solidFill>
+                <a:latin typeface="Segoe UI"/>
+              </a:rPr>
+              <a:t>5 000</a:t>
+            </a:r>
+          </a:p>
+        </p:txBody>
+      </p:sp>
+      <p:sp>
+        <p:nvSpPr>
+          <p:cNvPr id="12" name="Rectangle 11"/>
+          <p:cNvSpPr/>
+          <p:nvPr/>
+        </p:nvSpPr>
+        <p:spPr>
+          <a:xfrm>
+            <a:off x="1316736" y="4137659"/>
+            <a:ext cx="4468215" cy="9525"/>
+          </a:xfrm>
+          <a:prstGeom prst="rect">
+            <a:avLst/>
+          </a:prstGeom>
+          <a:solidFill>
+            <a:srgbClr val="D9D9D9"/>
+          </a:solidFill>
+          <a:ln>
+            <a:noFill/>
+          </a:ln>
+          <a:effectLst/>
+        </p:spPr>
+        <p:style>
+          <a:lnRef idx="1">
+            <a:schemeClr val="accent1"/>
+          </a:lnRef>
+          <a:fillRef idx="3">
+            <a:schemeClr val="accent1"/>
+          </a:fillRef>
+          <a:effectRef idx="2">
+            <a:schemeClr val="accent1"/>
+          </a:effectRef>
+          <a:fontRef idx="minor">
+            <a:schemeClr val="lt1"/>
+          </a:fontRef>
+        </p:style>
+        <p:txBody>
+          <a:bodyPr rtlCol="0" anchor="ctr"/>
+          <a:lstStyle/>
+          <a:p>
+            <a:pPr algn="ctr"/>
+          </a:p>
+        </p:txBody>
+      </p:sp>
+      <p:sp>
+        <p:nvSpPr>
+          <p:cNvPr id="13" name="TextBox 12"/>
+          <p:cNvSpPr txBox="1"/>
+          <p:nvPr/>
+        </p:nvSpPr>
+        <p:spPr>
+          <a:xfrm>
+            <a:off x="749808" y="4055363"/>
+            <a:ext cx="493776" cy="164592"/>
+          </a:xfrm>
+          <a:prstGeom prst="rect">
+            <a:avLst/>
+          </a:prstGeom>
+          <a:noFill/>
+        </p:spPr>
+        <p:txBody>
+          <a:bodyPr wrap="square" lIns="0" rIns="0" tIns="0" bIns="0" anchor="ctr">
+            <a:spAutoFit/>
+          </a:bodyPr>
+          <a:lstStyle/>
+          <a:p>
+            <a:pPr algn="r">
+              <a:spcBef>
+                <a:spcPts val="0"/>
+              </a:spcBef>
+            </a:pPr>
+            <a:r>
+              <a:rPr sz="1000" b="0" i="0">
+                <a:solidFill>
+                  <a:srgbClr val="A5A5A5"/>
+                </a:solidFill>
+                <a:latin typeface="Segoe UI"/>
+              </a:rPr>
+              <a:t>6 000</a:t>
+            </a:r>
+          </a:p>
+        </p:txBody>
+      </p:sp>
+      <p:sp>
+        <p:nvSpPr>
+          <p:cNvPr id="14" name="Rectangle 13"/>
+          <p:cNvSpPr/>
+          <p:nvPr/>
+        </p:nvSpPr>
+        <p:spPr>
+          <a:xfrm>
+            <a:off x="1316736" y="3383279"/>
+            <a:ext cx="4468215" cy="9525"/>
+          </a:xfrm>
+          <a:prstGeom prst="rect">
+            <a:avLst/>
+          </a:prstGeom>
+          <a:solidFill>
+            <a:srgbClr val="D9D9D9"/>
+          </a:solidFill>
+          <a:ln>
+            <a:noFill/>
+          </a:ln>
+          <a:effectLst/>
+        </p:spPr>
+        <p:style>
+          <a:lnRef idx="1">
+            <a:schemeClr val="accent1"/>
+          </a:lnRef>
+          <a:fillRef idx="3">
+            <a:schemeClr val="accent1"/>
+          </a:fillRef>
+          <a:effectRef idx="2">
+            <a:schemeClr val="accent1"/>
+          </a:effectRef>
+          <a:fontRef idx="minor">
+            <a:schemeClr val="lt1"/>
+          </a:fontRef>
+        </p:style>
+        <p:txBody>
+          <a:bodyPr rtlCol="0" anchor="ctr"/>
+          <a:lstStyle/>
+          <a:p>
+            <a:pPr algn="ctr"/>
+          </a:p>
+        </p:txBody>
+      </p:sp>
+      <p:sp>
+        <p:nvSpPr>
+          <p:cNvPr id="15" name="TextBox 14"/>
+          <p:cNvSpPr txBox="1"/>
+          <p:nvPr/>
+        </p:nvSpPr>
+        <p:spPr>
+          <a:xfrm>
+            <a:off x="749808" y="3300983"/>
+            <a:ext cx="493776" cy="164592"/>
+          </a:xfrm>
+          <a:prstGeom prst="rect">
+            <a:avLst/>
+          </a:prstGeom>
+          <a:noFill/>
+        </p:spPr>
+        <p:txBody>
+          <a:bodyPr wrap="square" lIns="0" rIns="0" tIns="0" bIns="0" anchor="ctr">
+            <a:spAutoFit/>
+          </a:bodyPr>
+          <a:lstStyle/>
+          <a:p>
+            <a:pPr algn="r">
+              <a:spcBef>
+                <a:spcPts val="0"/>
+              </a:spcBef>
+            </a:pPr>
+            <a:r>
+              <a:rPr sz="1000" b="0" i="0">
+                <a:solidFill>
+                  <a:srgbClr val="A5A5A5"/>
+                </a:solidFill>
+                <a:latin typeface="Segoe UI"/>
+              </a:rPr>
+              <a:t>7 000</a:t>
+            </a:r>
+          </a:p>
+        </p:txBody>
+      </p:sp>
+      <p:sp>
+        <p:nvSpPr>
+          <p:cNvPr id="16" name="Rectangle 15"/>
+          <p:cNvSpPr/>
+          <p:nvPr/>
+        </p:nvSpPr>
+        <p:spPr>
+          <a:xfrm>
+            <a:off x="1316736" y="2628899"/>
+            <a:ext cx="4468215" cy="9525"/>
+          </a:xfrm>
+          <a:prstGeom prst="rect">
+            <a:avLst/>
+          </a:prstGeom>
+          <a:solidFill>
+            <a:srgbClr val="D9D9D9"/>
+          </a:solidFill>
+          <a:ln>
+            <a:noFill/>
+          </a:ln>
+          <a:effectLst/>
+        </p:spPr>
+        <p:style>
+          <a:lnRef idx="1">
+            <a:schemeClr val="accent1"/>
+          </a:lnRef>
+          <a:fillRef idx="3">
+            <a:schemeClr val="accent1"/>
+          </a:fillRef>
+          <a:effectRef idx="2">
+            <a:schemeClr val="accent1"/>
+          </a:effectRef>
+          <a:fontRef idx="minor">
+            <a:schemeClr val="lt1"/>
+          </a:fontRef>
+        </p:style>
+        <p:txBody>
+          <a:bodyPr rtlCol="0" anchor="ctr"/>
+          <a:lstStyle/>
+          <a:p>
+            <a:pPr algn="ctr"/>
+          </a:p>
+        </p:txBody>
+      </p:sp>
+      <p:sp>
+        <p:nvSpPr>
+          <p:cNvPr id="17" name="TextBox 16"/>
+          <p:cNvSpPr txBox="1"/>
+          <p:nvPr/>
+        </p:nvSpPr>
+        <p:spPr>
+          <a:xfrm>
+            <a:off x="749808" y="2546603"/>
+            <a:ext cx="493776" cy="164592"/>
+          </a:xfrm>
+          <a:prstGeom prst="rect">
+            <a:avLst/>
+          </a:prstGeom>
+          <a:noFill/>
+        </p:spPr>
+        <p:txBody>
+          <a:bodyPr wrap="square" lIns="0" rIns="0" tIns="0" bIns="0" anchor="ctr">
+            <a:spAutoFit/>
+          </a:bodyPr>
+          <a:lstStyle/>
+          <a:p>
+            <a:pPr algn="r">
+              <a:spcBef>
+                <a:spcPts val="0"/>
+              </a:spcBef>
+            </a:pPr>
+            <a:r>
+              <a:rPr sz="1000" b="0" i="0">
+                <a:solidFill>
+                  <a:srgbClr val="A5A5A5"/>
+                </a:solidFill>
+                <a:latin typeface="Segoe UI"/>
+              </a:rPr>
+              <a:t>8 000</a:t>
+            </a:r>
+          </a:p>
+        </p:txBody>
+      </p:sp>
+      <p:sp>
+        <p:nvSpPr>
+          <p:cNvPr id="18" name="Rectangle 17"/>
+          <p:cNvSpPr/>
+          <p:nvPr/>
+        </p:nvSpPr>
+        <p:spPr>
+          <a:xfrm>
+            <a:off x="1316736" y="1874519"/>
+            <a:ext cx="4468215" cy="9525"/>
+          </a:xfrm>
+          <a:prstGeom prst="rect">
+            <a:avLst/>
+          </a:prstGeom>
+          <a:solidFill>
+            <a:srgbClr val="D9D9D9"/>
+          </a:solidFill>
+          <a:ln>
+            <a:noFill/>
+          </a:ln>
+          <a:effectLst/>
+        </p:spPr>
+        <p:style>
+          <a:lnRef idx="1">
+            <a:schemeClr val="accent1"/>
+          </a:lnRef>
+          <a:fillRef idx="3">
+            <a:schemeClr val="accent1"/>
+          </a:fillRef>
+          <a:effectRef idx="2">
+            <a:schemeClr val="accent1"/>
+          </a:effectRef>
+          <a:fontRef idx="minor">
+            <a:schemeClr val="lt1"/>
+          </a:fontRef>
+        </p:style>
+        <p:txBody>
+          <a:bodyPr rtlCol="0" anchor="ctr"/>
+          <a:lstStyle/>
+          <a:p>
+            <a:pPr algn="ctr"/>
+          </a:p>
+        </p:txBody>
+      </p:sp>
+      <p:sp>
+        <p:nvSpPr>
+          <p:cNvPr id="19" name="TextBox 18"/>
+          <p:cNvSpPr txBox="1"/>
+          <p:nvPr/>
+        </p:nvSpPr>
+        <p:spPr>
+          <a:xfrm>
+            <a:off x="749808" y="1792223"/>
+            <a:ext cx="493776" cy="164592"/>
+          </a:xfrm>
+          <a:prstGeom prst="rect">
+            <a:avLst/>
+          </a:prstGeom>
+          <a:noFill/>
+        </p:spPr>
+        <p:txBody>
+          <a:bodyPr wrap="square" lIns="0" rIns="0" tIns="0" bIns="0" anchor="ctr">
+            <a:spAutoFit/>
+          </a:bodyPr>
+          <a:lstStyle/>
+          <a:p>
+            <a:pPr algn="r">
+              <a:spcBef>
+                <a:spcPts val="0"/>
+              </a:spcBef>
+            </a:pPr>
+            <a:r>
+              <a:rPr sz="1000" b="0" i="0">
+                <a:solidFill>
+                  <a:srgbClr val="A5A5A5"/>
+                </a:solidFill>
+                <a:latin typeface="Segoe UI"/>
+              </a:rPr>
+              <a:t>9 000</a:t>
+            </a:r>
+          </a:p>
+        </p:txBody>
+      </p:sp>
+      <p:sp>
+        <p:nvSpPr>
+          <p:cNvPr id="20" name="Rectangle 19"/>
+          <p:cNvSpPr/>
+          <p:nvPr/>
+        </p:nvSpPr>
+        <p:spPr>
+          <a:xfrm>
+            <a:off x="1640681" y="2497636"/>
+            <a:ext cx="469162" cy="254226"/>
+          </a:xfrm>
+          <a:prstGeom prst="rect">
+            <a:avLst/>
+          </a:prstGeom>
+          <a:solidFill>
+            <a:srgbClr val="223E55"/>
+          </a:solidFill>
+          <a:ln>
+            <a:noFill/>
+          </a:ln>
+          <a:effectLst/>
+        </p:spPr>
+        <p:style>
+          <a:lnRef idx="1">
+            <a:schemeClr val="accent1"/>
+          </a:lnRef>
+          <a:fillRef idx="3">
+            <a:schemeClr val="accent1"/>
+          </a:fillRef>
+          <a:effectRef idx="2">
+            <a:schemeClr val="accent1"/>
+          </a:effectRef>
+          <a:fontRef idx="minor">
+            <a:schemeClr val="lt1"/>
+          </a:fontRef>
+        </p:style>
+        <p:txBody>
+          <a:bodyPr rtlCol="0" anchor="ctr"/>
+          <a:lstStyle/>
+          <a:p>
+            <a:pPr algn="ctr"/>
+          </a:p>
+        </p:txBody>
+      </p:sp>
+      <p:sp>
+        <p:nvSpPr>
+          <p:cNvPr id="21" name="TextBox 20"/>
+          <p:cNvSpPr txBox="1"/>
+          <p:nvPr/>
+        </p:nvSpPr>
+        <p:spPr>
+          <a:xfrm>
+            <a:off x="1366361" y="2259892"/>
+            <a:ext cx="1017802" cy="201168"/>
+          </a:xfrm>
+          <a:prstGeom prst="rect">
+            <a:avLst/>
+          </a:prstGeom>
+          <a:noFill/>
+        </p:spPr>
+        <p:txBody>
+          <a:bodyPr wrap="square" lIns="0" rIns="0" tIns="0" bIns="0" anchor="ctr">
+            <a:spAutoFit/>
+          </a:bodyPr>
+          <a:lstStyle/>
+          <a:p>
+            <a:pPr algn="ctr">
+              <a:spcBef>
+                <a:spcPts val="0"/>
+              </a:spcBef>
+            </a:pPr>
+            <a:r>
+              <a:rPr sz="1100" b="1" i="0">
+                <a:solidFill>
+                  <a:srgbClr val="B10031"/>
+                </a:solidFill>
+                <a:latin typeface="Segoe UI"/>
+              </a:rPr>
+              <a:t>336</a:t>
+            </a:r>
+          </a:p>
+        </p:txBody>
+      </p:sp>
+      <p:sp>
+        <p:nvSpPr>
+          <p:cNvPr id="22" name="TextBox 21"/>
+          <p:cNvSpPr txBox="1"/>
+          <p:nvPr/>
+        </p:nvSpPr>
+        <p:spPr>
+          <a:xfrm>
+            <a:off x="1366361" y="4928615"/>
+            <a:ext cx="1017802" cy="182880"/>
+          </a:xfrm>
+          <a:prstGeom prst="rect">
+            <a:avLst/>
+          </a:prstGeom>
+          <a:noFill/>
+        </p:spPr>
+        <p:txBody>
+          <a:bodyPr wrap="square" lIns="0" rIns="0" tIns="0" bIns="0" anchor="ctr">
+            <a:spAutoFit/>
+          </a:bodyPr>
+          <a:lstStyle/>
+          <a:p>
+            <a:pPr algn="ctr">
+              <a:spcBef>
+                <a:spcPts val="0"/>
+              </a:spcBef>
+            </a:pPr>
+            <a:r>
+              <a:rPr sz="1100" b="1" i="0">
+                <a:solidFill>
+                  <a:srgbClr val="223E55"/>
+                </a:solidFill>
+                <a:latin typeface="Segoe UI"/>
+              </a:rPr>
+              <a:t>t = 0,25</a:t>
+            </a:r>
+          </a:p>
+        </p:txBody>
+      </p:sp>
+      <p:sp>
+        <p:nvSpPr>
+          <p:cNvPr id="23" name="Rectangle 22"/>
+          <p:cNvSpPr/>
+          <p:nvPr/>
+        </p:nvSpPr>
+        <p:spPr>
+          <a:xfrm>
+            <a:off x="2757735" y="2402585"/>
+            <a:ext cx="469162" cy="524294"/>
+          </a:xfrm>
+          <a:prstGeom prst="rect">
+            <a:avLst/>
+          </a:prstGeom>
+          <a:solidFill>
+            <a:srgbClr val="223E55"/>
+          </a:solidFill>
+          <a:ln>
+            <a:noFill/>
+          </a:ln>
+          <a:effectLst/>
+        </p:spPr>
+        <p:style>
+          <a:lnRef idx="1">
+            <a:schemeClr val="accent1"/>
+          </a:lnRef>
+          <a:fillRef idx="3">
+            <a:schemeClr val="accent1"/>
+          </a:fillRef>
+          <a:effectRef idx="2">
+            <a:schemeClr val="accent1"/>
+          </a:effectRef>
+          <a:fontRef idx="minor">
+            <a:schemeClr val="lt1"/>
+          </a:fontRef>
+        </p:style>
+        <p:txBody>
+          <a:bodyPr rtlCol="0" anchor="ctr"/>
+          <a:lstStyle/>
+          <a:p>
+            <a:pPr algn="ctr"/>
+          </a:p>
+        </p:txBody>
+      </p:sp>
+      <p:sp>
+        <p:nvSpPr>
+          <p:cNvPr id="24" name="TextBox 23"/>
+          <p:cNvSpPr txBox="1"/>
+          <p:nvPr/>
+        </p:nvSpPr>
+        <p:spPr>
+          <a:xfrm>
+            <a:off x="2483415" y="2164841"/>
+            <a:ext cx="1017802" cy="201168"/>
+          </a:xfrm>
+          <a:prstGeom prst="rect">
+            <a:avLst/>
+          </a:prstGeom>
+          <a:noFill/>
+        </p:spPr>
+        <p:txBody>
+          <a:bodyPr wrap="square" lIns="0" rIns="0" tIns="0" bIns="0" anchor="ctr">
+            <a:spAutoFit/>
+          </a:bodyPr>
+          <a:lstStyle/>
+          <a:p>
+            <a:pPr algn="ctr">
+              <a:spcBef>
+                <a:spcPts val="0"/>
+              </a:spcBef>
+            </a:pPr>
+            <a:r>
+              <a:rPr sz="1100" b="1" i="0">
+                <a:solidFill>
+                  <a:srgbClr val="B10031"/>
+                </a:solidFill>
+                <a:latin typeface="Segoe UI"/>
+              </a:rPr>
+              <a:t>695</a:t>
+            </a:r>
+          </a:p>
+        </p:txBody>
+      </p:sp>
+      <p:sp>
+        <p:nvSpPr>
+          <p:cNvPr id="25" name="TextBox 24"/>
+          <p:cNvSpPr txBox="1"/>
+          <p:nvPr/>
+        </p:nvSpPr>
+        <p:spPr>
+          <a:xfrm>
+            <a:off x="2483415" y="4928615"/>
+            <a:ext cx="1017802" cy="182880"/>
+          </a:xfrm>
+          <a:prstGeom prst="rect">
+            <a:avLst/>
+          </a:prstGeom>
+          <a:noFill/>
+        </p:spPr>
+        <p:txBody>
+          <a:bodyPr wrap="square" lIns="0" rIns="0" tIns="0" bIns="0" anchor="ctr">
+            <a:spAutoFit/>
+          </a:bodyPr>
+          <a:lstStyle/>
+          <a:p>
+            <a:pPr algn="ctr">
+              <a:spcBef>
+                <a:spcPts val="0"/>
+              </a:spcBef>
+            </a:pPr>
+            <a:r>
+              <a:rPr sz="1100" b="1" i="0">
+                <a:solidFill>
+                  <a:srgbClr val="223E55"/>
+                </a:solidFill>
+                <a:latin typeface="Segoe UI"/>
+              </a:rPr>
+              <a:t>t = 0,50</a:t>
+            </a:r>
+          </a:p>
+        </p:txBody>
+      </p:sp>
+      <p:sp>
+        <p:nvSpPr>
+          <p:cNvPr id="26" name="Rectangle 25"/>
+          <p:cNvSpPr/>
+          <p:nvPr/>
+        </p:nvSpPr>
+        <p:spPr>
+          <a:xfrm>
+            <a:off x="3874789" y="2303761"/>
+            <a:ext cx="469162" cy="816993"/>
+          </a:xfrm>
+          <a:prstGeom prst="rect">
+            <a:avLst/>
+          </a:prstGeom>
+          <a:solidFill>
+            <a:srgbClr val="223E55"/>
+          </a:solidFill>
+          <a:ln>
+            <a:noFill/>
+          </a:ln>
+          <a:effectLst/>
+        </p:spPr>
+        <p:style>
+          <a:lnRef idx="1">
+            <a:schemeClr val="accent1"/>
+          </a:lnRef>
+          <a:fillRef idx="3">
+            <a:schemeClr val="accent1"/>
+          </a:fillRef>
+          <a:effectRef idx="2">
+            <a:schemeClr val="accent1"/>
+          </a:effectRef>
+          <a:fontRef idx="minor">
+            <a:schemeClr val="lt1"/>
+          </a:fontRef>
+        </p:style>
+        <p:txBody>
+          <a:bodyPr rtlCol="0" anchor="ctr"/>
+          <a:lstStyle/>
+          <a:p>
+            <a:pPr algn="ctr"/>
+          </a:p>
+        </p:txBody>
+      </p:sp>
+      <p:sp>
+        <p:nvSpPr>
+          <p:cNvPr id="27" name="TextBox 26"/>
+          <p:cNvSpPr txBox="1"/>
+          <p:nvPr/>
+        </p:nvSpPr>
+        <p:spPr>
+          <a:xfrm>
+            <a:off x="3600469" y="2066017"/>
+            <a:ext cx="1017802" cy="201168"/>
+          </a:xfrm>
+          <a:prstGeom prst="rect">
+            <a:avLst/>
+          </a:prstGeom>
+          <a:noFill/>
+        </p:spPr>
+        <p:txBody>
+          <a:bodyPr wrap="square" lIns="0" rIns="0" tIns="0" bIns="0" anchor="ctr">
+            <a:spAutoFit/>
+          </a:bodyPr>
+          <a:lstStyle/>
+          <a:p>
+            <a:pPr algn="ctr">
+              <a:spcBef>
+                <a:spcPts val="0"/>
+              </a:spcBef>
+            </a:pPr>
+            <a:r>
+              <a:rPr sz="1100" b="1" i="0">
+                <a:solidFill>
+                  <a:srgbClr val="B10031"/>
+                </a:solidFill>
+                <a:latin typeface="Segoe UI"/>
+              </a:rPr>
+              <a:t>1 083</a:t>
+            </a:r>
+          </a:p>
+        </p:txBody>
+      </p:sp>
+      <p:sp>
+        <p:nvSpPr>
+          <p:cNvPr id="28" name="TextBox 27"/>
+          <p:cNvSpPr txBox="1"/>
+          <p:nvPr/>
+        </p:nvSpPr>
+        <p:spPr>
+          <a:xfrm>
+            <a:off x="3600469" y="4928615"/>
+            <a:ext cx="1017802" cy="182880"/>
+          </a:xfrm>
+          <a:prstGeom prst="rect">
+            <a:avLst/>
+          </a:prstGeom>
+          <a:noFill/>
+        </p:spPr>
+        <p:txBody>
+          <a:bodyPr wrap="square" lIns="0" rIns="0" tIns="0" bIns="0" anchor="ctr">
+            <a:spAutoFit/>
+          </a:bodyPr>
+          <a:lstStyle/>
+          <a:p>
+            <a:pPr algn="ctr">
+              <a:spcBef>
+                <a:spcPts val="0"/>
+              </a:spcBef>
+            </a:pPr>
+            <a:r>
+              <a:rPr sz="1100" b="1" i="0">
+                <a:solidFill>
+                  <a:srgbClr val="223E55"/>
+                </a:solidFill>
+                <a:latin typeface="Segoe UI"/>
+              </a:rPr>
+              <a:t>t = 0,75</a:t>
+            </a:r>
+          </a:p>
+        </p:txBody>
+      </p:sp>
+      <p:sp>
+        <p:nvSpPr>
+          <p:cNvPr id="29" name="Rectangle 28"/>
+          <p:cNvSpPr/>
+          <p:nvPr/>
+        </p:nvSpPr>
+        <p:spPr>
+          <a:xfrm>
+            <a:off x="4991843" y="2103096"/>
+            <a:ext cx="469162" cy="1387304"/>
+          </a:xfrm>
+          <a:prstGeom prst="rect">
+            <a:avLst/>
+          </a:prstGeom>
+          <a:solidFill>
+            <a:srgbClr val="223E55"/>
+          </a:solidFill>
+          <a:ln>
+            <a:noFill/>
+          </a:ln>
+          <a:effectLst/>
+        </p:spPr>
+        <p:style>
+          <a:lnRef idx="1">
+            <a:schemeClr val="accent1"/>
+          </a:lnRef>
+          <a:fillRef idx="3">
+            <a:schemeClr val="accent1"/>
+          </a:fillRef>
+          <a:effectRef idx="2">
+            <a:schemeClr val="accent1"/>
+          </a:effectRef>
+          <a:fontRef idx="minor">
+            <a:schemeClr val="lt1"/>
+          </a:fontRef>
+        </p:style>
+        <p:txBody>
+          <a:bodyPr rtlCol="0" anchor="ctr"/>
+          <a:lstStyle/>
+          <a:p>
+            <a:pPr algn="ctr"/>
+          </a:p>
+        </p:txBody>
+      </p:sp>
+      <p:sp>
+        <p:nvSpPr>
+          <p:cNvPr id="30" name="TextBox 29"/>
+          <p:cNvSpPr txBox="1"/>
+          <p:nvPr/>
+        </p:nvSpPr>
+        <p:spPr>
+          <a:xfrm>
+            <a:off x="4717523" y="1865352"/>
+            <a:ext cx="1017802" cy="201168"/>
+          </a:xfrm>
+          <a:prstGeom prst="rect">
+            <a:avLst/>
+          </a:prstGeom>
+          <a:noFill/>
+        </p:spPr>
+        <p:txBody>
+          <a:bodyPr wrap="square" lIns="0" rIns="0" tIns="0" bIns="0" anchor="ctr">
+            <a:spAutoFit/>
+          </a:bodyPr>
+          <a:lstStyle/>
+          <a:p>
+            <a:pPr algn="ctr">
+              <a:spcBef>
+                <a:spcPts val="0"/>
+              </a:spcBef>
+            </a:pPr>
+            <a:r>
+              <a:rPr sz="1100" b="1" i="0">
+                <a:solidFill>
+                  <a:srgbClr val="B10031"/>
+                </a:solidFill>
+                <a:latin typeface="Segoe UI"/>
+              </a:rPr>
+              <a:t>1 839</a:t>
+            </a:r>
+          </a:p>
+        </p:txBody>
+      </p:sp>
+      <p:sp>
+        <p:nvSpPr>
+          <p:cNvPr id="31" name="TextBox 30"/>
+          <p:cNvSpPr txBox="1"/>
+          <p:nvPr/>
+        </p:nvSpPr>
+        <p:spPr>
+          <a:xfrm>
+            <a:off x="4717523" y="4928615"/>
+            <a:ext cx="1017802" cy="182880"/>
+          </a:xfrm>
+          <a:prstGeom prst="rect">
+            <a:avLst/>
+          </a:prstGeom>
+          <a:noFill/>
+        </p:spPr>
+        <p:txBody>
+          <a:bodyPr wrap="square" lIns="0" rIns="0" tIns="0" bIns="0" anchor="ctr">
+            <a:spAutoFit/>
+          </a:bodyPr>
+          <a:lstStyle/>
+          <a:p>
+            <a:pPr algn="ctr">
+              <a:spcBef>
+                <a:spcPts val="0"/>
+              </a:spcBef>
+            </a:pPr>
+            <a:r>
+              <a:rPr sz="1100" b="1" i="0">
+                <a:solidFill>
+                  <a:srgbClr val="223E55"/>
+                </a:solidFill>
+                <a:latin typeface="Segoe UI"/>
+              </a:rPr>
+              <a:t>t = 1,00</a:t>
+            </a:r>
+          </a:p>
+        </p:txBody>
+      </p:sp>
+      <p:sp>
+        <p:nvSpPr>
+          <p:cNvPr id="32" name="Rectangle 31"/>
+          <p:cNvSpPr/>
+          <p:nvPr/>
+        </p:nvSpPr>
+        <p:spPr>
+          <a:xfrm>
+            <a:off x="1316736" y="4675059"/>
+            <a:ext cx="4468215" cy="19050"/>
+          </a:xfrm>
+          <a:prstGeom prst="rect">
+            <a:avLst/>
+          </a:prstGeom>
+          <a:solidFill>
+            <a:srgbClr val="595959"/>
+          </a:solidFill>
+          <a:ln>
+            <a:noFill/>
+          </a:ln>
+          <a:effectLst/>
+        </p:spPr>
+        <p:style>
+          <a:lnRef idx="1">
+            <a:schemeClr val="accent1"/>
+          </a:lnRef>
+          <a:fillRef idx="3">
+            <a:schemeClr val="accent1"/>
+          </a:fillRef>
+          <a:effectRef idx="2">
+            <a:schemeClr val="accent1"/>
+          </a:effectRef>
+          <a:fontRef idx="minor">
+            <a:schemeClr val="lt1"/>
+          </a:fontRef>
+        </p:style>
+        <p:txBody>
+          <a:bodyPr rtlCol="0" anchor="ctr"/>
+          <a:lstStyle/>
+          <a:p>
+            <a:pPr algn="ctr"/>
+          </a:p>
+        </p:txBody>
+      </p:sp>
+      <p:sp>
+        <p:nvSpPr>
+          <p:cNvPr id="33" name="TextBox 32"/>
+          <p:cNvSpPr txBox="1"/>
+          <p:nvPr/>
+        </p:nvSpPr>
+        <p:spPr>
+          <a:xfrm>
+            <a:off x="1316736" y="4465128"/>
+            <a:ext cx="4431639" cy="182880"/>
+          </a:xfrm>
+          <a:prstGeom prst="rect">
+            <a:avLst/>
+          </a:prstGeom>
+          <a:noFill/>
+        </p:spPr>
+        <p:txBody>
+          <a:bodyPr wrap="square" lIns="0" rIns="0" tIns="0" bIns="0" anchor="ctr">
+            <a:spAutoFit/>
+          </a:bodyPr>
+          <a:lstStyle/>
+          <a:p>
+            <a:pPr algn="r">
+              <a:spcBef>
+                <a:spcPts val="0"/>
+              </a:spcBef>
+            </a:pPr>
+            <a:r>
+              <a:rPr sz="1100" b="1" i="0">
+                <a:solidFill>
+                  <a:srgbClr val="595959"/>
+                </a:solidFill>
+                <a:latin typeface="Segoe UI"/>
+              </a:rPr>
+              <a:t>socle identifié, sans aucune contagion</a:t>
+            </a:r>
+          </a:p>
+        </p:txBody>
+      </p:sp>
+      <p:sp>
+        <p:nvSpPr>
+          <p:cNvPr id="34" name="TextBox 33"/>
+          <p:cNvSpPr txBox="1"/>
+          <p:nvPr/>
+        </p:nvSpPr>
+        <p:spPr>
+          <a:xfrm>
+            <a:off x="749808" y="1655063"/>
+            <a:ext cx="2194560" cy="182880"/>
+          </a:xfrm>
+          <a:prstGeom prst="rect">
+            <a:avLst/>
+          </a:prstGeom>
+          <a:noFill/>
+        </p:spPr>
+        <p:txBody>
+          <a:bodyPr wrap="square" lIns="0" rIns="0" tIns="0" bIns="0" anchor="ctr">
+            <a:spAutoFit/>
+          </a:bodyPr>
+          <a:lstStyle/>
+          <a:p>
+            <a:pPr algn="l">
+              <a:spcBef>
+                <a:spcPts val="0"/>
+              </a:spcBef>
+            </a:pPr>
+            <a:r>
+              <a:rPr sz="1000" b="0" i="1">
+                <a:solidFill>
+                  <a:srgbClr val="A5A5A5"/>
+                </a:solidFill>
+                <a:latin typeface="Segoe UI"/>
+              </a:rPr>
+              <a:t>capital, en M€</a:t>
+            </a:r>
+          </a:p>
+        </p:txBody>
+      </p:sp>
+      <p:sp>
+        <p:nvSpPr>
+          <p:cNvPr id="35" name="TextBox 34"/>
+          <p:cNvSpPr txBox="1"/>
+          <p:nvPr/>
+        </p:nvSpPr>
+        <p:spPr>
+          <a:xfrm>
+            <a:off x="749808" y="5303520"/>
+            <a:ext cx="5035143" cy="201168"/>
+          </a:xfrm>
+          <a:prstGeom prst="rect">
+            <a:avLst/>
+          </a:prstGeom>
+          <a:noFill/>
+        </p:spPr>
+        <p:txBody>
+          <a:bodyPr wrap="square" lIns="0" rIns="0" tIns="0" bIns="0" anchor="ctr">
+            <a:spAutoFit/>
+          </a:bodyPr>
+          <a:lstStyle/>
+          <a:p>
+            <a:pPr algn="ctr">
+              <a:spcBef>
+                <a:spcPts val="0"/>
+              </a:spcBef>
+            </a:pPr>
+            <a:r>
+              <a:rPr sz="1100" b="0" i="1">
+                <a:solidFill>
+                  <a:srgbClr val="A5A5A5"/>
+                </a:solidFill>
+                <a:latin typeface="Segoe UI"/>
+              </a:rPr>
+              <a:t>t : ignorance sur la direction, 1 = état actuel des données</a:t>
+            </a:r>
+          </a:p>
+        </p:txBody>
+      </p:sp>
+      <p:sp>
+        <p:nvSpPr>
+          <p:cNvPr id="36" name="TextBox 35"/>
           <p:cNvSpPr txBox="1"/>
           <p:nvPr/>
         </p:nvSpPr>
@@ -6712,7 +7894,7 @@
           <a:p>
             <a:pPr algn="l">
               <a:spcBef>
-                <a:spcPts val="1500"/>
+                <a:spcPts val="1400"/>
               </a:spcBef>
             </a:pPr>
             <a:r>
@@ -6728,7 +7910,7 @@
           <a:p>
             <a:pPr algn="l">
               <a:spcBef>
-                <a:spcPts val="1500"/>
+                <a:spcPts val="1400"/>
               </a:spcBef>
             </a:pPr>
             <a:r>
@@ -6738,13 +7920,29 @@
                 </a:solidFill>
                 <a:latin typeface="Segoe UI"/>
               </a:rPr>
-              <a:t>L'ignorance directionnelle se paye linéairement, et son coût maximal est connu d'avance : c'est plus favorable qu'un intervalle de confiance ordinaire.</a:t>
+              <a:t>En rouge, la largeur de la bande. Elle croît linéairement avec l'ignorance, et son maximum est connu d'avance : c'est plus favorable qu'un intervalle de confiance ordinaire.</a:t>
             </a:r>
           </a:p>
           <a:p>
             <a:pPr algn="l">
               <a:spcBef>
-                <a:spcPts val="1500"/>
+                <a:spcPts val="1400"/>
+              </a:spcBef>
+            </a:pPr>
+            <a:r>
+              <a:rPr sz="1500" b="0" i="0">
+                <a:solidFill>
+                  <a:srgbClr val="122738"/>
+                </a:solidFill>
+                <a:latin typeface="Segoe UI"/>
+              </a:rPr>
+              <a:t>Le point d'expert, 8 110 M€, est un point de cet ensemble, jamais sa mesure.</a:t>
+            </a:r>
+          </a:p>
+          <a:p>
+            <a:pPr algn="l">
+              <a:spcBef>
+                <a:spcPts val="1400"/>
               </a:spcBef>
             </a:pPr>
             <a:r>
@@ -6761,7 +7959,7 @@
       </p:sp>
       <p:sp>
         <p:nvSpPr>
-          <p:cNvPr id="12" name="Rectangle 11"/>
+          <p:cNvPr id="37" name="Rectangle 36"/>
           <p:cNvSpPr/>
           <p:nvPr/>
         </p:nvSpPr>
@@ -6805,7 +8003,7 @@
       </p:sp>
       <p:sp>
         <p:nvSpPr>
-          <p:cNvPr id="13" name="Rectangle 12"/>
+          <p:cNvPr id="38" name="Rectangle 37"/>
           <p:cNvSpPr/>
           <p:nvPr/>
         </p:nvSpPr>
@@ -6849,7 +8047,7 @@
       </p:sp>
       <p:sp>
         <p:nvSpPr>
-          <p:cNvPr id="14" name="TextBox 13"/>
+          <p:cNvPr id="39" name="TextBox 38"/>
           <p:cNvSpPr txBox="1"/>
           <p:nvPr/>
         </p:nvSpPr>
@@ -6897,7 +8095,7 @@
       </p:sp>
       <p:sp>
         <p:nvSpPr>
-          <p:cNvPr id="15" name="TextBox 14"/>
+          <p:cNvPr id="40" name="TextBox 39"/>
           <p:cNvSpPr txBox="1"/>
           <p:nvPr/>
         </p:nvSpPr>
@@ -6929,7 +8127,7 @@
                 </a:solidFill>
                 <a:latin typeface="Segoe UI"/>
               </a:rPr>
-              <a:t>Sources : mémoire, chapitre 9 ; scripts 30 et 40.</a:t>
+              <a:t>Sources : mémoire, chapitre 9 ; valeurs lues dans la sortie versionnée du script 30 ; énumération, script 40.</a:t>
             </a:r>
           </a:p>
         </p:txBody>
@@ -7264,40 +8462,16 @@
           </a:p>
         </p:txBody>
       </p:sp>
-      <p:pic>
-        <p:nvPicPr>
-          <p:cNvPr id="9" name="Picture 8" descr="S24_interaction_canaux.png"/>
-          <p:cNvPicPr>
-            <a:picLocks noChangeAspect="1"/>
-          </p:cNvPicPr>
-          <p:nvPr/>
-        </p:nvPicPr>
-        <p:blipFill>
-          <a:blip r:embed="rId3"/>
-          <a:stretch>
-            <a:fillRect/>
-          </a:stretch>
-        </p:blipFill>
-        <p:spPr>
-          <a:xfrm>
-            <a:off x="1802739" y="1389888"/>
-            <a:ext cx="8586216" cy="2862072"/>
-          </a:xfrm>
-          <a:prstGeom prst="rect">
-            <a:avLst/>
-          </a:prstGeom>
-        </p:spPr>
-      </p:pic>
-      <p:sp>
-        <p:nvSpPr>
-          <p:cNvPr id="10" name="TextBox 9"/>
+      <p:sp>
+        <p:nvSpPr>
+          <p:cNvPr id="9" name="TextBox 8"/>
           <p:cNvSpPr txBox="1"/>
           <p:nvPr/>
         </p:nvSpPr>
         <p:spPr>
           <a:xfrm>
-            <a:off x="749808" y="4434840"/>
-            <a:ext cx="10692079" cy="640080"/>
+            <a:off x="749808" y="1298448"/>
+            <a:ext cx="10692079" cy="402336"/>
           </a:xfrm>
           <a:prstGeom prst="rect">
             <a:avLst/>
@@ -7329,7 +8503,3711 @@
       </p:sp>
       <p:sp>
         <p:nvSpPr>
-          <p:cNvPr id="11" name="Rectangle 10"/>
+          <p:cNvPr id="10" name="Rectangle 9"/>
+          <p:cNvSpPr/>
+          <p:nvPr/>
+        </p:nvSpPr>
+        <p:spPr>
+          <a:xfrm>
+            <a:off x="2029968" y="1796796"/>
+            <a:ext cx="155448" cy="91440"/>
+          </a:xfrm>
+          <a:prstGeom prst="rect">
+            <a:avLst/>
+          </a:prstGeom>
+          <a:solidFill>
+            <a:srgbClr val="435B6E"/>
+          </a:solidFill>
+          <a:ln>
+            <a:noFill/>
+          </a:ln>
+          <a:effectLst/>
+        </p:spPr>
+        <p:style>
+          <a:lnRef idx="1">
+            <a:schemeClr val="accent1"/>
+          </a:lnRef>
+          <a:fillRef idx="3">
+            <a:schemeClr val="accent1"/>
+          </a:fillRef>
+          <a:effectRef idx="2">
+            <a:schemeClr val="accent1"/>
+          </a:effectRef>
+          <a:fontRef idx="minor">
+            <a:schemeClr val="lt1"/>
+          </a:fontRef>
+        </p:style>
+        <p:txBody>
+          <a:bodyPr rtlCol="0" anchor="ctr"/>
+          <a:lstStyle/>
+          <a:p>
+            <a:pPr algn="ctr"/>
+          </a:p>
+        </p:txBody>
+      </p:sp>
+      <p:sp>
+        <p:nvSpPr>
+          <p:cNvPr id="11" name="TextBox 10"/>
+          <p:cNvSpPr txBox="1"/>
+          <p:nvPr/>
+        </p:nvSpPr>
+        <p:spPr>
+          <a:xfrm>
+            <a:off x="2240280" y="1755648"/>
+            <a:ext cx="1846453" cy="182880"/>
+          </a:xfrm>
+          <a:prstGeom prst="rect">
+            <a:avLst/>
+          </a:prstGeom>
+          <a:noFill/>
+        </p:spPr>
+        <p:txBody>
+          <a:bodyPr wrap="square" lIns="0" rIns="0" tIns="0" bIns="0" anchor="ctr">
+            <a:spAutoFit/>
+          </a:bodyPr>
+          <a:lstStyle/>
+          <a:p>
+            <a:pPr algn="l">
+              <a:spcBef>
+                <a:spcPts val="0"/>
+              </a:spcBef>
+            </a:pPr>
+            <a:r>
+              <a:rPr sz="1100" b="0" i="0">
+                <a:solidFill>
+                  <a:srgbClr val="595959"/>
+                </a:solidFill>
+                <a:latin typeface="Segoe UI"/>
+              </a:rPr>
+              <a:t>isolé, depuis l'état conforme</a:t>
+            </a:r>
+          </a:p>
+        </p:txBody>
+      </p:sp>
+      <p:sp>
+        <p:nvSpPr>
+          <p:cNvPr id="12" name="Rectangle 11"/>
+          <p:cNvSpPr/>
+          <p:nvPr/>
+        </p:nvSpPr>
+        <p:spPr>
+          <a:xfrm>
+            <a:off x="4342765" y="1796796"/>
+            <a:ext cx="155448" cy="91440"/>
+          </a:xfrm>
+          <a:prstGeom prst="rect">
+            <a:avLst/>
+          </a:prstGeom>
+          <a:solidFill>
+            <a:srgbClr val="223E55"/>
+          </a:solidFill>
+          <a:ln>
+            <a:noFill/>
+          </a:ln>
+          <a:effectLst/>
+        </p:spPr>
+        <p:style>
+          <a:lnRef idx="1">
+            <a:schemeClr val="accent1"/>
+          </a:lnRef>
+          <a:fillRef idx="3">
+            <a:schemeClr val="accent1"/>
+          </a:fillRef>
+          <a:effectRef idx="2">
+            <a:schemeClr val="accent1"/>
+          </a:effectRef>
+          <a:fontRef idx="minor">
+            <a:schemeClr val="lt1"/>
+          </a:fontRef>
+        </p:style>
+        <p:txBody>
+          <a:bodyPr rtlCol="0" anchor="ctr"/>
+          <a:lstStyle/>
+          <a:p>
+            <a:pPr algn="ctr"/>
+          </a:p>
+        </p:txBody>
+      </p:sp>
+      <p:sp>
+        <p:nvSpPr>
+          <p:cNvPr id="13" name="TextBox 12"/>
+          <p:cNvSpPr txBox="1"/>
+          <p:nvPr/>
+        </p:nvSpPr>
+        <p:spPr>
+          <a:xfrm>
+            <a:off x="4553077" y="1755648"/>
+            <a:ext cx="2108241" cy="182880"/>
+          </a:xfrm>
+          <a:prstGeom prst="rect">
+            <a:avLst/>
+          </a:prstGeom>
+          <a:noFill/>
+        </p:spPr>
+        <p:txBody>
+          <a:bodyPr wrap="square" lIns="0" rIns="0" tIns="0" bIns="0" anchor="ctr">
+            <a:spAutoFit/>
+          </a:bodyPr>
+          <a:lstStyle/>
+          <a:p>
+            <a:pPr algn="l">
+              <a:spcBef>
+                <a:spcPts val="0"/>
+              </a:spcBef>
+            </a:pPr>
+            <a:r>
+              <a:rPr sz="1100" b="0" i="0">
+                <a:solidFill>
+                  <a:srgbClr val="595959"/>
+                </a:solidFill>
+                <a:latin typeface="Segoe UI"/>
+              </a:rPr>
+              <a:t>Shapley, la seule lecture additive</a:t>
+            </a:r>
+          </a:p>
+        </p:txBody>
+      </p:sp>
+      <p:sp>
+        <p:nvSpPr>
+          <p:cNvPr id="14" name="Rectangle 13"/>
+          <p:cNvSpPr/>
+          <p:nvPr/>
+        </p:nvSpPr>
+        <p:spPr>
+          <a:xfrm>
+            <a:off x="6917350" y="1796796"/>
+            <a:ext cx="155448" cy="91440"/>
+          </a:xfrm>
+          <a:prstGeom prst="rect">
+            <a:avLst/>
+          </a:prstGeom>
+          <a:solidFill>
+            <a:srgbClr val="B10031"/>
+          </a:solidFill>
+          <a:ln>
+            <a:noFill/>
+          </a:ln>
+          <a:effectLst/>
+        </p:spPr>
+        <p:style>
+          <a:lnRef idx="1">
+            <a:schemeClr val="accent1"/>
+          </a:lnRef>
+          <a:fillRef idx="3">
+            <a:schemeClr val="accent1"/>
+          </a:fillRef>
+          <a:effectRef idx="2">
+            <a:schemeClr val="accent1"/>
+          </a:effectRef>
+          <a:fontRef idx="minor">
+            <a:schemeClr val="lt1"/>
+          </a:fontRef>
+        </p:style>
+        <p:txBody>
+          <a:bodyPr rtlCol="0" anchor="ctr"/>
+          <a:lstStyle/>
+          <a:p>
+            <a:pPr algn="ctr"/>
+          </a:p>
+        </p:txBody>
+      </p:sp>
+      <p:sp>
+        <p:nvSpPr>
+          <p:cNvPr id="15" name="TextBox 14"/>
+          <p:cNvSpPr txBox="1"/>
+          <p:nvPr/>
+        </p:nvSpPr>
+        <p:spPr>
+          <a:xfrm>
+            <a:off x="7127662" y="1755648"/>
+            <a:ext cx="2454440" cy="182880"/>
+          </a:xfrm>
+          <a:prstGeom prst="rect">
+            <a:avLst/>
+          </a:prstGeom>
+          <a:noFill/>
+        </p:spPr>
+        <p:txBody>
+          <a:bodyPr wrap="square" lIns="0" rIns="0" tIns="0" bIns="0" anchor="ctr">
+            <a:spAutoFit/>
+          </a:bodyPr>
+          <a:lstStyle/>
+          <a:p>
+            <a:pPr algn="l">
+              <a:spcBef>
+                <a:spcPts val="0"/>
+              </a:spcBef>
+            </a:pPr>
+            <a:r>
+              <a:rPr sz="1100" b="0" i="0">
+                <a:solidFill>
+                  <a:srgbClr val="595959"/>
+                </a:solidFill>
+                <a:latin typeface="Segoe UI"/>
+              </a:rPr>
+              <a:t>fermeture, depuis l'état non conforme</a:t>
+            </a:r>
+          </a:p>
+        </p:txBody>
+      </p:sp>
+      <p:sp>
+        <p:nvSpPr>
+          <p:cNvPr id="16" name="TextBox 15"/>
+          <p:cNvSpPr txBox="1"/>
+          <p:nvPr/>
+        </p:nvSpPr>
+        <p:spPr>
+          <a:xfrm>
+            <a:off x="749808" y="2029968"/>
+            <a:ext cx="1115568" cy="662940"/>
+          </a:xfrm>
+          <a:prstGeom prst="rect">
+            <a:avLst/>
+          </a:prstGeom>
+          <a:noFill/>
+        </p:spPr>
+        <p:txBody>
+          <a:bodyPr wrap="square" lIns="0" rIns="0" tIns="0" bIns="0" anchor="ctr">
+            <a:spAutoFit/>
+          </a:bodyPr>
+          <a:lstStyle/>
+          <a:p>
+            <a:pPr algn="r">
+              <a:spcBef>
+                <a:spcPts val="0"/>
+              </a:spcBef>
+            </a:pPr>
+            <a:r>
+              <a:rPr sz="1200" b="1" i="0">
+                <a:solidFill>
+                  <a:srgbClr val="223E55"/>
+                </a:solidFill>
+                <a:latin typeface="Segoe UI"/>
+              </a:rPr>
+              <a:t>Fréquence</a:t>
+            </a:r>
+          </a:p>
+        </p:txBody>
+      </p:sp>
+      <p:sp>
+        <p:nvSpPr>
+          <p:cNvPr id="17" name="Rectangle 16"/>
+          <p:cNvSpPr/>
+          <p:nvPr/>
+        </p:nvSpPr>
+        <p:spPr>
+          <a:xfrm>
+            <a:off x="1938528" y="2113257"/>
+            <a:ext cx="3706993" cy="144117"/>
+          </a:xfrm>
+          <a:prstGeom prst="rect">
+            <a:avLst/>
+          </a:prstGeom>
+          <a:solidFill>
+            <a:srgbClr val="435B6E"/>
+          </a:solidFill>
+          <a:ln>
+            <a:noFill/>
+          </a:ln>
+          <a:effectLst/>
+        </p:spPr>
+        <p:style>
+          <a:lnRef idx="1">
+            <a:schemeClr val="accent1"/>
+          </a:lnRef>
+          <a:fillRef idx="3">
+            <a:schemeClr val="accent1"/>
+          </a:fillRef>
+          <a:effectRef idx="2">
+            <a:schemeClr val="accent1"/>
+          </a:effectRef>
+          <a:fontRef idx="minor">
+            <a:schemeClr val="lt1"/>
+          </a:fontRef>
+        </p:style>
+        <p:txBody>
+          <a:bodyPr rtlCol="0" anchor="ctr"/>
+          <a:lstStyle/>
+          <a:p>
+            <a:pPr algn="ctr"/>
+          </a:p>
+        </p:txBody>
+      </p:sp>
+      <p:sp>
+        <p:nvSpPr>
+          <p:cNvPr id="18" name="Rectangle 17"/>
+          <p:cNvSpPr/>
+          <p:nvPr/>
+        </p:nvSpPr>
+        <p:spPr>
+          <a:xfrm>
+            <a:off x="5248955" y="2178966"/>
+            <a:ext cx="396566" cy="12700"/>
+          </a:xfrm>
+          <a:prstGeom prst="rect">
+            <a:avLst/>
+          </a:prstGeom>
+          <a:solidFill>
+            <a:srgbClr val="FFFFFF"/>
+          </a:solidFill>
+          <a:ln>
+            <a:noFill/>
+          </a:ln>
+          <a:effectLst/>
+        </p:spPr>
+        <p:style>
+          <a:lnRef idx="1">
+            <a:schemeClr val="accent1"/>
+          </a:lnRef>
+          <a:fillRef idx="3">
+            <a:schemeClr val="accent1"/>
+          </a:fillRef>
+          <a:effectRef idx="2">
+            <a:schemeClr val="accent1"/>
+          </a:effectRef>
+          <a:fontRef idx="minor">
+            <a:schemeClr val="lt1"/>
+          </a:fontRef>
+        </p:style>
+        <p:txBody>
+          <a:bodyPr rtlCol="0" anchor="ctr"/>
+          <a:lstStyle/>
+          <a:p>
+            <a:pPr algn="ctr"/>
+          </a:p>
+        </p:txBody>
+      </p:sp>
+      <p:sp>
+        <p:nvSpPr>
+          <p:cNvPr id="19" name="Rectangle 18"/>
+          <p:cNvSpPr/>
+          <p:nvPr/>
+        </p:nvSpPr>
+        <p:spPr>
+          <a:xfrm>
+            <a:off x="5645521" y="2178966"/>
+            <a:ext cx="396566" cy="12700"/>
+          </a:xfrm>
+          <a:prstGeom prst="rect">
+            <a:avLst/>
+          </a:prstGeom>
+          <a:solidFill>
+            <a:srgbClr val="435B6E"/>
+          </a:solidFill>
+          <a:ln>
+            <a:noFill/>
+          </a:ln>
+          <a:effectLst/>
+        </p:spPr>
+        <p:style>
+          <a:lnRef idx="1">
+            <a:schemeClr val="accent1"/>
+          </a:lnRef>
+          <a:fillRef idx="3">
+            <a:schemeClr val="accent1"/>
+          </a:fillRef>
+          <a:effectRef idx="2">
+            <a:schemeClr val="accent1"/>
+          </a:effectRef>
+          <a:fontRef idx="minor">
+            <a:schemeClr val="lt1"/>
+          </a:fontRef>
+        </p:style>
+        <p:txBody>
+          <a:bodyPr rtlCol="0" anchor="ctr"/>
+          <a:lstStyle/>
+          <a:p>
+            <a:pPr algn="ctr"/>
+          </a:p>
+        </p:txBody>
+      </p:sp>
+      <p:sp>
+        <p:nvSpPr>
+          <p:cNvPr id="20" name="Rectangle 19"/>
+          <p:cNvSpPr/>
+          <p:nvPr/>
+        </p:nvSpPr>
+        <p:spPr>
+          <a:xfrm>
+            <a:off x="5242605" y="2142081"/>
+            <a:ext cx="12700" cy="86470"/>
+          </a:xfrm>
+          <a:prstGeom prst="rect">
+            <a:avLst/>
+          </a:prstGeom>
+          <a:solidFill>
+            <a:srgbClr val="FFFFFF"/>
+          </a:solidFill>
+          <a:ln>
+            <a:noFill/>
+          </a:ln>
+          <a:effectLst/>
+        </p:spPr>
+        <p:style>
+          <a:lnRef idx="1">
+            <a:schemeClr val="accent1"/>
+          </a:lnRef>
+          <a:fillRef idx="3">
+            <a:schemeClr val="accent1"/>
+          </a:fillRef>
+          <a:effectRef idx="2">
+            <a:schemeClr val="accent1"/>
+          </a:effectRef>
+          <a:fontRef idx="minor">
+            <a:schemeClr val="lt1"/>
+          </a:fontRef>
+        </p:style>
+        <p:txBody>
+          <a:bodyPr rtlCol="0" anchor="ctr"/>
+          <a:lstStyle/>
+          <a:p>
+            <a:pPr algn="ctr"/>
+          </a:p>
+        </p:txBody>
+      </p:sp>
+      <p:sp>
+        <p:nvSpPr>
+          <p:cNvPr id="21" name="Rectangle 20"/>
+          <p:cNvSpPr/>
+          <p:nvPr/>
+        </p:nvSpPr>
+        <p:spPr>
+          <a:xfrm>
+            <a:off x="6035737" y="2142081"/>
+            <a:ext cx="12700" cy="86470"/>
+          </a:xfrm>
+          <a:prstGeom prst="rect">
+            <a:avLst/>
+          </a:prstGeom>
+          <a:solidFill>
+            <a:srgbClr val="435B6E"/>
+          </a:solidFill>
+          <a:ln>
+            <a:noFill/>
+          </a:ln>
+          <a:effectLst/>
+        </p:spPr>
+        <p:style>
+          <a:lnRef idx="1">
+            <a:schemeClr val="accent1"/>
+          </a:lnRef>
+          <a:fillRef idx="3">
+            <a:schemeClr val="accent1"/>
+          </a:fillRef>
+          <a:effectRef idx="2">
+            <a:schemeClr val="accent1"/>
+          </a:effectRef>
+          <a:fontRef idx="minor">
+            <a:schemeClr val="lt1"/>
+          </a:fontRef>
+        </p:style>
+        <p:txBody>
+          <a:bodyPr rtlCol="0" anchor="ctr"/>
+          <a:lstStyle/>
+          <a:p>
+            <a:pPr algn="ctr"/>
+          </a:p>
+        </p:txBody>
+      </p:sp>
+      <p:sp>
+        <p:nvSpPr>
+          <p:cNvPr id="22" name="TextBox 21"/>
+          <p:cNvSpPr txBox="1"/>
+          <p:nvPr/>
+        </p:nvSpPr>
+        <p:spPr>
+          <a:xfrm>
+            <a:off x="6133527" y="2058393"/>
+            <a:ext cx="1127506" cy="253845"/>
+          </a:xfrm>
+          <a:prstGeom prst="rect">
+            <a:avLst/>
+          </a:prstGeom>
+          <a:noFill/>
+        </p:spPr>
+        <p:txBody>
+          <a:bodyPr wrap="square" lIns="0" rIns="0" tIns="0" bIns="0" anchor="ctr">
+            <a:spAutoFit/>
+          </a:bodyPr>
+          <a:lstStyle/>
+          <a:p>
+            <a:pPr algn="l">
+              <a:spcBef>
+                <a:spcPts val="0"/>
+              </a:spcBef>
+            </a:pPr>
+            <a:r>
+              <a:rPr sz="1100" b="1" i="0">
+                <a:solidFill>
+                  <a:srgbClr val="435B6E"/>
+                </a:solidFill>
+                <a:latin typeface="Segoe UI"/>
+              </a:rPr>
+              <a:t>4 328</a:t>
+            </a:r>
+            <a:r>
+              <a:rPr sz="1100" b="0" i="0">
+                <a:solidFill>
+                  <a:srgbClr val="595959"/>
+                </a:solidFill>
+                <a:latin typeface="Segoe UI"/>
+              </a:rPr>
+              <a:t>   ± 463</a:t>
+            </a:r>
+          </a:p>
+        </p:txBody>
+      </p:sp>
+      <p:sp>
+        <p:nvSpPr>
+          <p:cNvPr id="23" name="Rectangle 22"/>
+          <p:cNvSpPr/>
+          <p:nvPr/>
+        </p:nvSpPr>
+        <p:spPr>
+          <a:xfrm>
+            <a:off x="1938528" y="2289379"/>
+            <a:ext cx="5606742" cy="144117"/>
+          </a:xfrm>
+          <a:prstGeom prst="rect">
+            <a:avLst/>
+          </a:prstGeom>
+          <a:solidFill>
+            <a:srgbClr val="223E55"/>
+          </a:solidFill>
+          <a:ln>
+            <a:noFill/>
+          </a:ln>
+          <a:effectLst/>
+        </p:spPr>
+        <p:style>
+          <a:lnRef idx="1">
+            <a:schemeClr val="accent1"/>
+          </a:lnRef>
+          <a:fillRef idx="3">
+            <a:schemeClr val="accent1"/>
+          </a:fillRef>
+          <a:effectRef idx="2">
+            <a:schemeClr val="accent1"/>
+          </a:effectRef>
+          <a:fontRef idx="minor">
+            <a:schemeClr val="lt1"/>
+          </a:fontRef>
+        </p:style>
+        <p:txBody>
+          <a:bodyPr rtlCol="0" anchor="ctr"/>
+          <a:lstStyle/>
+          <a:p>
+            <a:pPr algn="ctr"/>
+          </a:p>
+        </p:txBody>
+      </p:sp>
+      <p:sp>
+        <p:nvSpPr>
+          <p:cNvPr id="24" name="Rectangle 23"/>
+          <p:cNvSpPr/>
+          <p:nvPr/>
+        </p:nvSpPr>
+        <p:spPr>
+          <a:xfrm>
+            <a:off x="7153843" y="2355087"/>
+            <a:ext cx="391427" cy="12700"/>
+          </a:xfrm>
+          <a:prstGeom prst="rect">
+            <a:avLst/>
+          </a:prstGeom>
+          <a:solidFill>
+            <a:srgbClr val="FFFFFF"/>
+          </a:solidFill>
+          <a:ln>
+            <a:noFill/>
+          </a:ln>
+          <a:effectLst/>
+        </p:spPr>
+        <p:style>
+          <a:lnRef idx="1">
+            <a:schemeClr val="accent1"/>
+          </a:lnRef>
+          <a:fillRef idx="3">
+            <a:schemeClr val="accent1"/>
+          </a:fillRef>
+          <a:effectRef idx="2">
+            <a:schemeClr val="accent1"/>
+          </a:effectRef>
+          <a:fontRef idx="minor">
+            <a:schemeClr val="lt1"/>
+          </a:fontRef>
+        </p:style>
+        <p:txBody>
+          <a:bodyPr rtlCol="0" anchor="ctr"/>
+          <a:lstStyle/>
+          <a:p>
+            <a:pPr algn="ctr"/>
+          </a:p>
+        </p:txBody>
+      </p:sp>
+      <p:sp>
+        <p:nvSpPr>
+          <p:cNvPr id="25" name="Rectangle 24"/>
+          <p:cNvSpPr/>
+          <p:nvPr/>
+        </p:nvSpPr>
+        <p:spPr>
+          <a:xfrm>
+            <a:off x="7545270" y="2355087"/>
+            <a:ext cx="391427" cy="12700"/>
+          </a:xfrm>
+          <a:prstGeom prst="rect">
+            <a:avLst/>
+          </a:prstGeom>
+          <a:solidFill>
+            <a:srgbClr val="223E55"/>
+          </a:solidFill>
+          <a:ln>
+            <a:noFill/>
+          </a:ln>
+          <a:effectLst/>
+        </p:spPr>
+        <p:style>
+          <a:lnRef idx="1">
+            <a:schemeClr val="accent1"/>
+          </a:lnRef>
+          <a:fillRef idx="3">
+            <a:schemeClr val="accent1"/>
+          </a:fillRef>
+          <a:effectRef idx="2">
+            <a:schemeClr val="accent1"/>
+          </a:effectRef>
+          <a:fontRef idx="minor">
+            <a:schemeClr val="lt1"/>
+          </a:fontRef>
+        </p:style>
+        <p:txBody>
+          <a:bodyPr rtlCol="0" anchor="ctr"/>
+          <a:lstStyle/>
+          <a:p>
+            <a:pPr algn="ctr"/>
+          </a:p>
+        </p:txBody>
+      </p:sp>
+      <p:sp>
+        <p:nvSpPr>
+          <p:cNvPr id="26" name="Rectangle 25"/>
+          <p:cNvSpPr/>
+          <p:nvPr/>
+        </p:nvSpPr>
+        <p:spPr>
+          <a:xfrm>
+            <a:off x="7147493" y="2318202"/>
+            <a:ext cx="12700" cy="86470"/>
+          </a:xfrm>
+          <a:prstGeom prst="rect">
+            <a:avLst/>
+          </a:prstGeom>
+          <a:solidFill>
+            <a:srgbClr val="FFFFFF"/>
+          </a:solidFill>
+          <a:ln>
+            <a:noFill/>
+          </a:ln>
+          <a:effectLst/>
+        </p:spPr>
+        <p:style>
+          <a:lnRef idx="1">
+            <a:schemeClr val="accent1"/>
+          </a:lnRef>
+          <a:fillRef idx="3">
+            <a:schemeClr val="accent1"/>
+          </a:fillRef>
+          <a:effectRef idx="2">
+            <a:schemeClr val="accent1"/>
+          </a:effectRef>
+          <a:fontRef idx="minor">
+            <a:schemeClr val="lt1"/>
+          </a:fontRef>
+        </p:style>
+        <p:txBody>
+          <a:bodyPr rtlCol="0" anchor="ctr"/>
+          <a:lstStyle/>
+          <a:p>
+            <a:pPr algn="ctr"/>
+          </a:p>
+        </p:txBody>
+      </p:sp>
+      <p:sp>
+        <p:nvSpPr>
+          <p:cNvPr id="27" name="Rectangle 26"/>
+          <p:cNvSpPr/>
+          <p:nvPr/>
+        </p:nvSpPr>
+        <p:spPr>
+          <a:xfrm>
+            <a:off x="7930347" y="2318202"/>
+            <a:ext cx="12700" cy="86470"/>
+          </a:xfrm>
+          <a:prstGeom prst="rect">
+            <a:avLst/>
+          </a:prstGeom>
+          <a:solidFill>
+            <a:srgbClr val="223E55"/>
+          </a:solidFill>
+          <a:ln>
+            <a:noFill/>
+          </a:ln>
+          <a:effectLst/>
+        </p:spPr>
+        <p:style>
+          <a:lnRef idx="1">
+            <a:schemeClr val="accent1"/>
+          </a:lnRef>
+          <a:fillRef idx="3">
+            <a:schemeClr val="accent1"/>
+          </a:fillRef>
+          <a:effectRef idx="2">
+            <a:schemeClr val="accent1"/>
+          </a:effectRef>
+          <a:fontRef idx="minor">
+            <a:schemeClr val="lt1"/>
+          </a:fontRef>
+        </p:style>
+        <p:txBody>
+          <a:bodyPr rtlCol="0" anchor="ctr"/>
+          <a:lstStyle/>
+          <a:p>
+            <a:pPr algn="ctr"/>
+          </a:p>
+        </p:txBody>
+      </p:sp>
+      <p:sp>
+        <p:nvSpPr>
+          <p:cNvPr id="28" name="TextBox 27"/>
+          <p:cNvSpPr txBox="1"/>
+          <p:nvPr/>
+        </p:nvSpPr>
+        <p:spPr>
+          <a:xfrm>
+            <a:off x="8028137" y="2234515"/>
+            <a:ext cx="1127506" cy="253845"/>
+          </a:xfrm>
+          <a:prstGeom prst="rect">
+            <a:avLst/>
+          </a:prstGeom>
+          <a:noFill/>
+        </p:spPr>
+        <p:txBody>
+          <a:bodyPr wrap="square" lIns="0" rIns="0" tIns="0" bIns="0" anchor="ctr">
+            <a:spAutoFit/>
+          </a:bodyPr>
+          <a:lstStyle/>
+          <a:p>
+            <a:pPr algn="l">
+              <a:spcBef>
+                <a:spcPts val="0"/>
+              </a:spcBef>
+            </a:pPr>
+            <a:r>
+              <a:rPr sz="1100" b="1" i="0">
+                <a:solidFill>
+                  <a:srgbClr val="223E55"/>
+                </a:solidFill>
+                <a:latin typeface="Segoe UI"/>
+              </a:rPr>
+              <a:t>6 546</a:t>
+            </a:r>
+            <a:r>
+              <a:rPr sz="1100" b="0" i="0">
+                <a:solidFill>
+                  <a:srgbClr val="595959"/>
+                </a:solidFill>
+                <a:latin typeface="Segoe UI"/>
+              </a:rPr>
+              <a:t>   ± 457</a:t>
+            </a:r>
+          </a:p>
+        </p:txBody>
+      </p:sp>
+      <p:sp>
+        <p:nvSpPr>
+          <p:cNvPr id="29" name="Rectangle 28"/>
+          <p:cNvSpPr/>
+          <p:nvPr/>
+        </p:nvSpPr>
+        <p:spPr>
+          <a:xfrm>
+            <a:off x="1938528" y="2465500"/>
+            <a:ext cx="7515912" cy="144117"/>
+          </a:xfrm>
+          <a:prstGeom prst="rect">
+            <a:avLst/>
+          </a:prstGeom>
+          <a:solidFill>
+            <a:srgbClr val="B10031"/>
+          </a:solidFill>
+          <a:ln>
+            <a:noFill/>
+          </a:ln>
+          <a:effectLst/>
+        </p:spPr>
+        <p:style>
+          <a:lnRef idx="1">
+            <a:schemeClr val="accent1"/>
+          </a:lnRef>
+          <a:fillRef idx="3">
+            <a:schemeClr val="accent1"/>
+          </a:fillRef>
+          <a:effectRef idx="2">
+            <a:schemeClr val="accent1"/>
+          </a:effectRef>
+          <a:fontRef idx="minor">
+            <a:schemeClr val="lt1"/>
+          </a:fontRef>
+        </p:style>
+        <p:txBody>
+          <a:bodyPr rtlCol="0" anchor="ctr"/>
+          <a:lstStyle/>
+          <a:p>
+            <a:pPr algn="ctr"/>
+          </a:p>
+        </p:txBody>
+      </p:sp>
+      <p:sp>
+        <p:nvSpPr>
+          <p:cNvPr id="30" name="Rectangle 29"/>
+          <p:cNvSpPr/>
+          <p:nvPr/>
+        </p:nvSpPr>
+        <p:spPr>
+          <a:xfrm>
+            <a:off x="8594500" y="2531209"/>
+            <a:ext cx="859940" cy="12700"/>
+          </a:xfrm>
+          <a:prstGeom prst="rect">
+            <a:avLst/>
+          </a:prstGeom>
+          <a:solidFill>
+            <a:srgbClr val="FFFFFF"/>
+          </a:solidFill>
+          <a:ln>
+            <a:noFill/>
+          </a:ln>
+          <a:effectLst/>
+        </p:spPr>
+        <p:style>
+          <a:lnRef idx="1">
+            <a:schemeClr val="accent1"/>
+          </a:lnRef>
+          <a:fillRef idx="3">
+            <a:schemeClr val="accent1"/>
+          </a:fillRef>
+          <a:effectRef idx="2">
+            <a:schemeClr val="accent1"/>
+          </a:effectRef>
+          <a:fontRef idx="minor">
+            <a:schemeClr val="lt1"/>
+          </a:fontRef>
+        </p:style>
+        <p:txBody>
+          <a:bodyPr rtlCol="0" anchor="ctr"/>
+          <a:lstStyle/>
+          <a:p>
+            <a:pPr algn="ctr"/>
+          </a:p>
+        </p:txBody>
+      </p:sp>
+      <p:sp>
+        <p:nvSpPr>
+          <p:cNvPr id="31" name="Rectangle 30"/>
+          <p:cNvSpPr/>
+          <p:nvPr/>
+        </p:nvSpPr>
+        <p:spPr>
+          <a:xfrm>
+            <a:off x="9454440" y="2531209"/>
+            <a:ext cx="859940" cy="12700"/>
+          </a:xfrm>
+          <a:prstGeom prst="rect">
+            <a:avLst/>
+          </a:prstGeom>
+          <a:solidFill>
+            <a:srgbClr val="B10031"/>
+          </a:solidFill>
+          <a:ln>
+            <a:noFill/>
+          </a:ln>
+          <a:effectLst/>
+        </p:spPr>
+        <p:style>
+          <a:lnRef idx="1">
+            <a:schemeClr val="accent1"/>
+          </a:lnRef>
+          <a:fillRef idx="3">
+            <a:schemeClr val="accent1"/>
+          </a:fillRef>
+          <a:effectRef idx="2">
+            <a:schemeClr val="accent1"/>
+          </a:effectRef>
+          <a:fontRef idx="minor">
+            <a:schemeClr val="lt1"/>
+          </a:fontRef>
+        </p:style>
+        <p:txBody>
+          <a:bodyPr rtlCol="0" anchor="ctr"/>
+          <a:lstStyle/>
+          <a:p>
+            <a:pPr algn="ctr"/>
+          </a:p>
+        </p:txBody>
+      </p:sp>
+      <p:sp>
+        <p:nvSpPr>
+          <p:cNvPr id="32" name="Rectangle 31"/>
+          <p:cNvSpPr/>
+          <p:nvPr/>
+        </p:nvSpPr>
+        <p:spPr>
+          <a:xfrm>
+            <a:off x="8588150" y="2494324"/>
+            <a:ext cx="12700" cy="86470"/>
+          </a:xfrm>
+          <a:prstGeom prst="rect">
+            <a:avLst/>
+          </a:prstGeom>
+          <a:solidFill>
+            <a:srgbClr val="FFFFFF"/>
+          </a:solidFill>
+          <a:ln>
+            <a:noFill/>
+          </a:ln>
+          <a:effectLst/>
+        </p:spPr>
+        <p:style>
+          <a:lnRef idx="1">
+            <a:schemeClr val="accent1"/>
+          </a:lnRef>
+          <a:fillRef idx="3">
+            <a:schemeClr val="accent1"/>
+          </a:fillRef>
+          <a:effectRef idx="2">
+            <a:schemeClr val="accent1"/>
+          </a:effectRef>
+          <a:fontRef idx="minor">
+            <a:schemeClr val="lt1"/>
+          </a:fontRef>
+        </p:style>
+        <p:txBody>
+          <a:bodyPr rtlCol="0" anchor="ctr"/>
+          <a:lstStyle/>
+          <a:p>
+            <a:pPr algn="ctr"/>
+          </a:p>
+        </p:txBody>
+      </p:sp>
+      <p:sp>
+        <p:nvSpPr>
+          <p:cNvPr id="33" name="Rectangle 32"/>
+          <p:cNvSpPr/>
+          <p:nvPr/>
+        </p:nvSpPr>
+        <p:spPr>
+          <a:xfrm>
+            <a:off x="10308031" y="2494324"/>
+            <a:ext cx="12700" cy="86470"/>
+          </a:xfrm>
+          <a:prstGeom prst="rect">
+            <a:avLst/>
+          </a:prstGeom>
+          <a:solidFill>
+            <a:srgbClr val="B10031"/>
+          </a:solidFill>
+          <a:ln>
+            <a:noFill/>
+          </a:ln>
+          <a:effectLst/>
+        </p:spPr>
+        <p:style>
+          <a:lnRef idx="1">
+            <a:schemeClr val="accent1"/>
+          </a:lnRef>
+          <a:fillRef idx="3">
+            <a:schemeClr val="accent1"/>
+          </a:fillRef>
+          <a:effectRef idx="2">
+            <a:schemeClr val="accent1"/>
+          </a:effectRef>
+          <a:fontRef idx="minor">
+            <a:schemeClr val="lt1"/>
+          </a:fontRef>
+        </p:style>
+        <p:txBody>
+          <a:bodyPr rtlCol="0" anchor="ctr"/>
+          <a:lstStyle/>
+          <a:p>
+            <a:pPr algn="ctr"/>
+          </a:p>
+        </p:txBody>
+      </p:sp>
+      <p:sp>
+        <p:nvSpPr>
+          <p:cNvPr id="34" name="TextBox 33"/>
+          <p:cNvSpPr txBox="1"/>
+          <p:nvPr/>
+        </p:nvSpPr>
+        <p:spPr>
+          <a:xfrm>
+            <a:off x="10405821" y="2410636"/>
+            <a:ext cx="1127506" cy="253845"/>
+          </a:xfrm>
+          <a:prstGeom prst="rect">
+            <a:avLst/>
+          </a:prstGeom>
+          <a:noFill/>
+        </p:spPr>
+        <p:txBody>
+          <a:bodyPr wrap="square" lIns="0" rIns="0" tIns="0" bIns="0" anchor="ctr">
+            <a:spAutoFit/>
+          </a:bodyPr>
+          <a:lstStyle/>
+          <a:p>
+            <a:pPr algn="l">
+              <a:spcBef>
+                <a:spcPts val="0"/>
+              </a:spcBef>
+            </a:pPr>
+            <a:r>
+              <a:rPr sz="1100" b="1" i="0">
+                <a:solidFill>
+                  <a:srgbClr val="B10031"/>
+                </a:solidFill>
+                <a:latin typeface="Segoe UI"/>
+              </a:rPr>
+              <a:t>8 775</a:t>
+            </a:r>
+            <a:r>
+              <a:rPr sz="1100" b="0" i="0">
+                <a:solidFill>
+                  <a:srgbClr val="595959"/>
+                </a:solidFill>
+                <a:latin typeface="Segoe UI"/>
+              </a:rPr>
+              <a:t>   ± 1 004</a:t>
+            </a:r>
+          </a:p>
+        </p:txBody>
+      </p:sp>
+      <p:sp>
+        <p:nvSpPr>
+          <p:cNvPr id="35" name="TextBox 34"/>
+          <p:cNvSpPr txBox="1"/>
+          <p:nvPr/>
+        </p:nvSpPr>
+        <p:spPr>
+          <a:xfrm>
+            <a:off x="749808" y="2692908"/>
+            <a:ext cx="1115568" cy="662940"/>
+          </a:xfrm>
+          <a:prstGeom prst="rect">
+            <a:avLst/>
+          </a:prstGeom>
+          <a:noFill/>
+        </p:spPr>
+        <p:txBody>
+          <a:bodyPr wrap="square" lIns="0" rIns="0" tIns="0" bIns="0" anchor="ctr">
+            <a:spAutoFit/>
+          </a:bodyPr>
+          <a:lstStyle/>
+          <a:p>
+            <a:pPr algn="r">
+              <a:spcBef>
+                <a:spcPts val="0"/>
+              </a:spcBef>
+            </a:pPr>
+            <a:r>
+              <a:rPr sz="1200" b="1" i="0">
+                <a:solidFill>
+                  <a:srgbClr val="223E55"/>
+                </a:solidFill>
+                <a:latin typeface="Segoe UI"/>
+              </a:rPr>
+              <a:t>Détection</a:t>
+            </a:r>
+          </a:p>
+        </p:txBody>
+      </p:sp>
+      <p:sp>
+        <p:nvSpPr>
+          <p:cNvPr id="36" name="Rectangle 35"/>
+          <p:cNvSpPr/>
+          <p:nvPr/>
+        </p:nvSpPr>
+        <p:spPr>
+          <a:xfrm>
+            <a:off x="1938528" y="2776197"/>
+            <a:ext cx="1240232" cy="144117"/>
+          </a:xfrm>
+          <a:prstGeom prst="rect">
+            <a:avLst/>
+          </a:prstGeom>
+          <a:solidFill>
+            <a:srgbClr val="435B6E"/>
+          </a:solidFill>
+          <a:ln>
+            <a:noFill/>
+          </a:ln>
+          <a:effectLst/>
+        </p:spPr>
+        <p:style>
+          <a:lnRef idx="1">
+            <a:schemeClr val="accent1"/>
+          </a:lnRef>
+          <a:fillRef idx="3">
+            <a:schemeClr val="accent1"/>
+          </a:fillRef>
+          <a:effectRef idx="2">
+            <a:schemeClr val="accent1"/>
+          </a:effectRef>
+          <a:fontRef idx="minor">
+            <a:schemeClr val="lt1"/>
+          </a:fontRef>
+        </p:style>
+        <p:txBody>
+          <a:bodyPr rtlCol="0" anchor="ctr"/>
+          <a:lstStyle/>
+          <a:p>
+            <a:pPr algn="ctr"/>
+          </a:p>
+        </p:txBody>
+      </p:sp>
+      <p:sp>
+        <p:nvSpPr>
+          <p:cNvPr id="37" name="Rectangle 36"/>
+          <p:cNvSpPr/>
+          <p:nvPr/>
+        </p:nvSpPr>
+        <p:spPr>
+          <a:xfrm>
+            <a:off x="2941506" y="2841906"/>
+            <a:ext cx="237254" cy="12700"/>
+          </a:xfrm>
+          <a:prstGeom prst="rect">
+            <a:avLst/>
+          </a:prstGeom>
+          <a:solidFill>
+            <a:srgbClr val="FFFFFF"/>
+          </a:solidFill>
+          <a:ln>
+            <a:noFill/>
+          </a:ln>
+          <a:effectLst/>
+        </p:spPr>
+        <p:style>
+          <a:lnRef idx="1">
+            <a:schemeClr val="accent1"/>
+          </a:lnRef>
+          <a:fillRef idx="3">
+            <a:schemeClr val="accent1"/>
+          </a:fillRef>
+          <a:effectRef idx="2">
+            <a:schemeClr val="accent1"/>
+          </a:effectRef>
+          <a:fontRef idx="minor">
+            <a:schemeClr val="lt1"/>
+          </a:fontRef>
+        </p:style>
+        <p:txBody>
+          <a:bodyPr rtlCol="0" anchor="ctr"/>
+          <a:lstStyle/>
+          <a:p>
+            <a:pPr algn="ctr"/>
+          </a:p>
+        </p:txBody>
+      </p:sp>
+      <p:sp>
+        <p:nvSpPr>
+          <p:cNvPr id="38" name="Rectangle 37"/>
+          <p:cNvSpPr/>
+          <p:nvPr/>
+        </p:nvSpPr>
+        <p:spPr>
+          <a:xfrm>
+            <a:off x="3178760" y="2841906"/>
+            <a:ext cx="237254" cy="12700"/>
+          </a:xfrm>
+          <a:prstGeom prst="rect">
+            <a:avLst/>
+          </a:prstGeom>
+          <a:solidFill>
+            <a:srgbClr val="435B6E"/>
+          </a:solidFill>
+          <a:ln>
+            <a:noFill/>
+          </a:ln>
+          <a:effectLst/>
+        </p:spPr>
+        <p:style>
+          <a:lnRef idx="1">
+            <a:schemeClr val="accent1"/>
+          </a:lnRef>
+          <a:fillRef idx="3">
+            <a:schemeClr val="accent1"/>
+          </a:fillRef>
+          <a:effectRef idx="2">
+            <a:schemeClr val="accent1"/>
+          </a:effectRef>
+          <a:fontRef idx="minor">
+            <a:schemeClr val="lt1"/>
+          </a:fontRef>
+        </p:style>
+        <p:txBody>
+          <a:bodyPr rtlCol="0" anchor="ctr"/>
+          <a:lstStyle/>
+          <a:p>
+            <a:pPr algn="ctr"/>
+          </a:p>
+        </p:txBody>
+      </p:sp>
+      <p:sp>
+        <p:nvSpPr>
+          <p:cNvPr id="39" name="Rectangle 38"/>
+          <p:cNvSpPr/>
+          <p:nvPr/>
+        </p:nvSpPr>
+        <p:spPr>
+          <a:xfrm>
+            <a:off x="2935156" y="2805021"/>
+            <a:ext cx="12700" cy="86470"/>
+          </a:xfrm>
+          <a:prstGeom prst="rect">
+            <a:avLst/>
+          </a:prstGeom>
+          <a:solidFill>
+            <a:srgbClr val="FFFFFF"/>
+          </a:solidFill>
+          <a:ln>
+            <a:noFill/>
+          </a:ln>
+          <a:effectLst/>
+        </p:spPr>
+        <p:style>
+          <a:lnRef idx="1">
+            <a:schemeClr val="accent1"/>
+          </a:lnRef>
+          <a:fillRef idx="3">
+            <a:schemeClr val="accent1"/>
+          </a:fillRef>
+          <a:effectRef idx="2">
+            <a:schemeClr val="accent1"/>
+          </a:effectRef>
+          <a:fontRef idx="minor">
+            <a:schemeClr val="lt1"/>
+          </a:fontRef>
+        </p:style>
+        <p:txBody>
+          <a:bodyPr rtlCol="0" anchor="ctr"/>
+          <a:lstStyle/>
+          <a:p>
+            <a:pPr algn="ctr"/>
+          </a:p>
+        </p:txBody>
+      </p:sp>
+      <p:sp>
+        <p:nvSpPr>
+          <p:cNvPr id="40" name="Rectangle 39"/>
+          <p:cNvSpPr/>
+          <p:nvPr/>
+        </p:nvSpPr>
+        <p:spPr>
+          <a:xfrm>
+            <a:off x="3409665" y="2805021"/>
+            <a:ext cx="12700" cy="86470"/>
+          </a:xfrm>
+          <a:prstGeom prst="rect">
+            <a:avLst/>
+          </a:prstGeom>
+          <a:solidFill>
+            <a:srgbClr val="435B6E"/>
+          </a:solidFill>
+          <a:ln>
+            <a:noFill/>
+          </a:ln>
+          <a:effectLst/>
+        </p:spPr>
+        <p:style>
+          <a:lnRef idx="1">
+            <a:schemeClr val="accent1"/>
+          </a:lnRef>
+          <a:fillRef idx="3">
+            <a:schemeClr val="accent1"/>
+          </a:fillRef>
+          <a:effectRef idx="2">
+            <a:schemeClr val="accent1"/>
+          </a:effectRef>
+          <a:fontRef idx="minor">
+            <a:schemeClr val="lt1"/>
+          </a:fontRef>
+        </p:style>
+        <p:txBody>
+          <a:bodyPr rtlCol="0" anchor="ctr"/>
+          <a:lstStyle/>
+          <a:p>
+            <a:pPr algn="ctr"/>
+          </a:p>
+        </p:txBody>
+      </p:sp>
+      <p:sp>
+        <p:nvSpPr>
+          <p:cNvPr id="41" name="TextBox 40"/>
+          <p:cNvSpPr txBox="1"/>
+          <p:nvPr/>
+        </p:nvSpPr>
+        <p:spPr>
+          <a:xfrm>
+            <a:off x="3507455" y="2721333"/>
+            <a:ext cx="1127506" cy="253845"/>
+          </a:xfrm>
+          <a:prstGeom prst="rect">
+            <a:avLst/>
+          </a:prstGeom>
+          <a:noFill/>
+        </p:spPr>
+        <p:txBody>
+          <a:bodyPr wrap="square" lIns="0" rIns="0" tIns="0" bIns="0" anchor="ctr">
+            <a:spAutoFit/>
+          </a:bodyPr>
+          <a:lstStyle/>
+          <a:p>
+            <a:pPr algn="l">
+              <a:spcBef>
+                <a:spcPts val="0"/>
+              </a:spcBef>
+            </a:pPr>
+            <a:r>
+              <a:rPr sz="1100" b="1" i="0">
+                <a:solidFill>
+                  <a:srgbClr val="435B6E"/>
+                </a:solidFill>
+                <a:latin typeface="Segoe UI"/>
+              </a:rPr>
+              <a:t>1 448</a:t>
+            </a:r>
+            <a:r>
+              <a:rPr sz="1100" b="0" i="0">
+                <a:solidFill>
+                  <a:srgbClr val="595959"/>
+                </a:solidFill>
+                <a:latin typeface="Segoe UI"/>
+              </a:rPr>
+              <a:t>   ± 277</a:t>
+            </a:r>
+          </a:p>
+        </p:txBody>
+      </p:sp>
+      <p:sp>
+        <p:nvSpPr>
+          <p:cNvPr id="42" name="Rectangle 41"/>
+          <p:cNvSpPr/>
+          <p:nvPr/>
+        </p:nvSpPr>
+        <p:spPr>
+          <a:xfrm>
+            <a:off x="1938528" y="2952319"/>
+            <a:ext cx="2507873" cy="144117"/>
+          </a:xfrm>
+          <a:prstGeom prst="rect">
+            <a:avLst/>
+          </a:prstGeom>
+          <a:solidFill>
+            <a:srgbClr val="223E55"/>
+          </a:solidFill>
+          <a:ln>
+            <a:noFill/>
+          </a:ln>
+          <a:effectLst/>
+        </p:spPr>
+        <p:style>
+          <a:lnRef idx="1">
+            <a:schemeClr val="accent1"/>
+          </a:lnRef>
+          <a:fillRef idx="3">
+            <a:schemeClr val="accent1"/>
+          </a:fillRef>
+          <a:effectRef idx="2">
+            <a:schemeClr val="accent1"/>
+          </a:effectRef>
+          <a:fontRef idx="minor">
+            <a:schemeClr val="lt1"/>
+          </a:fontRef>
+        </p:style>
+        <p:txBody>
+          <a:bodyPr rtlCol="0" anchor="ctr"/>
+          <a:lstStyle/>
+          <a:p>
+            <a:pPr algn="ctr"/>
+          </a:p>
+        </p:txBody>
+      </p:sp>
+      <p:sp>
+        <p:nvSpPr>
+          <p:cNvPr id="43" name="Rectangle 42"/>
+          <p:cNvSpPr/>
+          <p:nvPr/>
+        </p:nvSpPr>
+        <p:spPr>
+          <a:xfrm>
+            <a:off x="4152617" y="3018027"/>
+            <a:ext cx="293784" cy="12700"/>
+          </a:xfrm>
+          <a:prstGeom prst="rect">
+            <a:avLst/>
+          </a:prstGeom>
+          <a:solidFill>
+            <a:srgbClr val="FFFFFF"/>
+          </a:solidFill>
+          <a:ln>
+            <a:noFill/>
+          </a:ln>
+          <a:effectLst/>
+        </p:spPr>
+        <p:style>
+          <a:lnRef idx="1">
+            <a:schemeClr val="accent1"/>
+          </a:lnRef>
+          <a:fillRef idx="3">
+            <a:schemeClr val="accent1"/>
+          </a:fillRef>
+          <a:effectRef idx="2">
+            <a:schemeClr val="accent1"/>
+          </a:effectRef>
+          <a:fontRef idx="minor">
+            <a:schemeClr val="lt1"/>
+          </a:fontRef>
+        </p:style>
+        <p:txBody>
+          <a:bodyPr rtlCol="0" anchor="ctr"/>
+          <a:lstStyle/>
+          <a:p>
+            <a:pPr algn="ctr"/>
+          </a:p>
+        </p:txBody>
+      </p:sp>
+      <p:sp>
+        <p:nvSpPr>
+          <p:cNvPr id="44" name="Rectangle 43"/>
+          <p:cNvSpPr/>
+          <p:nvPr/>
+        </p:nvSpPr>
+        <p:spPr>
+          <a:xfrm>
+            <a:off x="4446401" y="3018027"/>
+            <a:ext cx="293784" cy="12700"/>
+          </a:xfrm>
+          <a:prstGeom prst="rect">
+            <a:avLst/>
+          </a:prstGeom>
+          <a:solidFill>
+            <a:srgbClr val="223E55"/>
+          </a:solidFill>
+          <a:ln>
+            <a:noFill/>
+          </a:ln>
+          <a:effectLst/>
+        </p:spPr>
+        <p:style>
+          <a:lnRef idx="1">
+            <a:schemeClr val="accent1"/>
+          </a:lnRef>
+          <a:fillRef idx="3">
+            <a:schemeClr val="accent1"/>
+          </a:fillRef>
+          <a:effectRef idx="2">
+            <a:schemeClr val="accent1"/>
+          </a:effectRef>
+          <a:fontRef idx="minor">
+            <a:schemeClr val="lt1"/>
+          </a:fontRef>
+        </p:style>
+        <p:txBody>
+          <a:bodyPr rtlCol="0" anchor="ctr"/>
+          <a:lstStyle/>
+          <a:p>
+            <a:pPr algn="ctr"/>
+          </a:p>
+        </p:txBody>
+      </p:sp>
+      <p:sp>
+        <p:nvSpPr>
+          <p:cNvPr id="45" name="Rectangle 44"/>
+          <p:cNvSpPr/>
+          <p:nvPr/>
+        </p:nvSpPr>
+        <p:spPr>
+          <a:xfrm>
+            <a:off x="4146267" y="2981142"/>
+            <a:ext cx="12700" cy="86470"/>
+          </a:xfrm>
+          <a:prstGeom prst="rect">
+            <a:avLst/>
+          </a:prstGeom>
+          <a:solidFill>
+            <a:srgbClr val="FFFFFF"/>
+          </a:solidFill>
+          <a:ln>
+            <a:noFill/>
+          </a:ln>
+          <a:effectLst/>
+        </p:spPr>
+        <p:style>
+          <a:lnRef idx="1">
+            <a:schemeClr val="accent1"/>
+          </a:lnRef>
+          <a:fillRef idx="3">
+            <a:schemeClr val="accent1"/>
+          </a:fillRef>
+          <a:effectRef idx="2">
+            <a:schemeClr val="accent1"/>
+          </a:effectRef>
+          <a:fontRef idx="minor">
+            <a:schemeClr val="lt1"/>
+          </a:fontRef>
+        </p:style>
+        <p:txBody>
+          <a:bodyPr rtlCol="0" anchor="ctr"/>
+          <a:lstStyle/>
+          <a:p>
+            <a:pPr algn="ctr"/>
+          </a:p>
+        </p:txBody>
+      </p:sp>
+      <p:sp>
+        <p:nvSpPr>
+          <p:cNvPr id="46" name="Rectangle 45"/>
+          <p:cNvSpPr/>
+          <p:nvPr/>
+        </p:nvSpPr>
+        <p:spPr>
+          <a:xfrm>
+            <a:off x="4733836" y="2981142"/>
+            <a:ext cx="12700" cy="86470"/>
+          </a:xfrm>
+          <a:prstGeom prst="rect">
+            <a:avLst/>
+          </a:prstGeom>
+          <a:solidFill>
+            <a:srgbClr val="223E55"/>
+          </a:solidFill>
+          <a:ln>
+            <a:noFill/>
+          </a:ln>
+          <a:effectLst/>
+        </p:spPr>
+        <p:style>
+          <a:lnRef idx="1">
+            <a:schemeClr val="accent1"/>
+          </a:lnRef>
+          <a:fillRef idx="3">
+            <a:schemeClr val="accent1"/>
+          </a:fillRef>
+          <a:effectRef idx="2">
+            <a:schemeClr val="accent1"/>
+          </a:effectRef>
+          <a:fontRef idx="minor">
+            <a:schemeClr val="lt1"/>
+          </a:fontRef>
+        </p:style>
+        <p:txBody>
+          <a:bodyPr rtlCol="0" anchor="ctr"/>
+          <a:lstStyle/>
+          <a:p>
+            <a:pPr algn="ctr"/>
+          </a:p>
+        </p:txBody>
+      </p:sp>
+      <p:sp>
+        <p:nvSpPr>
+          <p:cNvPr id="47" name="TextBox 46"/>
+          <p:cNvSpPr txBox="1"/>
+          <p:nvPr/>
+        </p:nvSpPr>
+        <p:spPr>
+          <a:xfrm>
+            <a:off x="4831626" y="2897455"/>
+            <a:ext cx="1127506" cy="253845"/>
+          </a:xfrm>
+          <a:prstGeom prst="rect">
+            <a:avLst/>
+          </a:prstGeom>
+          <a:noFill/>
+        </p:spPr>
+        <p:txBody>
+          <a:bodyPr wrap="square" lIns="0" rIns="0" tIns="0" bIns="0" anchor="ctr">
+            <a:spAutoFit/>
+          </a:bodyPr>
+          <a:lstStyle/>
+          <a:p>
+            <a:pPr algn="l">
+              <a:spcBef>
+                <a:spcPts val="0"/>
+              </a:spcBef>
+            </a:pPr>
+            <a:r>
+              <a:rPr sz="1100" b="1" i="0">
+                <a:solidFill>
+                  <a:srgbClr val="223E55"/>
+                </a:solidFill>
+                <a:latin typeface="Segoe UI"/>
+              </a:rPr>
+              <a:t>2 928</a:t>
+            </a:r>
+            <a:r>
+              <a:rPr sz="1100" b="0" i="0">
+                <a:solidFill>
+                  <a:srgbClr val="595959"/>
+                </a:solidFill>
+                <a:latin typeface="Segoe UI"/>
+              </a:rPr>
+              <a:t>   ± 343</a:t>
+            </a:r>
+          </a:p>
+        </p:txBody>
+      </p:sp>
+      <p:sp>
+        <p:nvSpPr>
+          <p:cNvPr id="48" name="Rectangle 47"/>
+          <p:cNvSpPr/>
+          <p:nvPr/>
+        </p:nvSpPr>
+        <p:spPr>
+          <a:xfrm>
+            <a:off x="1938528" y="3128440"/>
+            <a:ext cx="3907418" cy="144117"/>
+          </a:xfrm>
+          <a:prstGeom prst="rect">
+            <a:avLst/>
+          </a:prstGeom>
+          <a:solidFill>
+            <a:srgbClr val="B10031"/>
+          </a:solidFill>
+          <a:ln>
+            <a:noFill/>
+          </a:ln>
+          <a:effectLst/>
+        </p:spPr>
+        <p:style>
+          <a:lnRef idx="1">
+            <a:schemeClr val="accent1"/>
+          </a:lnRef>
+          <a:fillRef idx="3">
+            <a:schemeClr val="accent1"/>
+          </a:fillRef>
+          <a:effectRef idx="2">
+            <a:schemeClr val="accent1"/>
+          </a:effectRef>
+          <a:fontRef idx="minor">
+            <a:schemeClr val="lt1"/>
+          </a:fontRef>
+        </p:style>
+        <p:txBody>
+          <a:bodyPr rtlCol="0" anchor="ctr"/>
+          <a:lstStyle/>
+          <a:p>
+            <a:pPr algn="ctr"/>
+          </a:p>
+        </p:txBody>
+      </p:sp>
+      <p:sp>
+        <p:nvSpPr>
+          <p:cNvPr id="49" name="Rectangle 48"/>
+          <p:cNvSpPr/>
+          <p:nvPr/>
+        </p:nvSpPr>
+        <p:spPr>
+          <a:xfrm>
+            <a:off x="5144460" y="3194149"/>
+            <a:ext cx="701485" cy="12700"/>
+          </a:xfrm>
+          <a:prstGeom prst="rect">
+            <a:avLst/>
+          </a:prstGeom>
+          <a:solidFill>
+            <a:srgbClr val="FFFFFF"/>
+          </a:solidFill>
+          <a:ln>
+            <a:noFill/>
+          </a:ln>
+          <a:effectLst/>
+        </p:spPr>
+        <p:style>
+          <a:lnRef idx="1">
+            <a:schemeClr val="accent1"/>
+          </a:lnRef>
+          <a:fillRef idx="3">
+            <a:schemeClr val="accent1"/>
+          </a:fillRef>
+          <a:effectRef idx="2">
+            <a:schemeClr val="accent1"/>
+          </a:effectRef>
+          <a:fontRef idx="minor">
+            <a:schemeClr val="lt1"/>
+          </a:fontRef>
+        </p:style>
+        <p:txBody>
+          <a:bodyPr rtlCol="0" anchor="ctr"/>
+          <a:lstStyle/>
+          <a:p>
+            <a:pPr algn="ctr"/>
+          </a:p>
+        </p:txBody>
+      </p:sp>
+      <p:sp>
+        <p:nvSpPr>
+          <p:cNvPr id="50" name="Rectangle 49"/>
+          <p:cNvSpPr/>
+          <p:nvPr/>
+        </p:nvSpPr>
+        <p:spPr>
+          <a:xfrm>
+            <a:off x="5845946" y="3194149"/>
+            <a:ext cx="701485" cy="12700"/>
+          </a:xfrm>
+          <a:prstGeom prst="rect">
+            <a:avLst/>
+          </a:prstGeom>
+          <a:solidFill>
+            <a:srgbClr val="B10031"/>
+          </a:solidFill>
+          <a:ln>
+            <a:noFill/>
+          </a:ln>
+          <a:effectLst/>
+        </p:spPr>
+        <p:style>
+          <a:lnRef idx="1">
+            <a:schemeClr val="accent1"/>
+          </a:lnRef>
+          <a:fillRef idx="3">
+            <a:schemeClr val="accent1"/>
+          </a:fillRef>
+          <a:effectRef idx="2">
+            <a:schemeClr val="accent1"/>
+          </a:effectRef>
+          <a:fontRef idx="minor">
+            <a:schemeClr val="lt1"/>
+          </a:fontRef>
+        </p:style>
+        <p:txBody>
+          <a:bodyPr rtlCol="0" anchor="ctr"/>
+          <a:lstStyle/>
+          <a:p>
+            <a:pPr algn="ctr"/>
+          </a:p>
+        </p:txBody>
+      </p:sp>
+      <p:sp>
+        <p:nvSpPr>
+          <p:cNvPr id="51" name="Rectangle 50"/>
+          <p:cNvSpPr/>
+          <p:nvPr/>
+        </p:nvSpPr>
+        <p:spPr>
+          <a:xfrm>
+            <a:off x="5138110" y="3157264"/>
+            <a:ext cx="12700" cy="86470"/>
+          </a:xfrm>
+          <a:prstGeom prst="rect">
+            <a:avLst/>
+          </a:prstGeom>
+          <a:solidFill>
+            <a:srgbClr val="FFFFFF"/>
+          </a:solidFill>
+          <a:ln>
+            <a:noFill/>
+          </a:ln>
+          <a:effectLst/>
+        </p:spPr>
+        <p:style>
+          <a:lnRef idx="1">
+            <a:schemeClr val="accent1"/>
+          </a:lnRef>
+          <a:fillRef idx="3">
+            <a:schemeClr val="accent1"/>
+          </a:fillRef>
+          <a:effectRef idx="2">
+            <a:schemeClr val="accent1"/>
+          </a:effectRef>
+          <a:fontRef idx="minor">
+            <a:schemeClr val="lt1"/>
+          </a:fontRef>
+        </p:style>
+        <p:txBody>
+          <a:bodyPr rtlCol="0" anchor="ctr"/>
+          <a:lstStyle/>
+          <a:p>
+            <a:pPr algn="ctr"/>
+          </a:p>
+        </p:txBody>
+      </p:sp>
+      <p:sp>
+        <p:nvSpPr>
+          <p:cNvPr id="52" name="Rectangle 51"/>
+          <p:cNvSpPr/>
+          <p:nvPr/>
+        </p:nvSpPr>
+        <p:spPr>
+          <a:xfrm>
+            <a:off x="6541081" y="3157264"/>
+            <a:ext cx="12700" cy="86470"/>
+          </a:xfrm>
+          <a:prstGeom prst="rect">
+            <a:avLst/>
+          </a:prstGeom>
+          <a:solidFill>
+            <a:srgbClr val="B10031"/>
+          </a:solidFill>
+          <a:ln>
+            <a:noFill/>
+          </a:ln>
+          <a:effectLst/>
+        </p:spPr>
+        <p:style>
+          <a:lnRef idx="1">
+            <a:schemeClr val="accent1"/>
+          </a:lnRef>
+          <a:fillRef idx="3">
+            <a:schemeClr val="accent1"/>
+          </a:fillRef>
+          <a:effectRef idx="2">
+            <a:schemeClr val="accent1"/>
+          </a:effectRef>
+          <a:fontRef idx="minor">
+            <a:schemeClr val="lt1"/>
+          </a:fontRef>
+        </p:style>
+        <p:txBody>
+          <a:bodyPr rtlCol="0" anchor="ctr"/>
+          <a:lstStyle/>
+          <a:p>
+            <a:pPr algn="ctr"/>
+          </a:p>
+        </p:txBody>
+      </p:sp>
+      <p:sp>
+        <p:nvSpPr>
+          <p:cNvPr id="53" name="TextBox 52"/>
+          <p:cNvSpPr txBox="1"/>
+          <p:nvPr/>
+        </p:nvSpPr>
+        <p:spPr>
+          <a:xfrm>
+            <a:off x="6638871" y="3073576"/>
+            <a:ext cx="1127506" cy="253845"/>
+          </a:xfrm>
+          <a:prstGeom prst="rect">
+            <a:avLst/>
+          </a:prstGeom>
+          <a:noFill/>
+        </p:spPr>
+        <p:txBody>
+          <a:bodyPr wrap="square" lIns="0" rIns="0" tIns="0" bIns="0" anchor="ctr">
+            <a:spAutoFit/>
+          </a:bodyPr>
+          <a:lstStyle/>
+          <a:p>
+            <a:pPr algn="l">
+              <a:spcBef>
+                <a:spcPts val="0"/>
+              </a:spcBef>
+            </a:pPr>
+            <a:r>
+              <a:rPr sz="1100" b="1" i="0">
+                <a:solidFill>
+                  <a:srgbClr val="B10031"/>
+                </a:solidFill>
+                <a:latin typeface="Segoe UI"/>
+              </a:rPr>
+              <a:t>4 562</a:t>
+            </a:r>
+            <a:r>
+              <a:rPr sz="1100" b="0" i="0">
+                <a:solidFill>
+                  <a:srgbClr val="595959"/>
+                </a:solidFill>
+                <a:latin typeface="Segoe UI"/>
+              </a:rPr>
+              <a:t>   ± 819</a:t>
+            </a:r>
+          </a:p>
+        </p:txBody>
+      </p:sp>
+      <p:sp>
+        <p:nvSpPr>
+          <p:cNvPr id="54" name="TextBox 53"/>
+          <p:cNvSpPr txBox="1"/>
+          <p:nvPr/>
+        </p:nvSpPr>
+        <p:spPr>
+          <a:xfrm>
+            <a:off x="749808" y="3355848"/>
+            <a:ext cx="1115568" cy="662940"/>
+          </a:xfrm>
+          <a:prstGeom prst="rect">
+            <a:avLst/>
+          </a:prstGeom>
+          <a:noFill/>
+        </p:spPr>
+        <p:txBody>
+          <a:bodyPr wrap="square" lIns="0" rIns="0" tIns="0" bIns="0" anchor="ctr">
+            <a:spAutoFit/>
+          </a:bodyPr>
+          <a:lstStyle/>
+          <a:p>
+            <a:pPr algn="r">
+              <a:spcBef>
+                <a:spcPts val="0"/>
+              </a:spcBef>
+            </a:pPr>
+            <a:r>
+              <a:rPr sz="1200" b="1" i="0">
+                <a:solidFill>
+                  <a:srgbClr val="223E55"/>
+                </a:solidFill>
+                <a:latin typeface="Segoe UI"/>
+              </a:rPr>
+              <a:t>Propagation</a:t>
+            </a:r>
+          </a:p>
+        </p:txBody>
+      </p:sp>
+      <p:sp>
+        <p:nvSpPr>
+          <p:cNvPr id="55" name="Rectangle 54"/>
+          <p:cNvSpPr/>
+          <p:nvPr/>
+        </p:nvSpPr>
+        <p:spPr>
+          <a:xfrm>
+            <a:off x="1938528" y="3439137"/>
+            <a:ext cx="1398687" cy="144117"/>
+          </a:xfrm>
+          <a:prstGeom prst="rect">
+            <a:avLst/>
+          </a:prstGeom>
+          <a:solidFill>
+            <a:srgbClr val="435B6E"/>
+          </a:solidFill>
+          <a:ln>
+            <a:noFill/>
+          </a:ln>
+          <a:effectLst/>
+        </p:spPr>
+        <p:style>
+          <a:lnRef idx="1">
+            <a:schemeClr val="accent1"/>
+          </a:lnRef>
+          <a:fillRef idx="3">
+            <a:schemeClr val="accent1"/>
+          </a:fillRef>
+          <a:effectRef idx="2">
+            <a:schemeClr val="accent1"/>
+          </a:effectRef>
+          <a:fontRef idx="minor">
+            <a:schemeClr val="lt1"/>
+          </a:fontRef>
+        </p:style>
+        <p:txBody>
+          <a:bodyPr rtlCol="0" anchor="ctr"/>
+          <a:lstStyle/>
+          <a:p>
+            <a:pPr algn="ctr"/>
+          </a:p>
+        </p:txBody>
+      </p:sp>
+      <p:sp>
+        <p:nvSpPr>
+          <p:cNvPr id="56" name="Rectangle 55"/>
+          <p:cNvSpPr/>
+          <p:nvPr/>
+        </p:nvSpPr>
+        <p:spPr>
+          <a:xfrm>
+            <a:off x="3176191" y="3504846"/>
+            <a:ext cx="161024" cy="12700"/>
+          </a:xfrm>
+          <a:prstGeom prst="rect">
+            <a:avLst/>
+          </a:prstGeom>
+          <a:solidFill>
+            <a:srgbClr val="FFFFFF"/>
+          </a:solidFill>
+          <a:ln>
+            <a:noFill/>
+          </a:ln>
+          <a:effectLst/>
+        </p:spPr>
+        <p:style>
+          <a:lnRef idx="1">
+            <a:schemeClr val="accent1"/>
+          </a:lnRef>
+          <a:fillRef idx="3">
+            <a:schemeClr val="accent1"/>
+          </a:fillRef>
+          <a:effectRef idx="2">
+            <a:schemeClr val="accent1"/>
+          </a:effectRef>
+          <a:fontRef idx="minor">
+            <a:schemeClr val="lt1"/>
+          </a:fontRef>
+        </p:style>
+        <p:txBody>
+          <a:bodyPr rtlCol="0" anchor="ctr"/>
+          <a:lstStyle/>
+          <a:p>
+            <a:pPr algn="ctr"/>
+          </a:p>
+        </p:txBody>
+      </p:sp>
+      <p:sp>
+        <p:nvSpPr>
+          <p:cNvPr id="57" name="Rectangle 56"/>
+          <p:cNvSpPr/>
+          <p:nvPr/>
+        </p:nvSpPr>
+        <p:spPr>
+          <a:xfrm>
+            <a:off x="3337215" y="3504846"/>
+            <a:ext cx="161024" cy="12700"/>
+          </a:xfrm>
+          <a:prstGeom prst="rect">
+            <a:avLst/>
+          </a:prstGeom>
+          <a:solidFill>
+            <a:srgbClr val="435B6E"/>
+          </a:solidFill>
+          <a:ln>
+            <a:noFill/>
+          </a:ln>
+          <a:effectLst/>
+        </p:spPr>
+        <p:style>
+          <a:lnRef idx="1">
+            <a:schemeClr val="accent1"/>
+          </a:lnRef>
+          <a:fillRef idx="3">
+            <a:schemeClr val="accent1"/>
+          </a:fillRef>
+          <a:effectRef idx="2">
+            <a:schemeClr val="accent1"/>
+          </a:effectRef>
+          <a:fontRef idx="minor">
+            <a:schemeClr val="lt1"/>
+          </a:fontRef>
+        </p:style>
+        <p:txBody>
+          <a:bodyPr rtlCol="0" anchor="ctr"/>
+          <a:lstStyle/>
+          <a:p>
+            <a:pPr algn="ctr"/>
+          </a:p>
+        </p:txBody>
+      </p:sp>
+      <p:sp>
+        <p:nvSpPr>
+          <p:cNvPr id="58" name="Rectangle 57"/>
+          <p:cNvSpPr/>
+          <p:nvPr/>
+        </p:nvSpPr>
+        <p:spPr>
+          <a:xfrm>
+            <a:off x="3169841" y="3467961"/>
+            <a:ext cx="12700" cy="86470"/>
+          </a:xfrm>
+          <a:prstGeom prst="rect">
+            <a:avLst/>
+          </a:prstGeom>
+          <a:solidFill>
+            <a:srgbClr val="FFFFFF"/>
+          </a:solidFill>
+          <a:ln>
+            <a:noFill/>
+          </a:ln>
+          <a:effectLst/>
+        </p:spPr>
+        <p:style>
+          <a:lnRef idx="1">
+            <a:schemeClr val="accent1"/>
+          </a:lnRef>
+          <a:fillRef idx="3">
+            <a:schemeClr val="accent1"/>
+          </a:fillRef>
+          <a:effectRef idx="2">
+            <a:schemeClr val="accent1"/>
+          </a:effectRef>
+          <a:fontRef idx="minor">
+            <a:schemeClr val="lt1"/>
+          </a:fontRef>
+        </p:style>
+        <p:txBody>
+          <a:bodyPr rtlCol="0" anchor="ctr"/>
+          <a:lstStyle/>
+          <a:p>
+            <a:pPr algn="ctr"/>
+          </a:p>
+        </p:txBody>
+      </p:sp>
+      <p:sp>
+        <p:nvSpPr>
+          <p:cNvPr id="59" name="Rectangle 58"/>
+          <p:cNvSpPr/>
+          <p:nvPr/>
+        </p:nvSpPr>
+        <p:spPr>
+          <a:xfrm>
+            <a:off x="3491890" y="3467961"/>
+            <a:ext cx="12700" cy="86470"/>
+          </a:xfrm>
+          <a:prstGeom prst="rect">
+            <a:avLst/>
+          </a:prstGeom>
+          <a:solidFill>
+            <a:srgbClr val="435B6E"/>
+          </a:solidFill>
+          <a:ln>
+            <a:noFill/>
+          </a:ln>
+          <a:effectLst/>
+        </p:spPr>
+        <p:style>
+          <a:lnRef idx="1">
+            <a:schemeClr val="accent1"/>
+          </a:lnRef>
+          <a:fillRef idx="3">
+            <a:schemeClr val="accent1"/>
+          </a:fillRef>
+          <a:effectRef idx="2">
+            <a:schemeClr val="accent1"/>
+          </a:effectRef>
+          <a:fontRef idx="minor">
+            <a:schemeClr val="lt1"/>
+          </a:fontRef>
+        </p:style>
+        <p:txBody>
+          <a:bodyPr rtlCol="0" anchor="ctr"/>
+          <a:lstStyle/>
+          <a:p>
+            <a:pPr algn="ctr"/>
+          </a:p>
+        </p:txBody>
+      </p:sp>
+      <p:sp>
+        <p:nvSpPr>
+          <p:cNvPr id="60" name="TextBox 59"/>
+          <p:cNvSpPr txBox="1"/>
+          <p:nvPr/>
+        </p:nvSpPr>
+        <p:spPr>
+          <a:xfrm>
+            <a:off x="3589680" y="3384273"/>
+            <a:ext cx="1127506" cy="253845"/>
+          </a:xfrm>
+          <a:prstGeom prst="rect">
+            <a:avLst/>
+          </a:prstGeom>
+          <a:noFill/>
+        </p:spPr>
+        <p:txBody>
+          <a:bodyPr wrap="square" lIns="0" rIns="0" tIns="0" bIns="0" anchor="ctr">
+            <a:spAutoFit/>
+          </a:bodyPr>
+          <a:lstStyle/>
+          <a:p>
+            <a:pPr algn="l">
+              <a:spcBef>
+                <a:spcPts val="0"/>
+              </a:spcBef>
+            </a:pPr>
+            <a:r>
+              <a:rPr sz="1100" b="1" i="0">
+                <a:solidFill>
+                  <a:srgbClr val="435B6E"/>
+                </a:solidFill>
+                <a:latin typeface="Segoe UI"/>
+              </a:rPr>
+              <a:t>1 633</a:t>
+            </a:r>
+            <a:r>
+              <a:rPr sz="1100" b="0" i="0">
+                <a:solidFill>
+                  <a:srgbClr val="595959"/>
+                </a:solidFill>
+                <a:latin typeface="Segoe UI"/>
+              </a:rPr>
+              <a:t>   ± 188</a:t>
+            </a:r>
+          </a:p>
+        </p:txBody>
+      </p:sp>
+      <p:sp>
+        <p:nvSpPr>
+          <p:cNvPr id="61" name="Rectangle 60"/>
+          <p:cNvSpPr/>
+          <p:nvPr/>
+        </p:nvSpPr>
+        <p:spPr>
+          <a:xfrm>
+            <a:off x="1938528" y="3615259"/>
+            <a:ext cx="1788401" cy="144117"/>
+          </a:xfrm>
+          <a:prstGeom prst="rect">
+            <a:avLst/>
+          </a:prstGeom>
+          <a:solidFill>
+            <a:srgbClr val="223E55"/>
+          </a:solidFill>
+          <a:ln>
+            <a:noFill/>
+          </a:ln>
+          <a:effectLst/>
+        </p:spPr>
+        <p:style>
+          <a:lnRef idx="1">
+            <a:schemeClr val="accent1"/>
+          </a:lnRef>
+          <a:fillRef idx="3">
+            <a:schemeClr val="accent1"/>
+          </a:fillRef>
+          <a:effectRef idx="2">
+            <a:schemeClr val="accent1"/>
+          </a:effectRef>
+          <a:fontRef idx="minor">
+            <a:schemeClr val="lt1"/>
+          </a:fontRef>
+        </p:style>
+        <p:txBody>
+          <a:bodyPr rtlCol="0" anchor="ctr"/>
+          <a:lstStyle/>
+          <a:p>
+            <a:pPr algn="ctr"/>
+          </a:p>
+        </p:txBody>
+      </p:sp>
+      <p:sp>
+        <p:nvSpPr>
+          <p:cNvPr id="62" name="Rectangle 61"/>
+          <p:cNvSpPr/>
+          <p:nvPr/>
+        </p:nvSpPr>
+        <p:spPr>
+          <a:xfrm>
+            <a:off x="3596739" y="3680967"/>
+            <a:ext cx="130190" cy="12700"/>
+          </a:xfrm>
+          <a:prstGeom prst="rect">
+            <a:avLst/>
+          </a:prstGeom>
+          <a:solidFill>
+            <a:srgbClr val="FFFFFF"/>
+          </a:solidFill>
+          <a:ln>
+            <a:noFill/>
+          </a:ln>
+          <a:effectLst/>
+        </p:spPr>
+        <p:style>
+          <a:lnRef idx="1">
+            <a:schemeClr val="accent1"/>
+          </a:lnRef>
+          <a:fillRef idx="3">
+            <a:schemeClr val="accent1"/>
+          </a:fillRef>
+          <a:effectRef idx="2">
+            <a:schemeClr val="accent1"/>
+          </a:effectRef>
+          <a:fontRef idx="minor">
+            <a:schemeClr val="lt1"/>
+          </a:fontRef>
+        </p:style>
+        <p:txBody>
+          <a:bodyPr rtlCol="0" anchor="ctr"/>
+          <a:lstStyle/>
+          <a:p>
+            <a:pPr algn="ctr"/>
+          </a:p>
+        </p:txBody>
+      </p:sp>
+      <p:sp>
+        <p:nvSpPr>
+          <p:cNvPr id="63" name="Rectangle 62"/>
+          <p:cNvSpPr/>
+          <p:nvPr/>
+        </p:nvSpPr>
+        <p:spPr>
+          <a:xfrm>
+            <a:off x="3726929" y="3680967"/>
+            <a:ext cx="130190" cy="12700"/>
+          </a:xfrm>
+          <a:prstGeom prst="rect">
+            <a:avLst/>
+          </a:prstGeom>
+          <a:solidFill>
+            <a:srgbClr val="223E55"/>
+          </a:solidFill>
+          <a:ln>
+            <a:noFill/>
+          </a:ln>
+          <a:effectLst/>
+        </p:spPr>
+        <p:style>
+          <a:lnRef idx="1">
+            <a:schemeClr val="accent1"/>
+          </a:lnRef>
+          <a:fillRef idx="3">
+            <a:schemeClr val="accent1"/>
+          </a:fillRef>
+          <a:effectRef idx="2">
+            <a:schemeClr val="accent1"/>
+          </a:effectRef>
+          <a:fontRef idx="minor">
+            <a:schemeClr val="lt1"/>
+          </a:fontRef>
+        </p:style>
+        <p:txBody>
+          <a:bodyPr rtlCol="0" anchor="ctr"/>
+          <a:lstStyle/>
+          <a:p>
+            <a:pPr algn="ctr"/>
+          </a:p>
+        </p:txBody>
+      </p:sp>
+      <p:sp>
+        <p:nvSpPr>
+          <p:cNvPr id="64" name="Rectangle 63"/>
+          <p:cNvSpPr/>
+          <p:nvPr/>
+        </p:nvSpPr>
+        <p:spPr>
+          <a:xfrm>
+            <a:off x="3590389" y="3644082"/>
+            <a:ext cx="12700" cy="86470"/>
+          </a:xfrm>
+          <a:prstGeom prst="rect">
+            <a:avLst/>
+          </a:prstGeom>
+          <a:solidFill>
+            <a:srgbClr val="FFFFFF"/>
+          </a:solidFill>
+          <a:ln>
+            <a:noFill/>
+          </a:ln>
+          <a:effectLst/>
+        </p:spPr>
+        <p:style>
+          <a:lnRef idx="1">
+            <a:schemeClr val="accent1"/>
+          </a:lnRef>
+          <a:fillRef idx="3">
+            <a:schemeClr val="accent1"/>
+          </a:fillRef>
+          <a:effectRef idx="2">
+            <a:schemeClr val="accent1"/>
+          </a:effectRef>
+          <a:fontRef idx="minor">
+            <a:schemeClr val="lt1"/>
+          </a:fontRef>
+        </p:style>
+        <p:txBody>
+          <a:bodyPr rtlCol="0" anchor="ctr"/>
+          <a:lstStyle/>
+          <a:p>
+            <a:pPr algn="ctr"/>
+          </a:p>
+        </p:txBody>
+      </p:sp>
+      <p:sp>
+        <p:nvSpPr>
+          <p:cNvPr id="65" name="Rectangle 64"/>
+          <p:cNvSpPr/>
+          <p:nvPr/>
+        </p:nvSpPr>
+        <p:spPr>
+          <a:xfrm>
+            <a:off x="3850769" y="3644082"/>
+            <a:ext cx="12700" cy="86470"/>
+          </a:xfrm>
+          <a:prstGeom prst="rect">
+            <a:avLst/>
+          </a:prstGeom>
+          <a:solidFill>
+            <a:srgbClr val="223E55"/>
+          </a:solidFill>
+          <a:ln>
+            <a:noFill/>
+          </a:ln>
+          <a:effectLst/>
+        </p:spPr>
+        <p:style>
+          <a:lnRef idx="1">
+            <a:schemeClr val="accent1"/>
+          </a:lnRef>
+          <a:fillRef idx="3">
+            <a:schemeClr val="accent1"/>
+          </a:fillRef>
+          <a:effectRef idx="2">
+            <a:schemeClr val="accent1"/>
+          </a:effectRef>
+          <a:fontRef idx="minor">
+            <a:schemeClr val="lt1"/>
+          </a:fontRef>
+        </p:style>
+        <p:txBody>
+          <a:bodyPr rtlCol="0" anchor="ctr"/>
+          <a:lstStyle/>
+          <a:p>
+            <a:pPr algn="ctr"/>
+          </a:p>
+        </p:txBody>
+      </p:sp>
+      <p:sp>
+        <p:nvSpPr>
+          <p:cNvPr id="66" name="TextBox 65"/>
+          <p:cNvSpPr txBox="1"/>
+          <p:nvPr/>
+        </p:nvSpPr>
+        <p:spPr>
+          <a:xfrm>
+            <a:off x="3948559" y="3560395"/>
+            <a:ext cx="1127506" cy="253845"/>
+          </a:xfrm>
+          <a:prstGeom prst="rect">
+            <a:avLst/>
+          </a:prstGeom>
+          <a:noFill/>
+        </p:spPr>
+        <p:txBody>
+          <a:bodyPr wrap="square" lIns="0" rIns="0" tIns="0" bIns="0" anchor="ctr">
+            <a:spAutoFit/>
+          </a:bodyPr>
+          <a:lstStyle/>
+          <a:p>
+            <a:pPr algn="l">
+              <a:spcBef>
+                <a:spcPts val="0"/>
+              </a:spcBef>
+            </a:pPr>
+            <a:r>
+              <a:rPr sz="1100" b="1" i="0">
+                <a:solidFill>
+                  <a:srgbClr val="223E55"/>
+                </a:solidFill>
+                <a:latin typeface="Segoe UI"/>
+              </a:rPr>
+              <a:t>2 088</a:t>
+            </a:r>
+            <a:r>
+              <a:rPr sz="1100" b="0" i="0">
+                <a:solidFill>
+                  <a:srgbClr val="595959"/>
+                </a:solidFill>
+                <a:latin typeface="Segoe UI"/>
+              </a:rPr>
+              <a:t>   ± 152</a:t>
+            </a:r>
+          </a:p>
+        </p:txBody>
+      </p:sp>
+      <p:sp>
+        <p:nvSpPr>
+          <p:cNvPr id="67" name="Rectangle 66"/>
+          <p:cNvSpPr/>
+          <p:nvPr/>
+        </p:nvSpPr>
+        <p:spPr>
+          <a:xfrm>
+            <a:off x="1938528" y="3791380"/>
+            <a:ext cx="2057347" cy="144117"/>
+          </a:xfrm>
+          <a:prstGeom prst="rect">
+            <a:avLst/>
+          </a:prstGeom>
+          <a:solidFill>
+            <a:srgbClr val="B10031"/>
+          </a:solidFill>
+          <a:ln>
+            <a:noFill/>
+          </a:ln>
+          <a:effectLst/>
+        </p:spPr>
+        <p:style>
+          <a:lnRef idx="1">
+            <a:schemeClr val="accent1"/>
+          </a:lnRef>
+          <a:fillRef idx="3">
+            <a:schemeClr val="accent1"/>
+          </a:fillRef>
+          <a:effectRef idx="2">
+            <a:schemeClr val="accent1"/>
+          </a:effectRef>
+          <a:fontRef idx="minor">
+            <a:schemeClr val="lt1"/>
+          </a:fontRef>
+        </p:style>
+        <p:txBody>
+          <a:bodyPr rtlCol="0" anchor="ctr"/>
+          <a:lstStyle/>
+          <a:p>
+            <a:pPr algn="ctr"/>
+          </a:p>
+        </p:txBody>
+      </p:sp>
+      <p:sp>
+        <p:nvSpPr>
+          <p:cNvPr id="68" name="Rectangle 67"/>
+          <p:cNvSpPr/>
+          <p:nvPr/>
+        </p:nvSpPr>
+        <p:spPr>
+          <a:xfrm>
+            <a:off x="3617295" y="3857089"/>
+            <a:ext cx="378579" cy="12700"/>
+          </a:xfrm>
+          <a:prstGeom prst="rect">
+            <a:avLst/>
+          </a:prstGeom>
+          <a:solidFill>
+            <a:srgbClr val="FFFFFF"/>
+          </a:solidFill>
+          <a:ln>
+            <a:noFill/>
+          </a:ln>
+          <a:effectLst/>
+        </p:spPr>
+        <p:style>
+          <a:lnRef idx="1">
+            <a:schemeClr val="accent1"/>
+          </a:lnRef>
+          <a:fillRef idx="3">
+            <a:schemeClr val="accent1"/>
+          </a:fillRef>
+          <a:effectRef idx="2">
+            <a:schemeClr val="accent1"/>
+          </a:effectRef>
+          <a:fontRef idx="minor">
+            <a:schemeClr val="lt1"/>
+          </a:fontRef>
+        </p:style>
+        <p:txBody>
+          <a:bodyPr rtlCol="0" anchor="ctr"/>
+          <a:lstStyle/>
+          <a:p>
+            <a:pPr algn="ctr"/>
+          </a:p>
+        </p:txBody>
+      </p:sp>
+      <p:sp>
+        <p:nvSpPr>
+          <p:cNvPr id="69" name="Rectangle 68"/>
+          <p:cNvSpPr/>
+          <p:nvPr/>
+        </p:nvSpPr>
+        <p:spPr>
+          <a:xfrm>
+            <a:off x="3995875" y="3857089"/>
+            <a:ext cx="378579" cy="12700"/>
+          </a:xfrm>
+          <a:prstGeom prst="rect">
+            <a:avLst/>
+          </a:prstGeom>
+          <a:solidFill>
+            <a:srgbClr val="B10031"/>
+          </a:solidFill>
+          <a:ln>
+            <a:noFill/>
+          </a:ln>
+          <a:effectLst/>
+        </p:spPr>
+        <p:style>
+          <a:lnRef idx="1">
+            <a:schemeClr val="accent1"/>
+          </a:lnRef>
+          <a:fillRef idx="3">
+            <a:schemeClr val="accent1"/>
+          </a:fillRef>
+          <a:effectRef idx="2">
+            <a:schemeClr val="accent1"/>
+          </a:effectRef>
+          <a:fontRef idx="minor">
+            <a:schemeClr val="lt1"/>
+          </a:fontRef>
+        </p:style>
+        <p:txBody>
+          <a:bodyPr rtlCol="0" anchor="ctr"/>
+          <a:lstStyle/>
+          <a:p>
+            <a:pPr algn="ctr"/>
+          </a:p>
+        </p:txBody>
+      </p:sp>
+      <p:sp>
+        <p:nvSpPr>
+          <p:cNvPr id="70" name="Rectangle 69"/>
+          <p:cNvSpPr/>
+          <p:nvPr/>
+        </p:nvSpPr>
+        <p:spPr>
+          <a:xfrm>
+            <a:off x="3610945" y="3820204"/>
+            <a:ext cx="12700" cy="86470"/>
+          </a:xfrm>
+          <a:prstGeom prst="rect">
+            <a:avLst/>
+          </a:prstGeom>
+          <a:solidFill>
+            <a:srgbClr val="FFFFFF"/>
+          </a:solidFill>
+          <a:ln>
+            <a:noFill/>
+          </a:ln>
+          <a:effectLst/>
+        </p:spPr>
+        <p:style>
+          <a:lnRef idx="1">
+            <a:schemeClr val="accent1"/>
+          </a:lnRef>
+          <a:fillRef idx="3">
+            <a:schemeClr val="accent1"/>
+          </a:fillRef>
+          <a:effectRef idx="2">
+            <a:schemeClr val="accent1"/>
+          </a:effectRef>
+          <a:fontRef idx="minor">
+            <a:schemeClr val="lt1"/>
+          </a:fontRef>
+        </p:style>
+        <p:txBody>
+          <a:bodyPr rtlCol="0" anchor="ctr"/>
+          <a:lstStyle/>
+          <a:p>
+            <a:pPr algn="ctr"/>
+          </a:p>
+        </p:txBody>
+      </p:sp>
+      <p:sp>
+        <p:nvSpPr>
+          <p:cNvPr id="71" name="Rectangle 70"/>
+          <p:cNvSpPr/>
+          <p:nvPr/>
+        </p:nvSpPr>
+        <p:spPr>
+          <a:xfrm>
+            <a:off x="4368104" y="3820204"/>
+            <a:ext cx="12700" cy="86470"/>
+          </a:xfrm>
+          <a:prstGeom prst="rect">
+            <a:avLst/>
+          </a:prstGeom>
+          <a:solidFill>
+            <a:srgbClr val="B10031"/>
+          </a:solidFill>
+          <a:ln>
+            <a:noFill/>
+          </a:ln>
+          <a:effectLst/>
+        </p:spPr>
+        <p:style>
+          <a:lnRef idx="1">
+            <a:schemeClr val="accent1"/>
+          </a:lnRef>
+          <a:fillRef idx="3">
+            <a:schemeClr val="accent1"/>
+          </a:fillRef>
+          <a:effectRef idx="2">
+            <a:schemeClr val="accent1"/>
+          </a:effectRef>
+          <a:fontRef idx="minor">
+            <a:schemeClr val="lt1"/>
+          </a:fontRef>
+        </p:style>
+        <p:txBody>
+          <a:bodyPr rtlCol="0" anchor="ctr"/>
+          <a:lstStyle/>
+          <a:p>
+            <a:pPr algn="ctr"/>
+          </a:p>
+        </p:txBody>
+      </p:sp>
+      <p:sp>
+        <p:nvSpPr>
+          <p:cNvPr id="72" name="TextBox 71"/>
+          <p:cNvSpPr txBox="1"/>
+          <p:nvPr/>
+        </p:nvSpPr>
+        <p:spPr>
+          <a:xfrm>
+            <a:off x="4465894" y="3736516"/>
+            <a:ext cx="1127506" cy="253845"/>
+          </a:xfrm>
+          <a:prstGeom prst="rect">
+            <a:avLst/>
+          </a:prstGeom>
+          <a:noFill/>
+        </p:spPr>
+        <p:txBody>
+          <a:bodyPr wrap="square" lIns="0" rIns="0" tIns="0" bIns="0" anchor="ctr">
+            <a:spAutoFit/>
+          </a:bodyPr>
+          <a:lstStyle/>
+          <a:p>
+            <a:pPr algn="l">
+              <a:spcBef>
+                <a:spcPts val="0"/>
+              </a:spcBef>
+            </a:pPr>
+            <a:r>
+              <a:rPr sz="1100" b="1" i="0">
+                <a:solidFill>
+                  <a:srgbClr val="B10031"/>
+                </a:solidFill>
+                <a:latin typeface="Segoe UI"/>
+              </a:rPr>
+              <a:t>2 402</a:t>
+            </a:r>
+            <a:r>
+              <a:rPr sz="1100" b="0" i="0">
+                <a:solidFill>
+                  <a:srgbClr val="595959"/>
+                </a:solidFill>
+                <a:latin typeface="Segoe UI"/>
+              </a:rPr>
+              <a:t>   ± 442</a:t>
+            </a:r>
+          </a:p>
+        </p:txBody>
+      </p:sp>
+      <p:sp>
+        <p:nvSpPr>
+          <p:cNvPr id="73" name="TextBox 72"/>
+          <p:cNvSpPr txBox="1"/>
+          <p:nvPr/>
+        </p:nvSpPr>
+        <p:spPr>
+          <a:xfrm>
+            <a:off x="749808" y="4018788"/>
+            <a:ext cx="1115568" cy="662940"/>
+          </a:xfrm>
+          <a:prstGeom prst="rect">
+            <a:avLst/>
+          </a:prstGeom>
+          <a:noFill/>
+        </p:spPr>
+        <p:txBody>
+          <a:bodyPr wrap="square" lIns="0" rIns="0" tIns="0" bIns="0" anchor="ctr">
+            <a:spAutoFit/>
+          </a:bodyPr>
+          <a:lstStyle/>
+          <a:p>
+            <a:pPr algn="r">
+              <a:spcBef>
+                <a:spcPts val="0"/>
+              </a:spcBef>
+            </a:pPr>
+            <a:r>
+              <a:rPr sz="1200" b="1" i="0">
+                <a:solidFill>
+                  <a:srgbClr val="223E55"/>
+                </a:solidFill>
+                <a:latin typeface="Segoe UI"/>
+              </a:rPr>
+              <a:t>Accumulation</a:t>
+            </a:r>
+          </a:p>
+        </p:txBody>
+      </p:sp>
+      <p:sp>
+        <p:nvSpPr>
+          <p:cNvPr id="74" name="Rectangle 73"/>
+          <p:cNvSpPr/>
+          <p:nvPr/>
+        </p:nvSpPr>
+        <p:spPr>
+          <a:xfrm>
+            <a:off x="1938528" y="4102077"/>
+            <a:ext cx="1480056" cy="144117"/>
+          </a:xfrm>
+          <a:prstGeom prst="rect">
+            <a:avLst/>
+          </a:prstGeom>
+          <a:solidFill>
+            <a:srgbClr val="435B6E"/>
+          </a:solidFill>
+          <a:ln>
+            <a:noFill/>
+          </a:ln>
+          <a:effectLst/>
+        </p:spPr>
+        <p:style>
+          <a:lnRef idx="1">
+            <a:schemeClr val="accent1"/>
+          </a:lnRef>
+          <a:fillRef idx="3">
+            <a:schemeClr val="accent1"/>
+          </a:fillRef>
+          <a:effectRef idx="2">
+            <a:schemeClr val="accent1"/>
+          </a:effectRef>
+          <a:fontRef idx="minor">
+            <a:schemeClr val="lt1"/>
+          </a:fontRef>
+        </p:style>
+        <p:txBody>
+          <a:bodyPr rtlCol="0" anchor="ctr"/>
+          <a:lstStyle/>
+          <a:p>
+            <a:pPr algn="ctr"/>
+          </a:p>
+        </p:txBody>
+      </p:sp>
+      <p:sp>
+        <p:nvSpPr>
+          <p:cNvPr id="75" name="Rectangle 74"/>
+          <p:cNvSpPr/>
+          <p:nvPr/>
+        </p:nvSpPr>
+        <p:spPr>
+          <a:xfrm>
+            <a:off x="3238716" y="4167786"/>
+            <a:ext cx="179867" cy="12700"/>
+          </a:xfrm>
+          <a:prstGeom prst="rect">
+            <a:avLst/>
+          </a:prstGeom>
+          <a:solidFill>
+            <a:srgbClr val="FFFFFF"/>
+          </a:solidFill>
+          <a:ln>
+            <a:noFill/>
+          </a:ln>
+          <a:effectLst/>
+        </p:spPr>
+        <p:style>
+          <a:lnRef idx="1">
+            <a:schemeClr val="accent1"/>
+          </a:lnRef>
+          <a:fillRef idx="3">
+            <a:schemeClr val="accent1"/>
+          </a:fillRef>
+          <a:effectRef idx="2">
+            <a:schemeClr val="accent1"/>
+          </a:effectRef>
+          <a:fontRef idx="minor">
+            <a:schemeClr val="lt1"/>
+          </a:fontRef>
+        </p:style>
+        <p:txBody>
+          <a:bodyPr rtlCol="0" anchor="ctr"/>
+          <a:lstStyle/>
+          <a:p>
+            <a:pPr algn="ctr"/>
+          </a:p>
+        </p:txBody>
+      </p:sp>
+      <p:sp>
+        <p:nvSpPr>
+          <p:cNvPr id="76" name="Rectangle 75"/>
+          <p:cNvSpPr/>
+          <p:nvPr/>
+        </p:nvSpPr>
+        <p:spPr>
+          <a:xfrm>
+            <a:off x="3418584" y="4167786"/>
+            <a:ext cx="179867" cy="12700"/>
+          </a:xfrm>
+          <a:prstGeom prst="rect">
+            <a:avLst/>
+          </a:prstGeom>
+          <a:solidFill>
+            <a:srgbClr val="435B6E"/>
+          </a:solidFill>
+          <a:ln>
+            <a:noFill/>
+          </a:ln>
+          <a:effectLst/>
+        </p:spPr>
+        <p:style>
+          <a:lnRef idx="1">
+            <a:schemeClr val="accent1"/>
+          </a:lnRef>
+          <a:fillRef idx="3">
+            <a:schemeClr val="accent1"/>
+          </a:fillRef>
+          <a:effectRef idx="2">
+            <a:schemeClr val="accent1"/>
+          </a:effectRef>
+          <a:fontRef idx="minor">
+            <a:schemeClr val="lt1"/>
+          </a:fontRef>
+        </p:style>
+        <p:txBody>
+          <a:bodyPr rtlCol="0" anchor="ctr"/>
+          <a:lstStyle/>
+          <a:p>
+            <a:pPr algn="ctr"/>
+          </a:p>
+        </p:txBody>
+      </p:sp>
+      <p:sp>
+        <p:nvSpPr>
+          <p:cNvPr id="77" name="Rectangle 76"/>
+          <p:cNvSpPr/>
+          <p:nvPr/>
+        </p:nvSpPr>
+        <p:spPr>
+          <a:xfrm>
+            <a:off x="3232366" y="4130901"/>
+            <a:ext cx="12700" cy="86470"/>
+          </a:xfrm>
+          <a:prstGeom prst="rect">
+            <a:avLst/>
+          </a:prstGeom>
+          <a:solidFill>
+            <a:srgbClr val="FFFFFF"/>
+          </a:solidFill>
+          <a:ln>
+            <a:noFill/>
+          </a:ln>
+          <a:effectLst/>
+        </p:spPr>
+        <p:style>
+          <a:lnRef idx="1">
+            <a:schemeClr val="accent1"/>
+          </a:lnRef>
+          <a:fillRef idx="3">
+            <a:schemeClr val="accent1"/>
+          </a:fillRef>
+          <a:effectRef idx="2">
+            <a:schemeClr val="accent1"/>
+          </a:effectRef>
+          <a:fontRef idx="minor">
+            <a:schemeClr val="lt1"/>
+          </a:fontRef>
+        </p:style>
+        <p:txBody>
+          <a:bodyPr rtlCol="0" anchor="ctr"/>
+          <a:lstStyle/>
+          <a:p>
+            <a:pPr algn="ctr"/>
+          </a:p>
+        </p:txBody>
+      </p:sp>
+      <p:sp>
+        <p:nvSpPr>
+          <p:cNvPr id="78" name="Rectangle 77"/>
+          <p:cNvSpPr/>
+          <p:nvPr/>
+        </p:nvSpPr>
+        <p:spPr>
+          <a:xfrm>
+            <a:off x="3592102" y="4130901"/>
+            <a:ext cx="12700" cy="86470"/>
+          </a:xfrm>
+          <a:prstGeom prst="rect">
+            <a:avLst/>
+          </a:prstGeom>
+          <a:solidFill>
+            <a:srgbClr val="435B6E"/>
+          </a:solidFill>
+          <a:ln>
+            <a:noFill/>
+          </a:ln>
+          <a:effectLst/>
+        </p:spPr>
+        <p:style>
+          <a:lnRef idx="1">
+            <a:schemeClr val="accent1"/>
+          </a:lnRef>
+          <a:fillRef idx="3">
+            <a:schemeClr val="accent1"/>
+          </a:fillRef>
+          <a:effectRef idx="2">
+            <a:schemeClr val="accent1"/>
+          </a:effectRef>
+          <a:fontRef idx="minor">
+            <a:schemeClr val="lt1"/>
+          </a:fontRef>
+        </p:style>
+        <p:txBody>
+          <a:bodyPr rtlCol="0" anchor="ctr"/>
+          <a:lstStyle/>
+          <a:p>
+            <a:pPr algn="ctr"/>
+          </a:p>
+        </p:txBody>
+      </p:sp>
+      <p:sp>
+        <p:nvSpPr>
+          <p:cNvPr id="79" name="TextBox 78"/>
+          <p:cNvSpPr txBox="1"/>
+          <p:nvPr/>
+        </p:nvSpPr>
+        <p:spPr>
+          <a:xfrm>
+            <a:off x="3689892" y="4047213"/>
+            <a:ext cx="1127506" cy="253845"/>
+          </a:xfrm>
+          <a:prstGeom prst="rect">
+            <a:avLst/>
+          </a:prstGeom>
+          <a:noFill/>
+        </p:spPr>
+        <p:txBody>
+          <a:bodyPr wrap="square" lIns="0" rIns="0" tIns="0" bIns="0" anchor="ctr">
+            <a:spAutoFit/>
+          </a:bodyPr>
+          <a:lstStyle/>
+          <a:p>
+            <a:pPr algn="l">
+              <a:spcBef>
+                <a:spcPts val="0"/>
+              </a:spcBef>
+            </a:pPr>
+            <a:r>
+              <a:rPr sz="1100" b="1" i="0">
+                <a:solidFill>
+                  <a:srgbClr val="435B6E"/>
+                </a:solidFill>
+                <a:latin typeface="Segoe UI"/>
+              </a:rPr>
+              <a:t>1 728</a:t>
+            </a:r>
+            <a:r>
+              <a:rPr sz="1100" b="0" i="0">
+                <a:solidFill>
+                  <a:srgbClr val="595959"/>
+                </a:solidFill>
+                <a:latin typeface="Segoe UI"/>
+              </a:rPr>
+              <a:t>   ± 210</a:t>
+            </a:r>
+          </a:p>
+        </p:txBody>
+      </p:sp>
+      <p:sp>
+        <p:nvSpPr>
+          <p:cNvPr id="80" name="Rectangle 79"/>
+          <p:cNvSpPr/>
+          <p:nvPr/>
+        </p:nvSpPr>
+        <p:spPr>
+          <a:xfrm>
+            <a:off x="1938528" y="4278199"/>
+            <a:ext cx="2206380" cy="144117"/>
+          </a:xfrm>
+          <a:prstGeom prst="rect">
+            <a:avLst/>
+          </a:prstGeom>
+          <a:solidFill>
+            <a:srgbClr val="223E55"/>
+          </a:solidFill>
+          <a:ln>
+            <a:noFill/>
+          </a:ln>
+          <a:effectLst/>
+        </p:spPr>
+        <p:style>
+          <a:lnRef idx="1">
+            <a:schemeClr val="accent1"/>
+          </a:lnRef>
+          <a:fillRef idx="3">
+            <a:schemeClr val="accent1"/>
+          </a:fillRef>
+          <a:effectRef idx="2">
+            <a:schemeClr val="accent1"/>
+          </a:effectRef>
+          <a:fontRef idx="minor">
+            <a:schemeClr val="lt1"/>
+          </a:fontRef>
+        </p:style>
+        <p:txBody>
+          <a:bodyPr rtlCol="0" anchor="ctr"/>
+          <a:lstStyle/>
+          <a:p>
+            <a:pPr algn="ctr"/>
+          </a:p>
+        </p:txBody>
+      </p:sp>
+      <p:sp>
+        <p:nvSpPr>
+          <p:cNvPr id="81" name="Rectangle 80"/>
+          <p:cNvSpPr/>
+          <p:nvPr/>
+        </p:nvSpPr>
+        <p:spPr>
+          <a:xfrm>
+            <a:off x="3954762" y="4343908"/>
+            <a:ext cx="190146" cy="12700"/>
+          </a:xfrm>
+          <a:prstGeom prst="rect">
+            <a:avLst/>
+          </a:prstGeom>
+          <a:solidFill>
+            <a:srgbClr val="FFFFFF"/>
+          </a:solidFill>
+          <a:ln>
+            <a:noFill/>
+          </a:ln>
+          <a:effectLst/>
+        </p:spPr>
+        <p:style>
+          <a:lnRef idx="1">
+            <a:schemeClr val="accent1"/>
+          </a:lnRef>
+          <a:fillRef idx="3">
+            <a:schemeClr val="accent1"/>
+          </a:fillRef>
+          <a:effectRef idx="2">
+            <a:schemeClr val="accent1"/>
+          </a:effectRef>
+          <a:fontRef idx="minor">
+            <a:schemeClr val="lt1"/>
+          </a:fontRef>
+        </p:style>
+        <p:txBody>
+          <a:bodyPr rtlCol="0" anchor="ctr"/>
+          <a:lstStyle/>
+          <a:p>
+            <a:pPr algn="ctr"/>
+          </a:p>
+        </p:txBody>
+      </p:sp>
+      <p:sp>
+        <p:nvSpPr>
+          <p:cNvPr id="82" name="Rectangle 81"/>
+          <p:cNvSpPr/>
+          <p:nvPr/>
+        </p:nvSpPr>
+        <p:spPr>
+          <a:xfrm>
+            <a:off x="4144908" y="4343908"/>
+            <a:ext cx="190146" cy="12700"/>
+          </a:xfrm>
+          <a:prstGeom prst="rect">
+            <a:avLst/>
+          </a:prstGeom>
+          <a:solidFill>
+            <a:srgbClr val="223E55"/>
+          </a:solidFill>
+          <a:ln>
+            <a:noFill/>
+          </a:ln>
+          <a:effectLst/>
+        </p:spPr>
+        <p:style>
+          <a:lnRef idx="1">
+            <a:schemeClr val="accent1"/>
+          </a:lnRef>
+          <a:fillRef idx="3">
+            <a:schemeClr val="accent1"/>
+          </a:fillRef>
+          <a:effectRef idx="2">
+            <a:schemeClr val="accent1"/>
+          </a:effectRef>
+          <a:fontRef idx="minor">
+            <a:schemeClr val="lt1"/>
+          </a:fontRef>
+        </p:style>
+        <p:txBody>
+          <a:bodyPr rtlCol="0" anchor="ctr"/>
+          <a:lstStyle/>
+          <a:p>
+            <a:pPr algn="ctr"/>
+          </a:p>
+        </p:txBody>
+      </p:sp>
+      <p:sp>
+        <p:nvSpPr>
+          <p:cNvPr id="83" name="Rectangle 82"/>
+          <p:cNvSpPr/>
+          <p:nvPr/>
+        </p:nvSpPr>
+        <p:spPr>
+          <a:xfrm>
+            <a:off x="3948412" y="4307022"/>
+            <a:ext cx="12700" cy="86470"/>
+          </a:xfrm>
+          <a:prstGeom prst="rect">
+            <a:avLst/>
+          </a:prstGeom>
+          <a:solidFill>
+            <a:srgbClr val="FFFFFF"/>
+          </a:solidFill>
+          <a:ln>
+            <a:noFill/>
+          </a:ln>
+          <a:effectLst/>
+        </p:spPr>
+        <p:style>
+          <a:lnRef idx="1">
+            <a:schemeClr val="accent1"/>
+          </a:lnRef>
+          <a:fillRef idx="3">
+            <a:schemeClr val="accent1"/>
+          </a:fillRef>
+          <a:effectRef idx="2">
+            <a:schemeClr val="accent1"/>
+          </a:effectRef>
+          <a:fontRef idx="minor">
+            <a:schemeClr val="lt1"/>
+          </a:fontRef>
+        </p:style>
+        <p:txBody>
+          <a:bodyPr rtlCol="0" anchor="ctr"/>
+          <a:lstStyle/>
+          <a:p>
+            <a:pPr algn="ctr"/>
+          </a:p>
+        </p:txBody>
+      </p:sp>
+      <p:sp>
+        <p:nvSpPr>
+          <p:cNvPr id="84" name="Rectangle 83"/>
+          <p:cNvSpPr/>
+          <p:nvPr/>
+        </p:nvSpPr>
+        <p:spPr>
+          <a:xfrm>
+            <a:off x="4328704" y="4307022"/>
+            <a:ext cx="12700" cy="86470"/>
+          </a:xfrm>
+          <a:prstGeom prst="rect">
+            <a:avLst/>
+          </a:prstGeom>
+          <a:solidFill>
+            <a:srgbClr val="223E55"/>
+          </a:solidFill>
+          <a:ln>
+            <a:noFill/>
+          </a:ln>
+          <a:effectLst/>
+        </p:spPr>
+        <p:style>
+          <a:lnRef idx="1">
+            <a:schemeClr val="accent1"/>
+          </a:lnRef>
+          <a:fillRef idx="3">
+            <a:schemeClr val="accent1"/>
+          </a:fillRef>
+          <a:effectRef idx="2">
+            <a:schemeClr val="accent1"/>
+          </a:effectRef>
+          <a:fontRef idx="minor">
+            <a:schemeClr val="lt1"/>
+          </a:fontRef>
+        </p:style>
+        <p:txBody>
+          <a:bodyPr rtlCol="0" anchor="ctr"/>
+          <a:lstStyle/>
+          <a:p>
+            <a:pPr algn="ctr"/>
+          </a:p>
+        </p:txBody>
+      </p:sp>
+      <p:sp>
+        <p:nvSpPr>
+          <p:cNvPr id="85" name="TextBox 84"/>
+          <p:cNvSpPr txBox="1"/>
+          <p:nvPr/>
+        </p:nvSpPr>
+        <p:spPr>
+          <a:xfrm>
+            <a:off x="4426494" y="4223335"/>
+            <a:ext cx="1127506" cy="253845"/>
+          </a:xfrm>
+          <a:prstGeom prst="rect">
+            <a:avLst/>
+          </a:prstGeom>
+          <a:noFill/>
+        </p:spPr>
+        <p:txBody>
+          <a:bodyPr wrap="square" lIns="0" rIns="0" tIns="0" bIns="0" anchor="ctr">
+            <a:spAutoFit/>
+          </a:bodyPr>
+          <a:lstStyle/>
+          <a:p>
+            <a:pPr algn="l">
+              <a:spcBef>
+                <a:spcPts val="0"/>
+              </a:spcBef>
+            </a:pPr>
+            <a:r>
+              <a:rPr sz="1100" b="1" i="0">
+                <a:solidFill>
+                  <a:srgbClr val="223E55"/>
+                </a:solidFill>
+                <a:latin typeface="Segoe UI"/>
+              </a:rPr>
+              <a:t>2 576</a:t>
+            </a:r>
+            <a:r>
+              <a:rPr sz="1100" b="0" i="0">
+                <a:solidFill>
+                  <a:srgbClr val="595959"/>
+                </a:solidFill>
+                <a:latin typeface="Segoe UI"/>
+              </a:rPr>
+              <a:t>   ± 222</a:t>
+            </a:r>
+          </a:p>
+        </p:txBody>
+      </p:sp>
+      <p:sp>
+        <p:nvSpPr>
+          <p:cNvPr id="86" name="Rectangle 85"/>
+          <p:cNvSpPr/>
+          <p:nvPr/>
+        </p:nvSpPr>
+        <p:spPr>
+          <a:xfrm>
+            <a:off x="1938528" y="4454320"/>
+            <a:ext cx="2913861" cy="144117"/>
+          </a:xfrm>
+          <a:prstGeom prst="rect">
+            <a:avLst/>
+          </a:prstGeom>
+          <a:solidFill>
+            <a:srgbClr val="B10031"/>
+          </a:solidFill>
+          <a:ln>
+            <a:noFill/>
+          </a:ln>
+          <a:effectLst/>
+        </p:spPr>
+        <p:style>
+          <a:lnRef idx="1">
+            <a:schemeClr val="accent1"/>
+          </a:lnRef>
+          <a:fillRef idx="3">
+            <a:schemeClr val="accent1"/>
+          </a:fillRef>
+          <a:effectRef idx="2">
+            <a:schemeClr val="accent1"/>
+          </a:effectRef>
+          <a:fontRef idx="minor">
+            <a:schemeClr val="lt1"/>
+          </a:fontRef>
+        </p:style>
+        <p:txBody>
+          <a:bodyPr rtlCol="0" anchor="ctr"/>
+          <a:lstStyle/>
+          <a:p>
+            <a:pPr algn="ctr"/>
+          </a:p>
+        </p:txBody>
+      </p:sp>
+      <p:sp>
+        <p:nvSpPr>
+          <p:cNvPr id="87" name="Rectangle 86"/>
+          <p:cNvSpPr/>
+          <p:nvPr/>
+        </p:nvSpPr>
+        <p:spPr>
+          <a:xfrm>
+            <a:off x="4430127" y="4520029"/>
+            <a:ext cx="422261" cy="12700"/>
+          </a:xfrm>
+          <a:prstGeom prst="rect">
+            <a:avLst/>
+          </a:prstGeom>
+          <a:solidFill>
+            <a:srgbClr val="FFFFFF"/>
+          </a:solidFill>
+          <a:ln>
+            <a:noFill/>
+          </a:ln>
+          <a:effectLst/>
+        </p:spPr>
+        <p:style>
+          <a:lnRef idx="1">
+            <a:schemeClr val="accent1"/>
+          </a:lnRef>
+          <a:fillRef idx="3">
+            <a:schemeClr val="accent1"/>
+          </a:fillRef>
+          <a:effectRef idx="2">
+            <a:schemeClr val="accent1"/>
+          </a:effectRef>
+          <a:fontRef idx="minor">
+            <a:schemeClr val="lt1"/>
+          </a:fontRef>
+        </p:style>
+        <p:txBody>
+          <a:bodyPr rtlCol="0" anchor="ctr"/>
+          <a:lstStyle/>
+          <a:p>
+            <a:pPr algn="ctr"/>
+          </a:p>
+        </p:txBody>
+      </p:sp>
+      <p:sp>
+        <p:nvSpPr>
+          <p:cNvPr id="88" name="Rectangle 87"/>
+          <p:cNvSpPr/>
+          <p:nvPr/>
+        </p:nvSpPr>
+        <p:spPr>
+          <a:xfrm>
+            <a:off x="4852389" y="4520029"/>
+            <a:ext cx="422261" cy="12700"/>
+          </a:xfrm>
+          <a:prstGeom prst="rect">
+            <a:avLst/>
+          </a:prstGeom>
+          <a:solidFill>
+            <a:srgbClr val="B10031"/>
+          </a:solidFill>
+          <a:ln>
+            <a:noFill/>
+          </a:ln>
+          <a:effectLst/>
+        </p:spPr>
+        <p:style>
+          <a:lnRef idx="1">
+            <a:schemeClr val="accent1"/>
+          </a:lnRef>
+          <a:fillRef idx="3">
+            <a:schemeClr val="accent1"/>
+          </a:fillRef>
+          <a:effectRef idx="2">
+            <a:schemeClr val="accent1"/>
+          </a:effectRef>
+          <a:fontRef idx="minor">
+            <a:schemeClr val="lt1"/>
+          </a:fontRef>
+        </p:style>
+        <p:txBody>
+          <a:bodyPr rtlCol="0" anchor="ctr"/>
+          <a:lstStyle/>
+          <a:p>
+            <a:pPr algn="ctr"/>
+          </a:p>
+        </p:txBody>
+      </p:sp>
+      <p:sp>
+        <p:nvSpPr>
+          <p:cNvPr id="89" name="Rectangle 88"/>
+          <p:cNvSpPr/>
+          <p:nvPr/>
+        </p:nvSpPr>
+        <p:spPr>
+          <a:xfrm>
+            <a:off x="4423777" y="4483144"/>
+            <a:ext cx="12700" cy="86470"/>
+          </a:xfrm>
+          <a:prstGeom prst="rect">
+            <a:avLst/>
+          </a:prstGeom>
+          <a:solidFill>
+            <a:srgbClr val="FFFFFF"/>
+          </a:solidFill>
+          <a:ln>
+            <a:noFill/>
+          </a:ln>
+          <a:effectLst/>
+        </p:spPr>
+        <p:style>
+          <a:lnRef idx="1">
+            <a:schemeClr val="accent1"/>
+          </a:lnRef>
+          <a:fillRef idx="3">
+            <a:schemeClr val="accent1"/>
+          </a:fillRef>
+          <a:effectRef idx="2">
+            <a:schemeClr val="accent1"/>
+          </a:effectRef>
+          <a:fontRef idx="minor">
+            <a:schemeClr val="lt1"/>
+          </a:fontRef>
+        </p:style>
+        <p:txBody>
+          <a:bodyPr rtlCol="0" anchor="ctr"/>
+          <a:lstStyle/>
+          <a:p>
+            <a:pPr algn="ctr"/>
+          </a:p>
+        </p:txBody>
+      </p:sp>
+      <p:sp>
+        <p:nvSpPr>
+          <p:cNvPr id="90" name="Rectangle 89"/>
+          <p:cNvSpPr/>
+          <p:nvPr/>
+        </p:nvSpPr>
+        <p:spPr>
+          <a:xfrm>
+            <a:off x="5268301" y="4483144"/>
+            <a:ext cx="12700" cy="86470"/>
+          </a:xfrm>
+          <a:prstGeom prst="rect">
+            <a:avLst/>
+          </a:prstGeom>
+          <a:solidFill>
+            <a:srgbClr val="B10031"/>
+          </a:solidFill>
+          <a:ln>
+            <a:noFill/>
+          </a:ln>
+          <a:effectLst/>
+        </p:spPr>
+        <p:style>
+          <a:lnRef idx="1">
+            <a:schemeClr val="accent1"/>
+          </a:lnRef>
+          <a:fillRef idx="3">
+            <a:schemeClr val="accent1"/>
+          </a:fillRef>
+          <a:effectRef idx="2">
+            <a:schemeClr val="accent1"/>
+          </a:effectRef>
+          <a:fontRef idx="minor">
+            <a:schemeClr val="lt1"/>
+          </a:fontRef>
+        </p:style>
+        <p:txBody>
+          <a:bodyPr rtlCol="0" anchor="ctr"/>
+          <a:lstStyle/>
+          <a:p>
+            <a:pPr algn="ctr"/>
+          </a:p>
+        </p:txBody>
+      </p:sp>
+      <p:sp>
+        <p:nvSpPr>
+          <p:cNvPr id="91" name="TextBox 90"/>
+          <p:cNvSpPr txBox="1"/>
+          <p:nvPr/>
+        </p:nvSpPr>
+        <p:spPr>
+          <a:xfrm>
+            <a:off x="5366091" y="4399456"/>
+            <a:ext cx="1127506" cy="253845"/>
+          </a:xfrm>
+          <a:prstGeom prst="rect">
+            <a:avLst/>
+          </a:prstGeom>
+          <a:noFill/>
+        </p:spPr>
+        <p:txBody>
+          <a:bodyPr wrap="square" lIns="0" rIns="0" tIns="0" bIns="0" anchor="ctr">
+            <a:spAutoFit/>
+          </a:bodyPr>
+          <a:lstStyle/>
+          <a:p>
+            <a:pPr algn="l">
+              <a:spcBef>
+                <a:spcPts val="0"/>
+              </a:spcBef>
+            </a:pPr>
+            <a:r>
+              <a:rPr sz="1100" b="1" i="0">
+                <a:solidFill>
+                  <a:srgbClr val="B10031"/>
+                </a:solidFill>
+                <a:latin typeface="Segoe UI"/>
+              </a:rPr>
+              <a:t>3 402</a:t>
+            </a:r>
+            <a:r>
+              <a:rPr sz="1100" b="0" i="0">
+                <a:solidFill>
+                  <a:srgbClr val="595959"/>
+                </a:solidFill>
+                <a:latin typeface="Segoe UI"/>
+              </a:rPr>
+              <a:t>   ± 493</a:t>
+            </a:r>
+          </a:p>
+        </p:txBody>
+      </p:sp>
+      <p:sp>
+        <p:nvSpPr>
+          <p:cNvPr id="92" name="Rectangle 91"/>
+          <p:cNvSpPr/>
+          <p:nvPr/>
+        </p:nvSpPr>
+        <p:spPr>
+          <a:xfrm>
+            <a:off x="1925828" y="2029968"/>
+            <a:ext cx="12700" cy="2651760"/>
+          </a:xfrm>
+          <a:prstGeom prst="rect">
+            <a:avLst/>
+          </a:prstGeom>
+          <a:solidFill>
+            <a:srgbClr val="D9D9D9"/>
+          </a:solidFill>
+          <a:ln>
+            <a:noFill/>
+          </a:ln>
+          <a:effectLst/>
+        </p:spPr>
+        <p:style>
+          <a:lnRef idx="1">
+            <a:schemeClr val="accent1"/>
+          </a:lnRef>
+          <a:fillRef idx="3">
+            <a:schemeClr val="accent1"/>
+          </a:fillRef>
+          <a:effectRef idx="2">
+            <a:schemeClr val="accent1"/>
+          </a:effectRef>
+          <a:fontRef idx="minor">
+            <a:schemeClr val="lt1"/>
+          </a:fontRef>
+        </p:style>
+        <p:txBody>
+          <a:bodyPr rtlCol="0" anchor="ctr"/>
+          <a:lstStyle/>
+          <a:p>
+            <a:pPr algn="ctr"/>
+          </a:p>
+        </p:txBody>
+      </p:sp>
+      <p:sp>
+        <p:nvSpPr>
+          <p:cNvPr id="93" name="TextBox 92"/>
+          <p:cNvSpPr txBox="1"/>
+          <p:nvPr/>
+        </p:nvSpPr>
+        <p:spPr>
+          <a:xfrm>
+            <a:off x="1938528" y="4709160"/>
+            <a:ext cx="2743200" cy="182880"/>
+          </a:xfrm>
+          <a:prstGeom prst="rect">
+            <a:avLst/>
+          </a:prstGeom>
+          <a:noFill/>
+        </p:spPr>
+        <p:txBody>
+          <a:bodyPr wrap="square" lIns="0" rIns="0" tIns="0" bIns="0" anchor="ctr">
+            <a:spAutoFit/>
+          </a:bodyPr>
+          <a:lstStyle/>
+          <a:p>
+            <a:pPr algn="l">
+              <a:spcBef>
+                <a:spcPts val="0"/>
+              </a:spcBef>
+            </a:pPr>
+            <a:r>
+              <a:rPr sz="1000" b="0" i="1">
+                <a:solidFill>
+                  <a:srgbClr val="A5A5A5"/>
+                </a:solidFill>
+                <a:latin typeface="Segoe UI"/>
+              </a:rPr>
+              <a:t>capital en jeu, en M€</a:t>
+            </a:r>
+          </a:p>
+        </p:txBody>
+      </p:sp>
+      <p:sp>
+        <p:nvSpPr>
+          <p:cNvPr id="94" name="Rectangle 93"/>
           <p:cNvSpPr/>
           <p:nvPr/>
         </p:nvSpPr>
@@ -7397,7 +12275,7 @@
       </p:sp>
       <p:sp>
         <p:nvSpPr>
-          <p:cNvPr id="12" name="Rectangle 11"/>
+          <p:cNvPr id="95" name="Rectangle 94"/>
           <p:cNvSpPr/>
           <p:nvPr/>
         </p:nvSpPr>
@@ -7465,7 +12343,7 @@
       </p:sp>
       <p:sp>
         <p:nvSpPr>
-          <p:cNvPr id="13" name="Rectangle 12"/>
+          <p:cNvPr id="96" name="Rectangle 95"/>
           <p:cNvSpPr/>
           <p:nvPr/>
         </p:nvSpPr>
@@ -7533,7 +12411,7 @@
       </p:sp>
       <p:sp>
         <p:nvSpPr>
-          <p:cNvPr id="14" name="Rectangle 13"/>
+          <p:cNvPr id="97" name="Rectangle 96"/>
           <p:cNvSpPr/>
           <p:nvPr/>
         </p:nvSpPr>
@@ -7577,7 +12455,7 @@
       </p:sp>
       <p:sp>
         <p:nvSpPr>
-          <p:cNvPr id="15" name="Rectangle 14"/>
+          <p:cNvPr id="98" name="Rectangle 97"/>
           <p:cNvSpPr/>
           <p:nvPr/>
         </p:nvSpPr>
@@ -7621,7 +12499,7 @@
       </p:sp>
       <p:sp>
         <p:nvSpPr>
-          <p:cNvPr id="16" name="TextBox 15"/>
+          <p:cNvPr id="99" name="TextBox 98"/>
           <p:cNvSpPr txBox="1"/>
           <p:nvPr/>
         </p:nvSpPr>
@@ -7662,14 +12540,14 @@
                 </a:solidFill>
                 <a:latin typeface="Segoe UI"/>
               </a:rPr>
-              <a:t>remédier un canal rapporte davantage à une entité défaillante partout : c'est la colonne de fermeture qu'un plan doit citer.</a:t>
-            </a:r>
-          </a:p>
-        </p:txBody>
-      </p:sp>
-      <p:sp>
-        <p:nvSpPr>
-          <p:cNvPr id="17" name="TextBox 16"/>
+              <a:t>remédier un canal rapporte davantage à une entité défaillante partout : c'est la lecture de fermeture qu'un plan doit citer.</a:t>
+            </a:r>
+          </a:p>
+        </p:txBody>
+      </p:sp>
+      <p:sp>
+        <p:nvSpPr>
+          <p:cNvPr id="100" name="TextBox 99"/>
           <p:cNvSpPr txBox="1"/>
           <p:nvPr/>
         </p:nvSpPr>
@@ -7701,7 +12579,7 @@
                 </a:solidFill>
                 <a:latin typeface="Segoe UI"/>
               </a:rPr>
-              <a:t>Sources : mémoire, chapitre 10 ; scripts 43 et 68.</a:t>
+              <a:t>Sources : mémoire, chapitre 10 ; les douze valeurs et leur bruit sont lus dans la sortie versionnée du script 68 ; repères du script 43.</a:t>
             </a:r>
           </a:p>
         </p:txBody>
@@ -13084,14 +17962,1478 @@
       </p:sp>
       <p:sp>
         <p:nvSpPr>
-          <p:cNvPr id="10" name="TextBox 9"/>
+          <p:cNvPr id="10" name="Rectangle 9"/>
+          <p:cNvSpPr/>
+          <p:nvPr/>
+        </p:nvSpPr>
+        <p:spPr>
+          <a:xfrm>
+            <a:off x="749808" y="1481328"/>
+            <a:ext cx="10692079" cy="329184"/>
+          </a:xfrm>
+          <a:prstGeom prst="rect">
+            <a:avLst/>
+          </a:prstGeom>
+          <a:solidFill>
+            <a:srgbClr val="223E55"/>
+          </a:solidFill>
+          <a:ln>
+            <a:noFill/>
+          </a:ln>
+          <a:effectLst/>
+        </p:spPr>
+        <p:style>
+          <a:lnRef idx="1">
+            <a:schemeClr val="accent1"/>
+          </a:lnRef>
+          <a:fillRef idx="3">
+            <a:schemeClr val="accent1"/>
+          </a:fillRef>
+          <a:effectRef idx="2">
+            <a:schemeClr val="accent1"/>
+          </a:effectRef>
+          <a:fontRef idx="minor">
+            <a:schemeClr val="lt1"/>
+          </a:fontRef>
+        </p:style>
+        <p:txBody>
+          <a:bodyPr rtlCol="0" anchor="ctr"/>
+          <a:lstStyle/>
+          <a:p>
+            <a:pPr algn="ctr"/>
+          </a:p>
+        </p:txBody>
+      </p:sp>
+      <p:sp>
+        <p:nvSpPr>
+          <p:cNvPr id="11" name="TextBox 10"/>
           <p:cNvSpPr txBox="1"/>
           <p:nvPr/>
         </p:nvSpPr>
         <p:spPr>
           <a:xfrm>
-            <a:off x="749808" y="1572768"/>
-            <a:ext cx="10692079" cy="4480560"/>
+            <a:off x="841248" y="1481328"/>
+            <a:ext cx="3061319" cy="329184"/>
+          </a:xfrm>
+          <a:prstGeom prst="rect">
+            <a:avLst/>
+          </a:prstGeom>
+          <a:noFill/>
+        </p:spPr>
+        <p:txBody>
+          <a:bodyPr wrap="square" lIns="0" rIns="0" tIns="0" bIns="0" anchor="ctr">
+            <a:spAutoFit/>
+          </a:bodyPr>
+          <a:lstStyle/>
+          <a:p>
+            <a:pPr algn="l">
+              <a:spcBef>
+                <a:spcPts val="0"/>
+              </a:spcBef>
+            </a:pPr>
+            <a:r>
+              <a:rPr sz="1300" b="1" i="0">
+                <a:solidFill>
+                  <a:srgbClr val="FFFFFF"/>
+                </a:solidFill>
+                <a:latin typeface="Segoe UI"/>
+              </a:rPr>
+              <a:t>Source</a:t>
+            </a:r>
+          </a:p>
+        </p:txBody>
+      </p:sp>
+      <p:sp>
+        <p:nvSpPr>
+          <p:cNvPr id="12" name="TextBox 11"/>
+          <p:cNvSpPr txBox="1"/>
+          <p:nvPr/>
+        </p:nvSpPr>
+        <p:spPr>
+          <a:xfrm>
+            <a:off x="4048871" y="1481328"/>
+            <a:ext cx="4558210" cy="329184"/>
+          </a:xfrm>
+          <a:prstGeom prst="rect">
+            <a:avLst/>
+          </a:prstGeom>
+          <a:noFill/>
+        </p:spPr>
+        <p:txBody>
+          <a:bodyPr wrap="square" lIns="0" rIns="0" tIns="0" bIns="0" anchor="ctr">
+            <a:spAutoFit/>
+          </a:bodyPr>
+          <a:lstStyle/>
+          <a:p>
+            <a:pPr algn="l">
+              <a:spcBef>
+                <a:spcPts val="0"/>
+              </a:spcBef>
+            </a:pPr>
+            <a:r>
+              <a:rPr sz="1300" b="1" i="0">
+                <a:solidFill>
+                  <a:srgbClr val="FFFFFF"/>
+                </a:solidFill>
+                <a:latin typeface="Segoe UI"/>
+              </a:rPr>
+              <a:t>Ce qu'elle porte dans le modèle</a:t>
+            </a:r>
+          </a:p>
+        </p:txBody>
+      </p:sp>
+      <p:sp>
+        <p:nvSpPr>
+          <p:cNvPr id="13" name="TextBox 12"/>
+          <p:cNvSpPr txBox="1"/>
+          <p:nvPr/>
+        </p:nvSpPr>
+        <p:spPr>
+          <a:xfrm>
+            <a:off x="8753386" y="1481328"/>
+            <a:ext cx="2633636" cy="329184"/>
+          </a:xfrm>
+          <a:prstGeom prst="rect">
+            <a:avLst/>
+          </a:prstGeom>
+          <a:noFill/>
+        </p:spPr>
+        <p:txBody>
+          <a:bodyPr wrap="square" lIns="0" rIns="0" tIns="0" bIns="0" anchor="ctr">
+            <a:spAutoFit/>
+          </a:bodyPr>
+          <a:lstStyle/>
+          <a:p>
+            <a:pPr algn="l">
+              <a:spcBef>
+                <a:spcPts val="0"/>
+              </a:spcBef>
+            </a:pPr>
+            <a:r>
+              <a:rPr sz="1300" b="1" i="0">
+                <a:solidFill>
+                  <a:srgbClr val="FFFFFF"/>
+                </a:solidFill>
+                <a:latin typeface="Segoe UI"/>
+              </a:rPr>
+              <a:t>Statut de preuve</a:t>
+            </a:r>
+          </a:p>
+        </p:txBody>
+      </p:sp>
+      <p:sp>
+        <p:nvSpPr>
+          <p:cNvPr id="14" name="Rectangle 13"/>
+          <p:cNvSpPr/>
+          <p:nvPr/>
+        </p:nvSpPr>
+        <p:spPr>
+          <a:xfrm>
+            <a:off x="749808" y="1810512"/>
+            <a:ext cx="10692079" cy="537464"/>
+          </a:xfrm>
+          <a:prstGeom prst="rect">
+            <a:avLst/>
+          </a:prstGeom>
+          <a:solidFill>
+            <a:srgbClr val="F2F2F2"/>
+          </a:solidFill>
+          <a:ln>
+            <a:noFill/>
+          </a:ln>
+          <a:effectLst/>
+        </p:spPr>
+        <p:style>
+          <a:lnRef idx="1">
+            <a:schemeClr val="accent1"/>
+          </a:lnRef>
+          <a:fillRef idx="3">
+            <a:schemeClr val="accent1"/>
+          </a:fillRef>
+          <a:effectRef idx="2">
+            <a:schemeClr val="accent1"/>
+          </a:effectRef>
+          <a:fontRef idx="minor">
+            <a:schemeClr val="lt1"/>
+          </a:fontRef>
+        </p:style>
+        <p:txBody>
+          <a:bodyPr rtlCol="0" anchor="ctr"/>
+          <a:lstStyle/>
+          <a:p>
+            <a:pPr algn="ctr"/>
+          </a:p>
+        </p:txBody>
+      </p:sp>
+      <p:sp>
+        <p:nvSpPr>
+          <p:cNvPr id="15" name="Rectangle 14"/>
+          <p:cNvSpPr/>
+          <p:nvPr/>
+        </p:nvSpPr>
+        <p:spPr>
+          <a:xfrm>
+            <a:off x="749808" y="2341626"/>
+            <a:ext cx="10692079" cy="6350"/>
+          </a:xfrm>
+          <a:prstGeom prst="rect">
+            <a:avLst/>
+          </a:prstGeom>
+          <a:solidFill>
+            <a:srgbClr val="D9D9D9"/>
+          </a:solidFill>
+          <a:ln>
+            <a:noFill/>
+          </a:ln>
+          <a:effectLst/>
+        </p:spPr>
+        <p:style>
+          <a:lnRef idx="1">
+            <a:schemeClr val="accent1"/>
+          </a:lnRef>
+          <a:fillRef idx="3">
+            <a:schemeClr val="accent1"/>
+          </a:fillRef>
+          <a:effectRef idx="2">
+            <a:schemeClr val="accent1"/>
+          </a:effectRef>
+          <a:fontRef idx="minor">
+            <a:schemeClr val="lt1"/>
+          </a:fontRef>
+        </p:style>
+        <p:txBody>
+          <a:bodyPr rtlCol="0" anchor="ctr"/>
+          <a:lstStyle/>
+          <a:p>
+            <a:pPr algn="ctr"/>
+          </a:p>
+        </p:txBody>
+      </p:sp>
+      <p:sp>
+        <p:nvSpPr>
+          <p:cNvPr id="16" name="TextBox 15"/>
+          <p:cNvSpPr txBox="1"/>
+          <p:nvPr/>
+        </p:nvSpPr>
+        <p:spPr>
+          <a:xfrm>
+            <a:off x="841248" y="1810512"/>
+            <a:ext cx="3061319" cy="537464"/>
+          </a:xfrm>
+          <a:prstGeom prst="rect">
+            <a:avLst/>
+          </a:prstGeom>
+          <a:noFill/>
+        </p:spPr>
+        <p:txBody>
+          <a:bodyPr wrap="square" lIns="0" rIns="0" tIns="0" bIns="0" anchor="ctr">
+            <a:spAutoFit/>
+          </a:bodyPr>
+          <a:lstStyle/>
+          <a:p>
+            <a:pPr algn="l">
+              <a:spcBef>
+                <a:spcPts val="0"/>
+              </a:spcBef>
+            </a:pPr>
+            <a:r>
+              <a:rPr sz="1300" b="0" i="0">
+                <a:solidFill>
+                  <a:srgbClr val="122738"/>
+                </a:solidFill>
+                <a:latin typeface="Segoe UI"/>
+              </a:rPr>
+              <a:t>Base internationale de pertes opérationnelles</a:t>
+            </a:r>
+          </a:p>
+        </p:txBody>
+      </p:sp>
+      <p:sp>
+        <p:nvSpPr>
+          <p:cNvPr id="17" name="TextBox 16"/>
+          <p:cNvSpPr txBox="1"/>
+          <p:nvPr/>
+        </p:nvSpPr>
+        <p:spPr>
+          <a:xfrm>
+            <a:off x="4048871" y="1810512"/>
+            <a:ext cx="4558210" cy="537464"/>
+          </a:xfrm>
+          <a:prstGeom prst="rect">
+            <a:avLst/>
+          </a:prstGeom>
+          <a:noFill/>
+        </p:spPr>
+        <p:txBody>
+          <a:bodyPr wrap="square" lIns="0" rIns="0" tIns="0" bIns="0" anchor="ctr">
+            <a:spAutoFit/>
+          </a:bodyPr>
+          <a:lstStyle/>
+          <a:p>
+            <a:pPr algn="l">
+              <a:spcBef>
+                <a:spcPts val="0"/>
+              </a:spcBef>
+            </a:pPr>
+            <a:r>
+              <a:rPr sz="1300" b="0" i="0">
+                <a:solidFill>
+                  <a:srgbClr val="122738"/>
+                </a:solidFill>
+                <a:latin typeface="Segoe UI"/>
+              </a:rPr>
+              <a:t>la sévérité en euros, au-delà du seuil</a:t>
+            </a:r>
+          </a:p>
+        </p:txBody>
+      </p:sp>
+      <p:sp>
+        <p:nvSpPr>
+          <p:cNvPr id="18" name="TextBox 17"/>
+          <p:cNvSpPr txBox="1"/>
+          <p:nvPr/>
+        </p:nvSpPr>
+        <p:spPr>
+          <a:xfrm>
+            <a:off x="8753386" y="1810512"/>
+            <a:ext cx="2633636" cy="537464"/>
+          </a:xfrm>
+          <a:prstGeom prst="rect">
+            <a:avLst/>
+          </a:prstGeom>
+          <a:noFill/>
+        </p:spPr>
+        <p:txBody>
+          <a:bodyPr wrap="square" lIns="0" rIns="0" tIns="0" bIns="0" anchor="ctr">
+            <a:spAutoFit/>
+          </a:bodyPr>
+          <a:lstStyle/>
+          <a:p>
+            <a:pPr algn="l">
+              <a:spcBef>
+                <a:spcPts val="0"/>
+              </a:spcBef>
+            </a:pPr>
+            <a:r>
+              <a:rPr sz="1300" b="1" i="0">
+                <a:solidFill>
+                  <a:srgbClr val="223E55"/>
+                </a:solidFill>
+                <a:latin typeface="Segoe UI"/>
+              </a:rPr>
+              <a:t>versionné, rejouable</a:t>
+            </a:r>
+          </a:p>
+        </p:txBody>
+      </p:sp>
+      <p:sp>
+        <p:nvSpPr>
+          <p:cNvPr id="19" name="Rectangle 18"/>
+          <p:cNvSpPr/>
+          <p:nvPr/>
+        </p:nvSpPr>
+        <p:spPr>
+          <a:xfrm>
+            <a:off x="749808" y="2674366"/>
+            <a:ext cx="10692079" cy="6350"/>
+          </a:xfrm>
+          <a:prstGeom prst="rect">
+            <a:avLst/>
+          </a:prstGeom>
+          <a:solidFill>
+            <a:srgbClr val="D9D9D9"/>
+          </a:solidFill>
+          <a:ln>
+            <a:noFill/>
+          </a:ln>
+          <a:effectLst/>
+        </p:spPr>
+        <p:style>
+          <a:lnRef idx="1">
+            <a:schemeClr val="accent1"/>
+          </a:lnRef>
+          <a:fillRef idx="3">
+            <a:schemeClr val="accent1"/>
+          </a:fillRef>
+          <a:effectRef idx="2">
+            <a:schemeClr val="accent1"/>
+          </a:effectRef>
+          <a:fontRef idx="minor">
+            <a:schemeClr val="lt1"/>
+          </a:fontRef>
+        </p:style>
+        <p:txBody>
+          <a:bodyPr rtlCol="0" anchor="ctr"/>
+          <a:lstStyle/>
+          <a:p>
+            <a:pPr algn="ctr"/>
+          </a:p>
+        </p:txBody>
+      </p:sp>
+      <p:sp>
+        <p:nvSpPr>
+          <p:cNvPr id="20" name="TextBox 19"/>
+          <p:cNvSpPr txBox="1"/>
+          <p:nvPr/>
+        </p:nvSpPr>
+        <p:spPr>
+          <a:xfrm>
+            <a:off x="841248" y="2347976"/>
+            <a:ext cx="3061319" cy="332740"/>
+          </a:xfrm>
+          <a:prstGeom prst="rect">
+            <a:avLst/>
+          </a:prstGeom>
+          <a:noFill/>
+        </p:spPr>
+        <p:txBody>
+          <a:bodyPr wrap="square" lIns="0" rIns="0" tIns="0" bIns="0" anchor="ctr">
+            <a:spAutoFit/>
+          </a:bodyPr>
+          <a:lstStyle/>
+          <a:p>
+            <a:pPr algn="l">
+              <a:spcBef>
+                <a:spcPts val="0"/>
+              </a:spcBef>
+            </a:pPr>
+            <a:r>
+              <a:rPr sz="1300" b="0" i="0">
+                <a:solidFill>
+                  <a:srgbClr val="122738"/>
+                </a:solidFill>
+                <a:latin typeface="Segoe UI"/>
+              </a:rPr>
+              <a:t>Chronologie de brèches</a:t>
+            </a:r>
+          </a:p>
+        </p:txBody>
+      </p:sp>
+      <p:sp>
+        <p:nvSpPr>
+          <p:cNvPr id="21" name="TextBox 20"/>
+          <p:cNvSpPr txBox="1"/>
+          <p:nvPr/>
+        </p:nvSpPr>
+        <p:spPr>
+          <a:xfrm>
+            <a:off x="4048871" y="2347976"/>
+            <a:ext cx="4558210" cy="332740"/>
+          </a:xfrm>
+          <a:prstGeom prst="rect">
+            <a:avLst/>
+          </a:prstGeom>
+          <a:noFill/>
+        </p:spPr>
+        <p:txBody>
+          <a:bodyPr wrap="square" lIns="0" rIns="0" tIns="0" bIns="0" anchor="ctr">
+            <a:spAutoFit/>
+          </a:bodyPr>
+          <a:lstStyle/>
+          <a:p>
+            <a:pPr algn="l">
+              <a:spcBef>
+                <a:spcPts val="0"/>
+              </a:spcBef>
+            </a:pPr>
+            <a:r>
+              <a:rPr sz="1300" b="0" i="0">
+                <a:solidFill>
+                  <a:srgbClr val="122738"/>
+                </a:solidFill>
+                <a:latin typeface="Segoe UI"/>
+              </a:rPr>
+              <a:t>la fréquence, et l'étude d'événement MOVEit</a:t>
+            </a:r>
+          </a:p>
+        </p:txBody>
+      </p:sp>
+      <p:sp>
+        <p:nvSpPr>
+          <p:cNvPr id="22" name="TextBox 21"/>
+          <p:cNvSpPr txBox="1"/>
+          <p:nvPr/>
+        </p:nvSpPr>
+        <p:spPr>
+          <a:xfrm>
+            <a:off x="8753386" y="2347976"/>
+            <a:ext cx="2633636" cy="332740"/>
+          </a:xfrm>
+          <a:prstGeom prst="rect">
+            <a:avLst/>
+          </a:prstGeom>
+          <a:noFill/>
+        </p:spPr>
+        <p:txBody>
+          <a:bodyPr wrap="square" lIns="0" rIns="0" tIns="0" bIns="0" anchor="ctr">
+            <a:spAutoFit/>
+          </a:bodyPr>
+          <a:lstStyle/>
+          <a:p>
+            <a:pPr algn="l">
+              <a:spcBef>
+                <a:spcPts val="0"/>
+              </a:spcBef>
+            </a:pPr>
+            <a:r>
+              <a:rPr sz="1300" b="1" i="0">
+                <a:solidFill>
+                  <a:srgbClr val="223E55"/>
+                </a:solidFill>
+                <a:latin typeface="Segoe UI"/>
+              </a:rPr>
+              <a:t>versionné, rejouable</a:t>
+            </a:r>
+          </a:p>
+        </p:txBody>
+      </p:sp>
+      <p:sp>
+        <p:nvSpPr>
+          <p:cNvPr id="23" name="Rectangle 22"/>
+          <p:cNvSpPr/>
+          <p:nvPr/>
+        </p:nvSpPr>
+        <p:spPr>
+          <a:xfrm>
+            <a:off x="749808" y="2680716"/>
+            <a:ext cx="10692079" cy="332740"/>
+          </a:xfrm>
+          <a:prstGeom prst="rect">
+            <a:avLst/>
+          </a:prstGeom>
+          <a:solidFill>
+            <a:srgbClr val="F2F2F2"/>
+          </a:solidFill>
+          <a:ln>
+            <a:noFill/>
+          </a:ln>
+          <a:effectLst/>
+        </p:spPr>
+        <p:style>
+          <a:lnRef idx="1">
+            <a:schemeClr val="accent1"/>
+          </a:lnRef>
+          <a:fillRef idx="3">
+            <a:schemeClr val="accent1"/>
+          </a:fillRef>
+          <a:effectRef idx="2">
+            <a:schemeClr val="accent1"/>
+          </a:effectRef>
+          <a:fontRef idx="minor">
+            <a:schemeClr val="lt1"/>
+          </a:fontRef>
+        </p:style>
+        <p:txBody>
+          <a:bodyPr rtlCol="0" anchor="ctr"/>
+          <a:lstStyle/>
+          <a:p>
+            <a:pPr algn="ctr"/>
+          </a:p>
+        </p:txBody>
+      </p:sp>
+      <p:sp>
+        <p:nvSpPr>
+          <p:cNvPr id="24" name="Rectangle 23"/>
+          <p:cNvSpPr/>
+          <p:nvPr/>
+        </p:nvSpPr>
+        <p:spPr>
+          <a:xfrm>
+            <a:off x="749808" y="3007106"/>
+            <a:ext cx="10692079" cy="6350"/>
+          </a:xfrm>
+          <a:prstGeom prst="rect">
+            <a:avLst/>
+          </a:prstGeom>
+          <a:solidFill>
+            <a:srgbClr val="D9D9D9"/>
+          </a:solidFill>
+          <a:ln>
+            <a:noFill/>
+          </a:ln>
+          <a:effectLst/>
+        </p:spPr>
+        <p:style>
+          <a:lnRef idx="1">
+            <a:schemeClr val="accent1"/>
+          </a:lnRef>
+          <a:fillRef idx="3">
+            <a:schemeClr val="accent1"/>
+          </a:fillRef>
+          <a:effectRef idx="2">
+            <a:schemeClr val="accent1"/>
+          </a:effectRef>
+          <a:fontRef idx="minor">
+            <a:schemeClr val="lt1"/>
+          </a:fontRef>
+        </p:style>
+        <p:txBody>
+          <a:bodyPr rtlCol="0" anchor="ctr"/>
+          <a:lstStyle/>
+          <a:p>
+            <a:pPr algn="ctr"/>
+          </a:p>
+        </p:txBody>
+      </p:sp>
+      <p:sp>
+        <p:nvSpPr>
+          <p:cNvPr id="25" name="TextBox 24"/>
+          <p:cNvSpPr txBox="1"/>
+          <p:nvPr/>
+        </p:nvSpPr>
+        <p:spPr>
+          <a:xfrm>
+            <a:off x="841248" y="2680716"/>
+            <a:ext cx="3061319" cy="332740"/>
+          </a:xfrm>
+          <a:prstGeom prst="rect">
+            <a:avLst/>
+          </a:prstGeom>
+          <a:noFill/>
+        </p:spPr>
+        <p:txBody>
+          <a:bodyPr wrap="square" lIns="0" rIns="0" tIns="0" bIns="0" anchor="ctr">
+            <a:spAutoFit/>
+          </a:bodyPr>
+          <a:lstStyle/>
+          <a:p>
+            <a:pPr algn="l">
+              <a:spcBef>
+                <a:spcPts val="0"/>
+              </a:spcBef>
+            </a:pPr>
+            <a:r>
+              <a:rPr sz="1300" b="0" i="0">
+                <a:solidFill>
+                  <a:srgbClr val="122738"/>
+                </a:solidFill>
+                <a:latin typeface="Segoe UI"/>
+              </a:rPr>
+              <a:t>Corpus de rapports post-mortem</a:t>
+            </a:r>
+          </a:p>
+        </p:txBody>
+      </p:sp>
+      <p:sp>
+        <p:nvSpPr>
+          <p:cNvPr id="26" name="TextBox 25"/>
+          <p:cNvSpPr txBox="1"/>
+          <p:nvPr/>
+        </p:nvSpPr>
+        <p:spPr>
+          <a:xfrm>
+            <a:off x="4048871" y="2680716"/>
+            <a:ext cx="4558210" cy="332740"/>
+          </a:xfrm>
+          <a:prstGeom prst="rect">
+            <a:avLst/>
+          </a:prstGeom>
+          <a:noFill/>
+        </p:spPr>
+        <p:txBody>
+          <a:bodyPr wrap="square" lIns="0" rIns="0" tIns="0" bIns="0" anchor="ctr">
+            <a:spAutoFit/>
+          </a:bodyPr>
+          <a:lstStyle/>
+          <a:p>
+            <a:pPr algn="l">
+              <a:spcBef>
+                <a:spcPts val="0"/>
+              </a:spcBef>
+            </a:pPr>
+            <a:r>
+              <a:rPr sz="1300" b="0" i="0">
+                <a:solidFill>
+                  <a:srgbClr val="122738"/>
+                </a:solidFill>
+                <a:latin typeface="Segoe UI"/>
+              </a:rPr>
+              <a:t>la structure de la direction, et son biais mesuré</a:t>
+            </a:r>
+          </a:p>
+        </p:txBody>
+      </p:sp>
+      <p:sp>
+        <p:nvSpPr>
+          <p:cNvPr id="27" name="TextBox 26"/>
+          <p:cNvSpPr txBox="1"/>
+          <p:nvPr/>
+        </p:nvSpPr>
+        <p:spPr>
+          <a:xfrm>
+            <a:off x="8753386" y="2680716"/>
+            <a:ext cx="2633636" cy="332740"/>
+          </a:xfrm>
+          <a:prstGeom prst="rect">
+            <a:avLst/>
+          </a:prstGeom>
+          <a:noFill/>
+        </p:spPr>
+        <p:txBody>
+          <a:bodyPr wrap="square" lIns="0" rIns="0" tIns="0" bIns="0" anchor="ctr">
+            <a:spAutoFit/>
+          </a:bodyPr>
+          <a:lstStyle/>
+          <a:p>
+            <a:pPr algn="l">
+              <a:spcBef>
+                <a:spcPts val="0"/>
+              </a:spcBef>
+            </a:pPr>
+            <a:r>
+              <a:rPr sz="1300" b="1" i="0">
+                <a:solidFill>
+                  <a:srgbClr val="223E55"/>
+                </a:solidFill>
+                <a:latin typeface="Segoe UI"/>
+              </a:rPr>
+              <a:t>versionné, rejouable</a:t>
+            </a:r>
+          </a:p>
+        </p:txBody>
+      </p:sp>
+      <p:sp>
+        <p:nvSpPr>
+          <p:cNvPr id="28" name="Rectangle 27"/>
+          <p:cNvSpPr/>
+          <p:nvPr/>
+        </p:nvSpPr>
+        <p:spPr>
+          <a:xfrm>
+            <a:off x="749808" y="3339846"/>
+            <a:ext cx="10692079" cy="6350"/>
+          </a:xfrm>
+          <a:prstGeom prst="rect">
+            <a:avLst/>
+          </a:prstGeom>
+          <a:solidFill>
+            <a:srgbClr val="D9D9D9"/>
+          </a:solidFill>
+          <a:ln>
+            <a:noFill/>
+          </a:ln>
+          <a:effectLst/>
+        </p:spPr>
+        <p:style>
+          <a:lnRef idx="1">
+            <a:schemeClr val="accent1"/>
+          </a:lnRef>
+          <a:fillRef idx="3">
+            <a:schemeClr val="accent1"/>
+          </a:fillRef>
+          <a:effectRef idx="2">
+            <a:schemeClr val="accent1"/>
+          </a:effectRef>
+          <a:fontRef idx="minor">
+            <a:schemeClr val="lt1"/>
+          </a:fontRef>
+        </p:style>
+        <p:txBody>
+          <a:bodyPr rtlCol="0" anchor="ctr"/>
+          <a:lstStyle/>
+          <a:p>
+            <a:pPr algn="ctr"/>
+          </a:p>
+        </p:txBody>
+      </p:sp>
+      <p:sp>
+        <p:nvSpPr>
+          <p:cNvPr id="29" name="TextBox 28"/>
+          <p:cNvSpPr txBox="1"/>
+          <p:nvPr/>
+        </p:nvSpPr>
+        <p:spPr>
+          <a:xfrm>
+            <a:off x="841248" y="3013456"/>
+            <a:ext cx="3061319" cy="332740"/>
+          </a:xfrm>
+          <a:prstGeom prst="rect">
+            <a:avLst/>
+          </a:prstGeom>
+          <a:noFill/>
+        </p:spPr>
+        <p:txBody>
+          <a:bodyPr wrap="square" lIns="0" rIns="0" tIns="0" bIns="0" anchor="ctr">
+            <a:spAutoFit/>
+          </a:bodyPr>
+          <a:lstStyle/>
+          <a:p>
+            <a:pPr algn="l">
+              <a:spcBef>
+                <a:spcPts val="0"/>
+              </a:spcBef>
+            </a:pPr>
+            <a:r>
+              <a:rPr sz="1300" b="0" i="0">
+                <a:solidFill>
+                  <a:srgbClr val="122738"/>
+                </a:solidFill>
+                <a:latin typeface="Segoe UI"/>
+              </a:rPr>
+              <a:t>États réglementaires publiés</a:t>
+            </a:r>
+          </a:p>
+        </p:txBody>
+      </p:sp>
+      <p:sp>
+        <p:nvSpPr>
+          <p:cNvPr id="30" name="TextBox 29"/>
+          <p:cNvSpPr txBox="1"/>
+          <p:nvPr/>
+        </p:nvSpPr>
+        <p:spPr>
+          <a:xfrm>
+            <a:off x="4048871" y="3013456"/>
+            <a:ext cx="4558210" cy="332740"/>
+          </a:xfrm>
+          <a:prstGeom prst="rect">
+            <a:avLst/>
+          </a:prstGeom>
+          <a:noFill/>
+        </p:spPr>
+        <p:txBody>
+          <a:bodyPr wrap="square" lIns="0" rIns="0" tIns="0" bIns="0" anchor="ctr">
+            <a:spAutoFit/>
+          </a:bodyPr>
+          <a:lstStyle/>
+          <a:p>
+            <a:pPr algn="l">
+              <a:spcBef>
+                <a:spcPts val="0"/>
+              </a:spcBef>
+            </a:pPr>
+            <a:r>
+              <a:rPr sz="1300" b="0" i="0">
+                <a:solidFill>
+                  <a:srgbClr val="122738"/>
+                </a:solidFill>
+                <a:latin typeface="Segoe UI"/>
+              </a:rPr>
+              <a:t>quatre bilans réels, anonymisés, pour la descente d'échelle</a:t>
+            </a:r>
+          </a:p>
+        </p:txBody>
+      </p:sp>
+      <p:sp>
+        <p:nvSpPr>
+          <p:cNvPr id="31" name="TextBox 30"/>
+          <p:cNvSpPr txBox="1"/>
+          <p:nvPr/>
+        </p:nvSpPr>
+        <p:spPr>
+          <a:xfrm>
+            <a:off x="8753386" y="3013456"/>
+            <a:ext cx="2633636" cy="332740"/>
+          </a:xfrm>
+          <a:prstGeom prst="rect">
+            <a:avLst/>
+          </a:prstGeom>
+          <a:noFill/>
+        </p:spPr>
+        <p:txBody>
+          <a:bodyPr wrap="square" lIns="0" rIns="0" tIns="0" bIns="0" anchor="ctr">
+            <a:spAutoFit/>
+          </a:bodyPr>
+          <a:lstStyle/>
+          <a:p>
+            <a:pPr algn="l">
+              <a:spcBef>
+                <a:spcPts val="0"/>
+              </a:spcBef>
+            </a:pPr>
+            <a:r>
+              <a:rPr sz="1300" b="1" i="0">
+                <a:solidFill>
+                  <a:srgbClr val="223E55"/>
+                </a:solidFill>
+                <a:latin typeface="Segoe UI"/>
+              </a:rPr>
+              <a:t>versionné, rejouable</a:t>
+            </a:r>
+          </a:p>
+        </p:txBody>
+      </p:sp>
+      <p:sp>
+        <p:nvSpPr>
+          <p:cNvPr id="32" name="Rectangle 31"/>
+          <p:cNvSpPr/>
+          <p:nvPr/>
+        </p:nvSpPr>
+        <p:spPr>
+          <a:xfrm>
+            <a:off x="749808" y="3346196"/>
+            <a:ext cx="10692079" cy="332740"/>
+          </a:xfrm>
+          <a:prstGeom prst="rect">
+            <a:avLst/>
+          </a:prstGeom>
+          <a:solidFill>
+            <a:srgbClr val="F2F2F2"/>
+          </a:solidFill>
+          <a:ln>
+            <a:noFill/>
+          </a:ln>
+          <a:effectLst/>
+        </p:spPr>
+        <p:style>
+          <a:lnRef idx="1">
+            <a:schemeClr val="accent1"/>
+          </a:lnRef>
+          <a:fillRef idx="3">
+            <a:schemeClr val="accent1"/>
+          </a:fillRef>
+          <a:effectRef idx="2">
+            <a:schemeClr val="accent1"/>
+          </a:effectRef>
+          <a:fontRef idx="minor">
+            <a:schemeClr val="lt1"/>
+          </a:fontRef>
+        </p:style>
+        <p:txBody>
+          <a:bodyPr rtlCol="0" anchor="ctr"/>
+          <a:lstStyle/>
+          <a:p>
+            <a:pPr algn="ctr"/>
+          </a:p>
+        </p:txBody>
+      </p:sp>
+      <p:sp>
+        <p:nvSpPr>
+          <p:cNvPr id="33" name="Rectangle 32"/>
+          <p:cNvSpPr/>
+          <p:nvPr/>
+        </p:nvSpPr>
+        <p:spPr>
+          <a:xfrm>
+            <a:off x="749808" y="3672586"/>
+            <a:ext cx="10692079" cy="6350"/>
+          </a:xfrm>
+          <a:prstGeom prst="rect">
+            <a:avLst/>
+          </a:prstGeom>
+          <a:solidFill>
+            <a:srgbClr val="D9D9D9"/>
+          </a:solidFill>
+          <a:ln>
+            <a:noFill/>
+          </a:ln>
+          <a:effectLst/>
+        </p:spPr>
+        <p:style>
+          <a:lnRef idx="1">
+            <a:schemeClr val="accent1"/>
+          </a:lnRef>
+          <a:fillRef idx="3">
+            <a:schemeClr val="accent1"/>
+          </a:fillRef>
+          <a:effectRef idx="2">
+            <a:schemeClr val="accent1"/>
+          </a:effectRef>
+          <a:fontRef idx="minor">
+            <a:schemeClr val="lt1"/>
+          </a:fontRef>
+        </p:style>
+        <p:txBody>
+          <a:bodyPr rtlCol="0" anchor="ctr"/>
+          <a:lstStyle/>
+          <a:p>
+            <a:pPr algn="ctr"/>
+          </a:p>
+        </p:txBody>
+      </p:sp>
+      <p:sp>
+        <p:nvSpPr>
+          <p:cNvPr id="34" name="TextBox 33"/>
+          <p:cNvSpPr txBox="1"/>
+          <p:nvPr/>
+        </p:nvSpPr>
+        <p:spPr>
+          <a:xfrm>
+            <a:off x="841248" y="3346196"/>
+            <a:ext cx="3061319" cy="332740"/>
+          </a:xfrm>
+          <a:prstGeom prst="rect">
+            <a:avLst/>
+          </a:prstGeom>
+          <a:noFill/>
+        </p:spPr>
+        <p:txBody>
+          <a:bodyPr wrap="square" lIns="0" rIns="0" tIns="0" bIns="0" anchor="ctr">
+            <a:spAutoFit/>
+          </a:bodyPr>
+          <a:lstStyle/>
+          <a:p>
+            <a:pPr algn="l">
+              <a:spcBef>
+                <a:spcPts val="0"/>
+              </a:spcBef>
+            </a:pPr>
+            <a:r>
+              <a:rPr sz="1300" b="0" i="0">
+                <a:solidFill>
+                  <a:srgbClr val="122738"/>
+                </a:solidFill>
+                <a:latin typeface="Segoe UI"/>
+              </a:rPr>
+              <a:t>Comptage d'incidents par vecteur</a:t>
+            </a:r>
+          </a:p>
+        </p:txBody>
+      </p:sp>
+      <p:sp>
+        <p:nvSpPr>
+          <p:cNvPr id="35" name="TextBox 34"/>
+          <p:cNvSpPr txBox="1"/>
+          <p:nvPr/>
+        </p:nvSpPr>
+        <p:spPr>
+          <a:xfrm>
+            <a:off x="4048871" y="3346196"/>
+            <a:ext cx="4558210" cy="332740"/>
+          </a:xfrm>
+          <a:prstGeom prst="rect">
+            <a:avLst/>
+          </a:prstGeom>
+          <a:noFill/>
+        </p:spPr>
+        <p:txBody>
+          <a:bodyPr wrap="square" lIns="0" rIns="0" tIns="0" bIns="0" anchor="ctr">
+            <a:spAutoFit/>
+          </a:bodyPr>
+          <a:lstStyle/>
+          <a:p>
+            <a:pPr algn="l">
+              <a:spcBef>
+                <a:spcPts val="0"/>
+              </a:spcBef>
+            </a:pPr>
+            <a:r>
+              <a:rPr sz="1300" b="0" i="0">
+                <a:solidFill>
+                  <a:srgbClr val="122738"/>
+                </a:solidFill>
+                <a:latin typeface="Segoe UI"/>
+              </a:rPr>
+              <a:t>la structure du risque, jamais son niveau</a:t>
+            </a:r>
+          </a:p>
+        </p:txBody>
+      </p:sp>
+      <p:sp>
+        <p:nvSpPr>
+          <p:cNvPr id="36" name="TextBox 35"/>
+          <p:cNvSpPr txBox="1"/>
+          <p:nvPr/>
+        </p:nvSpPr>
+        <p:spPr>
+          <a:xfrm>
+            <a:off x="8753386" y="3346196"/>
+            <a:ext cx="2633636" cy="332740"/>
+          </a:xfrm>
+          <a:prstGeom prst="rect">
+            <a:avLst/>
+          </a:prstGeom>
+          <a:noFill/>
+        </p:spPr>
+        <p:txBody>
+          <a:bodyPr wrap="square" lIns="0" rIns="0" tIns="0" bIns="0" anchor="ctr">
+            <a:spAutoFit/>
+          </a:bodyPr>
+          <a:lstStyle/>
+          <a:p>
+            <a:pPr algn="l">
+              <a:spcBef>
+                <a:spcPts val="0"/>
+              </a:spcBef>
+            </a:pPr>
+            <a:r>
+              <a:rPr sz="1300" b="1" i="0">
+                <a:solidFill>
+                  <a:srgbClr val="B10031"/>
+                </a:solidFill>
+                <a:latin typeface="Segoe UI"/>
+              </a:rPr>
+              <a:t>citation externe</a:t>
+            </a:r>
+          </a:p>
+        </p:txBody>
+      </p:sp>
+      <p:sp>
+        <p:nvSpPr>
+          <p:cNvPr id="37" name="Rectangle 36"/>
+          <p:cNvSpPr/>
+          <p:nvPr/>
+        </p:nvSpPr>
+        <p:spPr>
+          <a:xfrm>
+            <a:off x="749808" y="4005326"/>
+            <a:ext cx="10692079" cy="6350"/>
+          </a:xfrm>
+          <a:prstGeom prst="rect">
+            <a:avLst/>
+          </a:prstGeom>
+          <a:solidFill>
+            <a:srgbClr val="D9D9D9"/>
+          </a:solidFill>
+          <a:ln>
+            <a:noFill/>
+          </a:ln>
+          <a:effectLst/>
+        </p:spPr>
+        <p:style>
+          <a:lnRef idx="1">
+            <a:schemeClr val="accent1"/>
+          </a:lnRef>
+          <a:fillRef idx="3">
+            <a:schemeClr val="accent1"/>
+          </a:fillRef>
+          <a:effectRef idx="2">
+            <a:schemeClr val="accent1"/>
+          </a:effectRef>
+          <a:fontRef idx="minor">
+            <a:schemeClr val="lt1"/>
+          </a:fontRef>
+        </p:style>
+        <p:txBody>
+          <a:bodyPr rtlCol="0" anchor="ctr"/>
+          <a:lstStyle/>
+          <a:p>
+            <a:pPr algn="ctr"/>
+          </a:p>
+        </p:txBody>
+      </p:sp>
+      <p:sp>
+        <p:nvSpPr>
+          <p:cNvPr id="38" name="TextBox 37"/>
+          <p:cNvSpPr txBox="1"/>
+          <p:nvPr/>
+        </p:nvSpPr>
+        <p:spPr>
+          <a:xfrm>
+            <a:off x="841248" y="3678936"/>
+            <a:ext cx="3061319" cy="332740"/>
+          </a:xfrm>
+          <a:prstGeom prst="rect">
+            <a:avLst/>
+          </a:prstGeom>
+          <a:noFill/>
+        </p:spPr>
+        <p:txBody>
+          <a:bodyPr wrap="square" lIns="0" rIns="0" tIns="0" bIns="0" anchor="ctr">
+            <a:spAutoFit/>
+          </a:bodyPr>
+          <a:lstStyle/>
+          <a:p>
+            <a:pPr algn="l">
+              <a:spcBef>
+                <a:spcPts val="0"/>
+              </a:spcBef>
+            </a:pPr>
+            <a:r>
+              <a:rPr sz="1300" b="0" i="0">
+                <a:solidFill>
+                  <a:srgbClr val="122738"/>
+                </a:solidFill>
+                <a:latin typeface="Segoe UI"/>
+              </a:rPr>
+              <a:t>Étude de marché de la cyberassurance</a:t>
+            </a:r>
+          </a:p>
+        </p:txBody>
+      </p:sp>
+      <p:sp>
+        <p:nvSpPr>
+          <p:cNvPr id="39" name="TextBox 38"/>
+          <p:cNvSpPr txBox="1"/>
+          <p:nvPr/>
+        </p:nvSpPr>
+        <p:spPr>
+          <a:xfrm>
+            <a:off x="4048871" y="3678936"/>
+            <a:ext cx="4558210" cy="332740"/>
+          </a:xfrm>
+          <a:prstGeom prst="rect">
+            <a:avLst/>
+          </a:prstGeom>
+          <a:noFill/>
+        </p:spPr>
+        <p:txBody>
+          <a:bodyPr wrap="square" lIns="0" rIns="0" tIns="0" bIns="0" anchor="ctr">
+            <a:spAutoFit/>
+          </a:bodyPr>
+          <a:lstStyle/>
+          <a:p>
+            <a:pPr algn="l">
+              <a:spcBef>
+                <a:spcPts val="0"/>
+              </a:spcBef>
+            </a:pPr>
+            <a:r>
+              <a:rPr sz="1300" b="0" i="0">
+                <a:solidFill>
+                  <a:srgbClr val="122738"/>
+                </a:solidFill>
+                <a:latin typeface="Segoe UI"/>
+              </a:rPr>
+              <a:t>le contexte, et aucune calibration</a:t>
+            </a:r>
+          </a:p>
+        </p:txBody>
+      </p:sp>
+      <p:sp>
+        <p:nvSpPr>
+          <p:cNvPr id="40" name="TextBox 39"/>
+          <p:cNvSpPr txBox="1"/>
+          <p:nvPr/>
+        </p:nvSpPr>
+        <p:spPr>
+          <a:xfrm>
+            <a:off x="8753386" y="3678936"/>
+            <a:ext cx="2633636" cy="332740"/>
+          </a:xfrm>
+          <a:prstGeom prst="rect">
+            <a:avLst/>
+          </a:prstGeom>
+          <a:noFill/>
+        </p:spPr>
+        <p:txBody>
+          <a:bodyPr wrap="square" lIns="0" rIns="0" tIns="0" bIns="0" anchor="ctr">
+            <a:spAutoFit/>
+          </a:bodyPr>
+          <a:lstStyle/>
+          <a:p>
+            <a:pPr algn="l">
+              <a:spcBef>
+                <a:spcPts val="0"/>
+              </a:spcBef>
+            </a:pPr>
+            <a:r>
+              <a:rPr sz="1300" b="1" i="0">
+                <a:solidFill>
+                  <a:srgbClr val="B10031"/>
+                </a:solidFill>
+                <a:latin typeface="Segoe UI"/>
+              </a:rPr>
+              <a:t>citation externe</a:t>
+            </a:r>
+          </a:p>
+        </p:txBody>
+      </p:sp>
+      <p:sp>
+        <p:nvSpPr>
+          <p:cNvPr id="41" name="Rectangle 40"/>
+          <p:cNvSpPr/>
+          <p:nvPr/>
+        </p:nvSpPr>
+        <p:spPr>
+          <a:xfrm>
+            <a:off x="749808" y="4011676"/>
+            <a:ext cx="10692079" cy="332740"/>
+          </a:xfrm>
+          <a:prstGeom prst="rect">
+            <a:avLst/>
+          </a:prstGeom>
+          <a:solidFill>
+            <a:srgbClr val="F2F2F2"/>
+          </a:solidFill>
+          <a:ln>
+            <a:noFill/>
+          </a:ln>
+          <a:effectLst/>
+        </p:spPr>
+        <p:style>
+          <a:lnRef idx="1">
+            <a:schemeClr val="accent1"/>
+          </a:lnRef>
+          <a:fillRef idx="3">
+            <a:schemeClr val="accent1"/>
+          </a:fillRef>
+          <a:effectRef idx="2">
+            <a:schemeClr val="accent1"/>
+          </a:effectRef>
+          <a:fontRef idx="minor">
+            <a:schemeClr val="lt1"/>
+          </a:fontRef>
+        </p:style>
+        <p:txBody>
+          <a:bodyPr rtlCol="0" anchor="ctr"/>
+          <a:lstStyle/>
+          <a:p>
+            <a:pPr algn="ctr"/>
+          </a:p>
+        </p:txBody>
+      </p:sp>
+      <p:sp>
+        <p:nvSpPr>
+          <p:cNvPr id="42" name="Rectangle 41"/>
+          <p:cNvSpPr/>
+          <p:nvPr/>
+        </p:nvSpPr>
+        <p:spPr>
+          <a:xfrm>
+            <a:off x="749808" y="4338066"/>
+            <a:ext cx="10692079" cy="6350"/>
+          </a:xfrm>
+          <a:prstGeom prst="rect">
+            <a:avLst/>
+          </a:prstGeom>
+          <a:solidFill>
+            <a:srgbClr val="D9D9D9"/>
+          </a:solidFill>
+          <a:ln>
+            <a:noFill/>
+          </a:ln>
+          <a:effectLst/>
+        </p:spPr>
+        <p:style>
+          <a:lnRef idx="1">
+            <a:schemeClr val="accent1"/>
+          </a:lnRef>
+          <a:fillRef idx="3">
+            <a:schemeClr val="accent1"/>
+          </a:fillRef>
+          <a:effectRef idx="2">
+            <a:schemeClr val="accent1"/>
+          </a:effectRef>
+          <a:fontRef idx="minor">
+            <a:schemeClr val="lt1"/>
+          </a:fontRef>
+        </p:style>
+        <p:txBody>
+          <a:bodyPr rtlCol="0" anchor="ctr"/>
+          <a:lstStyle/>
+          <a:p>
+            <a:pPr algn="ctr"/>
+          </a:p>
+        </p:txBody>
+      </p:sp>
+      <p:sp>
+        <p:nvSpPr>
+          <p:cNvPr id="43" name="TextBox 42"/>
+          <p:cNvSpPr txBox="1"/>
+          <p:nvPr/>
+        </p:nvSpPr>
+        <p:spPr>
+          <a:xfrm>
+            <a:off x="841248" y="4011676"/>
+            <a:ext cx="3061319" cy="332740"/>
+          </a:xfrm>
+          <a:prstGeom prst="rect">
+            <a:avLst/>
+          </a:prstGeom>
+          <a:noFill/>
+        </p:spPr>
+        <p:txBody>
+          <a:bodyPr wrap="square" lIns="0" rIns="0" tIns="0" bIns="0" anchor="ctr">
+            <a:spAutoFit/>
+          </a:bodyPr>
+          <a:lstStyle/>
+          <a:p>
+            <a:pPr algn="l">
+              <a:spcBef>
+                <a:spcPts val="0"/>
+              </a:spcBef>
+            </a:pPr>
+            <a:r>
+              <a:rPr sz="1300" b="0" i="0">
+                <a:solidFill>
+                  <a:srgbClr val="122738"/>
+                </a:solidFill>
+                <a:latin typeface="Segoe UI"/>
+              </a:rPr>
+              <a:t>Préprint de cascade climatique</a:t>
+            </a:r>
+          </a:p>
+        </p:txBody>
+      </p:sp>
+      <p:sp>
+        <p:nvSpPr>
+          <p:cNvPr id="44" name="TextBox 43"/>
+          <p:cNvSpPr txBox="1"/>
+          <p:nvPr/>
+        </p:nvSpPr>
+        <p:spPr>
+          <a:xfrm>
+            <a:off x="4048871" y="4011676"/>
+            <a:ext cx="4558210" cy="332740"/>
+          </a:xfrm>
+          <a:prstGeom prst="rect">
+            <a:avLst/>
+          </a:prstGeom>
+          <a:noFill/>
+        </p:spPr>
+        <p:txBody>
+          <a:bodyPr wrap="square" lIns="0" rIns="0" tIns="0" bIns="0" anchor="ctr">
+            <a:spAutoFit/>
+          </a:bodyPr>
+          <a:lstStyle/>
+          <a:p>
+            <a:pPr algn="l">
+              <a:spcBef>
+                <a:spcPts val="0"/>
+              </a:spcBef>
+            </a:pPr>
+            <a:r>
+              <a:rPr sz="1300" b="0" i="0">
+                <a:solidFill>
+                  <a:srgbClr val="122738"/>
+                </a:solidFill>
+                <a:latin typeface="Segoe UI"/>
+              </a:rPr>
+              <a:t>le protocole, jamais l'ordre du résultat</a:t>
+            </a:r>
+          </a:p>
+        </p:txBody>
+      </p:sp>
+      <p:sp>
+        <p:nvSpPr>
+          <p:cNvPr id="45" name="TextBox 44"/>
+          <p:cNvSpPr txBox="1"/>
+          <p:nvPr/>
+        </p:nvSpPr>
+        <p:spPr>
+          <a:xfrm>
+            <a:off x="8753386" y="4011676"/>
+            <a:ext cx="2633636" cy="332740"/>
+          </a:xfrm>
+          <a:prstGeom prst="rect">
+            <a:avLst/>
+          </a:prstGeom>
+          <a:noFill/>
+        </p:spPr>
+        <p:txBody>
+          <a:bodyPr wrap="square" lIns="0" rIns="0" tIns="0" bIns="0" anchor="ctr">
+            <a:spAutoFit/>
+          </a:bodyPr>
+          <a:lstStyle/>
+          <a:p>
+            <a:pPr algn="l">
+              <a:spcBef>
+                <a:spcPts val="0"/>
+              </a:spcBef>
+            </a:pPr>
+            <a:r>
+              <a:rPr sz="1300" b="1" i="0">
+                <a:solidFill>
+                  <a:srgbClr val="B10031"/>
+                </a:solidFill>
+                <a:latin typeface="Segoe UI"/>
+              </a:rPr>
+              <a:t>citation externe</a:t>
+            </a:r>
+          </a:p>
+        </p:txBody>
+      </p:sp>
+      <p:sp>
+        <p:nvSpPr>
+          <p:cNvPr id="46" name="TextBox 45"/>
+          <p:cNvSpPr txBox="1"/>
+          <p:nvPr/>
+        </p:nvSpPr>
+        <p:spPr>
+          <a:xfrm>
+            <a:off x="749808" y="4618736"/>
+            <a:ext cx="10692079" cy="548640"/>
           </a:xfrm>
           <a:prstGeom prst="rect">
             <a:avLst/>
@@ -13110,161 +19452,20 @@
               </a:spcBef>
             </a:pPr>
             <a:r>
-              <a:rPr sz="1600" b="1" i="0">
-                <a:solidFill>
-                  <a:srgbClr val="223E55"/>
-                </a:solidFill>
-                <a:latin typeface="Segoe UI"/>
-              </a:rPr>
-              <a:t>Sévérité en euros : base internationale de pertes opérationnelles</a:t>
-            </a:r>
-          </a:p>
-          <a:p>
-            <a:pPr algn="l" marL="219456" indent="-219456">
-              <a:spcBef>
-                <a:spcPts val="1400"/>
-              </a:spcBef>
-            </a:pPr>
-            <a:r>
-              <a:rPr sz="1600" b="0" i="0">
+              <a:rPr sz="1300" b="0" i="0">
                 <a:solidFill>
                   <a:srgbClr val="595959"/>
                 </a:solidFill>
                 <a:latin typeface="Segoe UI"/>
               </a:rPr>
-              <a:t>•   </a:t>
-            </a:r>
-            <a:r>
-              <a:rPr sz="1600" b="0" i="0">
-                <a:solidFill>
-                  <a:srgbClr val="122738"/>
-                </a:solidFill>
-                <a:latin typeface="Segoe UI"/>
-              </a:rPr>
-              <a:t>Chronologie de brèches : fréquence et étude d'événement</a:t>
-            </a:r>
-          </a:p>
-          <a:p>
-            <a:pPr algn="l" marL="219456" indent="-219456">
-              <a:spcBef>
-                <a:spcPts val="1400"/>
-              </a:spcBef>
-            </a:pPr>
-            <a:r>
-              <a:rPr sz="1600" b="0" i="0">
-                <a:solidFill>
-                  <a:srgbClr val="595959"/>
-                </a:solidFill>
-                <a:latin typeface="Segoe UI"/>
-              </a:rPr>
-              <a:t>•   </a:t>
-            </a:r>
-            <a:r>
-              <a:rPr sz="1600" b="0" i="0">
-                <a:solidFill>
-                  <a:srgbClr val="122738"/>
-                </a:solidFill>
-                <a:latin typeface="Segoe UI"/>
-              </a:rPr>
-              <a:t>Corpus de rapports post-mortem : structure de la direction</a:t>
-            </a:r>
-          </a:p>
-          <a:p>
-            <a:pPr algn="l" marL="219456" indent="-219456">
-              <a:spcBef>
-                <a:spcPts val="1400"/>
-              </a:spcBef>
-            </a:pPr>
-            <a:r>
-              <a:rPr sz="1600" b="0" i="0">
-                <a:solidFill>
-                  <a:srgbClr val="595959"/>
-                </a:solidFill>
-                <a:latin typeface="Segoe UI"/>
-              </a:rPr>
-              <a:t>•   </a:t>
-            </a:r>
-            <a:r>
-              <a:rPr sz="1600" b="0" i="0">
-                <a:solidFill>
-                  <a:srgbClr val="122738"/>
-                </a:solidFill>
-                <a:latin typeface="Segoe UI"/>
-              </a:rPr>
-              <a:t>États réglementaires publiés : quatre bilans réels, anonymisés</a:t>
-            </a:r>
-          </a:p>
-          <a:p>
-            <a:pPr algn="l" marL="219456" indent="-219456">
-              <a:spcBef>
-                <a:spcPts val="1400"/>
-              </a:spcBef>
-            </a:pPr>
-            <a:r>
-              <a:rPr sz="1600" b="0" i="0">
-                <a:solidFill>
-                  <a:srgbClr val="595959"/>
-                </a:solidFill>
-                <a:latin typeface="Segoe UI"/>
-              </a:rPr>
-              <a:t>•   </a:t>
-            </a:r>
-            <a:r>
-              <a:rPr sz="1600" b="0" i="0">
-                <a:solidFill>
-                  <a:srgbClr val="122738"/>
-                </a:solidFill>
-                <a:latin typeface="Segoe UI"/>
-              </a:rPr>
-              <a:t>Comptage d'incidents par vecteur : structure, jamais niveau</a:t>
-            </a:r>
-          </a:p>
-          <a:p>
-            <a:pPr algn="l" marL="219456" indent="-219456">
-              <a:spcBef>
-                <a:spcPts val="1400"/>
-              </a:spcBef>
-            </a:pPr>
-            <a:r>
-              <a:rPr sz="1600" b="0" i="0">
-                <a:solidFill>
-                  <a:srgbClr val="595959"/>
-                </a:solidFill>
-                <a:latin typeface="Segoe UI"/>
-              </a:rPr>
-              <a:t>•   </a:t>
-            </a:r>
-            <a:r>
-              <a:rPr sz="1600" b="0" i="0">
-                <a:solidFill>
-                  <a:srgbClr val="122738"/>
-                </a:solidFill>
-                <a:latin typeface="Segoe UI"/>
-              </a:rPr>
-              <a:t>Étude de marché cyberassurance : contexte, aucune calibration</a:t>
-            </a:r>
-          </a:p>
-          <a:p>
-            <a:pPr algn="l">
-              <a:spcBef>
-                <a:spcPts val="1400"/>
-              </a:spcBef>
-            </a:pPr>
-            <a:r>
-              <a:rPr sz="1600" b="1" i="0">
-                <a:solidFill>
-                  <a:srgbClr val="223E55"/>
-                </a:solidFill>
-                <a:latin typeface="Segoe UI"/>
-              </a:rPr>
-              <a:t>Deux statuts distingués : versionné et rejouable, ou citation externe non recalculable</a:t>
-            </a:r>
-          </a:p>
-        </p:txBody>
-      </p:sp>
-      <p:sp>
-        <p:nvSpPr>
-          <p:cNvPr id="11" name="TextBox 10"/>
+              <a:t>Une citation externe est une valeur qu'aucun script du dépôt ne reproduit. Elle est déclarée comme telle, elle n'entre dans aucune calibration, et elle ne porte aucun niveau de capital.</a:t>
+            </a:r>
+          </a:p>
+        </p:txBody>
+      </p:sp>
+      <p:sp>
+        <p:nvSpPr>
+          <p:cNvPr id="47" name="TextBox 46"/>
           <p:cNvSpPr txBox="1"/>
           <p:nvPr/>
         </p:nvSpPr>
@@ -14405,14 +20606,1990 @@
       </p:sp>
       <p:sp>
         <p:nvSpPr>
-          <p:cNvPr id="10" name="TextBox 9"/>
+          <p:cNvPr id="10" name="Rectangle 9"/>
+          <p:cNvSpPr/>
+          <p:nvPr/>
+        </p:nvSpPr>
+        <p:spPr>
+          <a:xfrm>
+            <a:off x="749808" y="1481328"/>
+            <a:ext cx="10692079" cy="329184"/>
+          </a:xfrm>
+          <a:prstGeom prst="rect">
+            <a:avLst/>
+          </a:prstGeom>
+          <a:solidFill>
+            <a:srgbClr val="223E55"/>
+          </a:solidFill>
+          <a:ln>
+            <a:noFill/>
+          </a:ln>
+          <a:effectLst/>
+        </p:spPr>
+        <p:style>
+          <a:lnRef idx="1">
+            <a:schemeClr val="accent1"/>
+          </a:lnRef>
+          <a:fillRef idx="3">
+            <a:schemeClr val="accent1"/>
+          </a:fillRef>
+          <a:effectRef idx="2">
+            <a:schemeClr val="accent1"/>
+          </a:effectRef>
+          <a:fontRef idx="minor">
+            <a:schemeClr val="lt1"/>
+          </a:fontRef>
+        </p:style>
+        <p:txBody>
+          <a:bodyPr rtlCol="0" anchor="ctr"/>
+          <a:lstStyle/>
+          <a:p>
+            <a:pPr algn="ctr"/>
+          </a:p>
+        </p:txBody>
+      </p:sp>
+      <p:sp>
+        <p:nvSpPr>
+          <p:cNvPr id="11" name="TextBox 10"/>
           <p:cNvSpPr txBox="1"/>
           <p:nvPr/>
         </p:nvSpPr>
         <p:spPr>
           <a:xfrm>
-            <a:off x="749808" y="1572768"/>
-            <a:ext cx="10692079" cy="4480560"/>
+            <a:off x="841248" y="1481328"/>
+            <a:ext cx="3061319" cy="329184"/>
+          </a:xfrm>
+          <a:prstGeom prst="rect">
+            <a:avLst/>
+          </a:prstGeom>
+          <a:noFill/>
+        </p:spPr>
+        <p:txBody>
+          <a:bodyPr wrap="square" lIns="0" rIns="0" tIns="0" bIns="0" anchor="ctr">
+            <a:spAutoFit/>
+          </a:bodyPr>
+          <a:lstStyle/>
+          <a:p>
+            <a:pPr algn="l">
+              <a:spcBef>
+                <a:spcPts val="0"/>
+              </a:spcBef>
+            </a:pPr>
+            <a:r>
+              <a:rPr sz="1300" b="1" i="0">
+                <a:solidFill>
+                  <a:srgbClr val="FFFFFF"/>
+                </a:solidFill>
+                <a:latin typeface="Segoe UI"/>
+              </a:rPr>
+              <a:t>Paramètre</a:t>
+            </a:r>
+          </a:p>
+        </p:txBody>
+      </p:sp>
+      <p:sp>
+        <p:nvSpPr>
+          <p:cNvPr id="12" name="TextBox 11"/>
+          <p:cNvSpPr txBox="1"/>
+          <p:nvPr/>
+        </p:nvSpPr>
+        <p:spPr>
+          <a:xfrm>
+            <a:off x="4048871" y="1481328"/>
+            <a:ext cx="2419794" cy="329184"/>
+          </a:xfrm>
+          <a:prstGeom prst="rect">
+            <a:avLst/>
+          </a:prstGeom>
+          <a:noFill/>
+        </p:spPr>
+        <p:txBody>
+          <a:bodyPr wrap="square" lIns="0" rIns="0" tIns="0" bIns="0" anchor="ctr">
+            <a:spAutoFit/>
+          </a:bodyPr>
+          <a:lstStyle/>
+          <a:p>
+            <a:pPr algn="l">
+              <a:spcBef>
+                <a:spcPts val="0"/>
+              </a:spcBef>
+            </a:pPr>
+            <a:r>
+              <a:rPr sz="1300" b="1" i="0">
+                <a:solidFill>
+                  <a:srgbClr val="FFFFFF"/>
+                </a:solidFill>
+                <a:latin typeface="Segoe UI"/>
+              </a:rPr>
+              <a:t>Valeur</a:t>
+            </a:r>
+          </a:p>
+        </p:txBody>
+      </p:sp>
+      <p:sp>
+        <p:nvSpPr>
+          <p:cNvPr id="13" name="TextBox 12"/>
+          <p:cNvSpPr txBox="1"/>
+          <p:nvPr/>
+        </p:nvSpPr>
+        <p:spPr>
+          <a:xfrm>
+            <a:off x="6614970" y="1481328"/>
+            <a:ext cx="1243666" cy="329184"/>
+          </a:xfrm>
+          <a:prstGeom prst="rect">
+            <a:avLst/>
+          </a:prstGeom>
+          <a:noFill/>
+        </p:spPr>
+        <p:txBody>
+          <a:bodyPr wrap="square" lIns="0" rIns="0" tIns="0" bIns="0" anchor="ctr">
+            <a:spAutoFit/>
+          </a:bodyPr>
+          <a:lstStyle/>
+          <a:p>
+            <a:pPr algn="l">
+              <a:spcBef>
+                <a:spcPts val="0"/>
+              </a:spcBef>
+            </a:pPr>
+            <a:r>
+              <a:rPr sz="1300" b="1" i="0">
+                <a:solidFill>
+                  <a:srgbClr val="FFFFFF"/>
+                </a:solidFill>
+                <a:latin typeface="Segoe UI"/>
+              </a:rPr>
+              <a:t>Statut</a:t>
+            </a:r>
+          </a:p>
+        </p:txBody>
+      </p:sp>
+      <p:sp>
+        <p:nvSpPr>
+          <p:cNvPr id="14" name="TextBox 13"/>
+          <p:cNvSpPr txBox="1"/>
+          <p:nvPr/>
+        </p:nvSpPr>
+        <p:spPr>
+          <a:xfrm>
+            <a:off x="8004940" y="1481328"/>
+            <a:ext cx="3382082" cy="329184"/>
+          </a:xfrm>
+          <a:prstGeom prst="rect">
+            <a:avLst/>
+          </a:prstGeom>
+          <a:noFill/>
+        </p:spPr>
+        <p:txBody>
+          <a:bodyPr wrap="square" lIns="0" rIns="0" tIns="0" bIns="0" anchor="ctr">
+            <a:spAutoFit/>
+          </a:bodyPr>
+          <a:lstStyle/>
+          <a:p>
+            <a:pPr algn="l">
+              <a:spcBef>
+                <a:spcPts val="0"/>
+              </a:spcBef>
+            </a:pPr>
+            <a:r>
+              <a:rPr sz="1300" b="1" i="0">
+                <a:solidFill>
+                  <a:srgbClr val="FFFFFF"/>
+                </a:solidFill>
+                <a:latin typeface="Segoe UI"/>
+              </a:rPr>
+              <a:t>Ce que le statut engage</a:t>
+            </a:r>
+          </a:p>
+        </p:txBody>
+      </p:sp>
+      <p:sp>
+        <p:nvSpPr>
+          <p:cNvPr id="15" name="Rectangle 14"/>
+          <p:cNvSpPr/>
+          <p:nvPr/>
+        </p:nvSpPr>
+        <p:spPr>
+          <a:xfrm>
+            <a:off x="749808" y="1810512"/>
+            <a:ext cx="10692079" cy="537464"/>
+          </a:xfrm>
+          <a:prstGeom prst="rect">
+            <a:avLst/>
+          </a:prstGeom>
+          <a:solidFill>
+            <a:srgbClr val="F2F2F2"/>
+          </a:solidFill>
+          <a:ln>
+            <a:noFill/>
+          </a:ln>
+          <a:effectLst/>
+        </p:spPr>
+        <p:style>
+          <a:lnRef idx="1">
+            <a:schemeClr val="accent1"/>
+          </a:lnRef>
+          <a:fillRef idx="3">
+            <a:schemeClr val="accent1"/>
+          </a:fillRef>
+          <a:effectRef idx="2">
+            <a:schemeClr val="accent1"/>
+          </a:effectRef>
+          <a:fontRef idx="minor">
+            <a:schemeClr val="lt1"/>
+          </a:fontRef>
+        </p:style>
+        <p:txBody>
+          <a:bodyPr rtlCol="0" anchor="ctr"/>
+          <a:lstStyle/>
+          <a:p>
+            <a:pPr algn="ctr"/>
+          </a:p>
+        </p:txBody>
+      </p:sp>
+      <p:sp>
+        <p:nvSpPr>
+          <p:cNvPr id="16" name="Rectangle 15"/>
+          <p:cNvSpPr/>
+          <p:nvPr/>
+        </p:nvSpPr>
+        <p:spPr>
+          <a:xfrm>
+            <a:off x="749808" y="2341626"/>
+            <a:ext cx="10692079" cy="6350"/>
+          </a:xfrm>
+          <a:prstGeom prst="rect">
+            <a:avLst/>
+          </a:prstGeom>
+          <a:solidFill>
+            <a:srgbClr val="D9D9D9"/>
+          </a:solidFill>
+          <a:ln>
+            <a:noFill/>
+          </a:ln>
+          <a:effectLst/>
+        </p:spPr>
+        <p:style>
+          <a:lnRef idx="1">
+            <a:schemeClr val="accent1"/>
+          </a:lnRef>
+          <a:fillRef idx="3">
+            <a:schemeClr val="accent1"/>
+          </a:fillRef>
+          <a:effectRef idx="2">
+            <a:schemeClr val="accent1"/>
+          </a:effectRef>
+          <a:fontRef idx="minor">
+            <a:schemeClr val="lt1"/>
+          </a:fontRef>
+        </p:style>
+        <p:txBody>
+          <a:bodyPr rtlCol="0" anchor="ctr"/>
+          <a:lstStyle/>
+          <a:p>
+            <a:pPr algn="ctr"/>
+          </a:p>
+        </p:txBody>
+      </p:sp>
+      <p:sp>
+        <p:nvSpPr>
+          <p:cNvPr id="17" name="TextBox 16"/>
+          <p:cNvSpPr txBox="1"/>
+          <p:nvPr/>
+        </p:nvSpPr>
+        <p:spPr>
+          <a:xfrm>
+            <a:off x="841248" y="1810512"/>
+            <a:ext cx="3061319" cy="537464"/>
+          </a:xfrm>
+          <a:prstGeom prst="rect">
+            <a:avLst/>
+          </a:prstGeom>
+          <a:noFill/>
+        </p:spPr>
+        <p:txBody>
+          <a:bodyPr wrap="square" lIns="0" rIns="0" tIns="0" bIns="0" anchor="ctr">
+            <a:spAutoFit/>
+          </a:bodyPr>
+          <a:lstStyle/>
+          <a:p>
+            <a:pPr algn="l">
+              <a:spcBef>
+                <a:spcPts val="0"/>
+              </a:spcBef>
+            </a:pPr>
+            <a:r>
+              <a:rPr sz="1300" b="0" i="0">
+                <a:solidFill>
+                  <a:srgbClr val="122738"/>
+                </a:solidFill>
+                <a:latin typeface="Segoe UI"/>
+              </a:rPr>
+              <a:t>Seuil de la loi de queue, u</a:t>
+            </a:r>
+          </a:p>
+        </p:txBody>
+      </p:sp>
+      <p:sp>
+        <p:nvSpPr>
+          <p:cNvPr id="18" name="TextBox 17"/>
+          <p:cNvSpPr txBox="1"/>
+          <p:nvPr/>
+        </p:nvSpPr>
+        <p:spPr>
+          <a:xfrm>
+            <a:off x="4048871" y="1810512"/>
+            <a:ext cx="2419794" cy="537464"/>
+          </a:xfrm>
+          <a:prstGeom prst="rect">
+            <a:avLst/>
+          </a:prstGeom>
+          <a:noFill/>
+        </p:spPr>
+        <p:txBody>
+          <a:bodyPr wrap="square" lIns="0" rIns="0" tIns="0" bIns="0" anchor="ctr">
+            <a:spAutoFit/>
+          </a:bodyPr>
+          <a:lstStyle/>
+          <a:p>
+            <a:pPr algn="l">
+              <a:spcBef>
+                <a:spcPts val="0"/>
+              </a:spcBef>
+            </a:pPr>
+            <a:r>
+              <a:rPr sz="1300" b="0" i="0">
+                <a:solidFill>
+                  <a:srgbClr val="122738"/>
+                </a:solidFill>
+                <a:latin typeface="Segoe UI"/>
+              </a:rPr>
+              <a:t>20,03 M€</a:t>
+            </a:r>
+          </a:p>
+        </p:txBody>
+      </p:sp>
+      <p:sp>
+        <p:nvSpPr>
+          <p:cNvPr id="19" name="TextBox 18"/>
+          <p:cNvSpPr txBox="1"/>
+          <p:nvPr/>
+        </p:nvSpPr>
+        <p:spPr>
+          <a:xfrm>
+            <a:off x="6614970" y="1810512"/>
+            <a:ext cx="1243666" cy="537464"/>
+          </a:xfrm>
+          <a:prstGeom prst="rect">
+            <a:avLst/>
+          </a:prstGeom>
+          <a:noFill/>
+        </p:spPr>
+        <p:txBody>
+          <a:bodyPr wrap="square" lIns="0" rIns="0" tIns="0" bIns="0" anchor="ctr">
+            <a:spAutoFit/>
+          </a:bodyPr>
+          <a:lstStyle/>
+          <a:p>
+            <a:pPr algn="l">
+              <a:spcBef>
+                <a:spcPts val="0"/>
+              </a:spcBef>
+            </a:pPr>
+            <a:r>
+              <a:rPr sz="1300" b="1" i="0">
+                <a:solidFill>
+                  <a:srgbClr val="B10031"/>
+                </a:solidFill>
+                <a:latin typeface="Segoe UI"/>
+              </a:rPr>
+              <a:t>posé</a:t>
+            </a:r>
+          </a:p>
+        </p:txBody>
+      </p:sp>
+      <p:sp>
+        <p:nvSpPr>
+          <p:cNvPr id="20" name="TextBox 19"/>
+          <p:cNvSpPr txBox="1"/>
+          <p:nvPr/>
+        </p:nvSpPr>
+        <p:spPr>
+          <a:xfrm>
+            <a:off x="8004940" y="1810512"/>
+            <a:ext cx="3382082" cy="537464"/>
+          </a:xfrm>
+          <a:prstGeom prst="rect">
+            <a:avLst/>
+          </a:prstGeom>
+          <a:noFill/>
+        </p:spPr>
+        <p:txBody>
+          <a:bodyPr wrap="square" lIns="0" rIns="0" tIns="0" bIns="0" anchor="ctr">
+            <a:spAutoFit/>
+          </a:bodyPr>
+          <a:lstStyle/>
+          <a:p>
+            <a:pPr algn="l">
+              <a:spcBef>
+                <a:spcPts val="0"/>
+              </a:spcBef>
+            </a:pPr>
+            <a:r>
+              <a:rPr sz="1300" b="0" i="0">
+                <a:solidFill>
+                  <a:srgbClr val="122738"/>
+                </a:solidFill>
+                <a:latin typeface="Segoe UI"/>
+              </a:rPr>
+              <a:t>règle du percentile 85 ; la règle de stabilité retombe dessus</a:t>
+            </a:r>
+          </a:p>
+        </p:txBody>
+      </p:sp>
+      <p:sp>
+        <p:nvSpPr>
+          <p:cNvPr id="21" name="Rectangle 20"/>
+          <p:cNvSpPr/>
+          <p:nvPr/>
+        </p:nvSpPr>
+        <p:spPr>
+          <a:xfrm>
+            <a:off x="749808" y="2674366"/>
+            <a:ext cx="10692079" cy="6350"/>
+          </a:xfrm>
+          <a:prstGeom prst="rect">
+            <a:avLst/>
+          </a:prstGeom>
+          <a:solidFill>
+            <a:srgbClr val="D9D9D9"/>
+          </a:solidFill>
+          <a:ln>
+            <a:noFill/>
+          </a:ln>
+          <a:effectLst/>
+        </p:spPr>
+        <p:style>
+          <a:lnRef idx="1">
+            <a:schemeClr val="accent1"/>
+          </a:lnRef>
+          <a:fillRef idx="3">
+            <a:schemeClr val="accent1"/>
+          </a:fillRef>
+          <a:effectRef idx="2">
+            <a:schemeClr val="accent1"/>
+          </a:effectRef>
+          <a:fontRef idx="minor">
+            <a:schemeClr val="lt1"/>
+          </a:fontRef>
+        </p:style>
+        <p:txBody>
+          <a:bodyPr rtlCol="0" anchor="ctr"/>
+          <a:lstStyle/>
+          <a:p>
+            <a:pPr algn="ctr"/>
+          </a:p>
+        </p:txBody>
+      </p:sp>
+      <p:sp>
+        <p:nvSpPr>
+          <p:cNvPr id="22" name="TextBox 21"/>
+          <p:cNvSpPr txBox="1"/>
+          <p:nvPr/>
+        </p:nvSpPr>
+        <p:spPr>
+          <a:xfrm>
+            <a:off x="841248" y="2347976"/>
+            <a:ext cx="3061319" cy="332740"/>
+          </a:xfrm>
+          <a:prstGeom prst="rect">
+            <a:avLst/>
+          </a:prstGeom>
+          <a:noFill/>
+        </p:spPr>
+        <p:txBody>
+          <a:bodyPr wrap="square" lIns="0" rIns="0" tIns="0" bIns="0" anchor="ctr">
+            <a:spAutoFit/>
+          </a:bodyPr>
+          <a:lstStyle/>
+          <a:p>
+            <a:pPr algn="l">
+              <a:spcBef>
+                <a:spcPts val="0"/>
+              </a:spcBef>
+            </a:pPr>
+            <a:r>
+              <a:rPr sz="1300" b="0" i="0">
+                <a:solidFill>
+                  <a:srgbClr val="122738"/>
+                </a:solidFill>
+                <a:latin typeface="Segoe UI"/>
+              </a:rPr>
+              <a:t>Excès au-dessus du seuil</a:t>
+            </a:r>
+          </a:p>
+        </p:txBody>
+      </p:sp>
+      <p:sp>
+        <p:nvSpPr>
+          <p:cNvPr id="23" name="TextBox 22"/>
+          <p:cNvSpPr txBox="1"/>
+          <p:nvPr/>
+        </p:nvSpPr>
+        <p:spPr>
+          <a:xfrm>
+            <a:off x="4048871" y="2347976"/>
+            <a:ext cx="2419794" cy="332740"/>
+          </a:xfrm>
+          <a:prstGeom prst="rect">
+            <a:avLst/>
+          </a:prstGeom>
+          <a:noFill/>
+        </p:spPr>
+        <p:txBody>
+          <a:bodyPr wrap="square" lIns="0" rIns="0" tIns="0" bIns="0" anchor="ctr">
+            <a:spAutoFit/>
+          </a:bodyPr>
+          <a:lstStyle/>
+          <a:p>
+            <a:pPr algn="l">
+              <a:spcBef>
+                <a:spcPts val="0"/>
+              </a:spcBef>
+            </a:pPr>
+            <a:r>
+              <a:rPr sz="1300" b="0" i="0">
+                <a:solidFill>
+                  <a:srgbClr val="122738"/>
+                </a:solidFill>
+                <a:latin typeface="Segoe UI"/>
+              </a:rPr>
+              <a:t>91</a:t>
+            </a:r>
+          </a:p>
+        </p:txBody>
+      </p:sp>
+      <p:sp>
+        <p:nvSpPr>
+          <p:cNvPr id="24" name="TextBox 23"/>
+          <p:cNvSpPr txBox="1"/>
+          <p:nvPr/>
+        </p:nvSpPr>
+        <p:spPr>
+          <a:xfrm>
+            <a:off x="6614970" y="2347976"/>
+            <a:ext cx="1243666" cy="332740"/>
+          </a:xfrm>
+          <a:prstGeom prst="rect">
+            <a:avLst/>
+          </a:prstGeom>
+          <a:noFill/>
+        </p:spPr>
+        <p:txBody>
+          <a:bodyPr wrap="square" lIns="0" rIns="0" tIns="0" bIns="0" anchor="ctr">
+            <a:spAutoFit/>
+          </a:bodyPr>
+          <a:lstStyle/>
+          <a:p>
+            <a:pPr algn="l">
+              <a:spcBef>
+                <a:spcPts val="0"/>
+              </a:spcBef>
+            </a:pPr>
+            <a:r>
+              <a:rPr sz="1300" b="1" i="0">
+                <a:solidFill>
+                  <a:srgbClr val="223E55"/>
+                </a:solidFill>
+                <a:latin typeface="Segoe UI"/>
+              </a:rPr>
+              <a:t>compté</a:t>
+            </a:r>
+          </a:p>
+        </p:txBody>
+      </p:sp>
+      <p:sp>
+        <p:nvSpPr>
+          <p:cNvPr id="25" name="TextBox 24"/>
+          <p:cNvSpPr txBox="1"/>
+          <p:nvPr/>
+        </p:nvSpPr>
+        <p:spPr>
+          <a:xfrm>
+            <a:off x="8004940" y="2347976"/>
+            <a:ext cx="3382082" cy="332740"/>
+          </a:xfrm>
+          <a:prstGeom prst="rect">
+            <a:avLst/>
+          </a:prstGeom>
+          <a:noFill/>
+        </p:spPr>
+        <p:txBody>
+          <a:bodyPr wrap="square" lIns="0" rIns="0" tIns="0" bIns="0" anchor="ctr">
+            <a:spAutoFit/>
+          </a:bodyPr>
+          <a:lstStyle/>
+          <a:p>
+            <a:pPr algn="l">
+              <a:spcBef>
+                <a:spcPts val="0"/>
+              </a:spcBef>
+            </a:pPr>
+            <a:r>
+              <a:rPr sz="1300" b="0" i="0">
+                <a:solidFill>
+                  <a:srgbClr val="122738"/>
+                </a:solidFill>
+                <a:latin typeface="Segoe UI"/>
+              </a:rPr>
+              <a:t>une fois le seuil et l'échantillon fixés</a:t>
+            </a:r>
+          </a:p>
+        </p:txBody>
+      </p:sp>
+      <p:sp>
+        <p:nvSpPr>
+          <p:cNvPr id="26" name="Rectangle 25"/>
+          <p:cNvSpPr/>
+          <p:nvPr/>
+        </p:nvSpPr>
+        <p:spPr>
+          <a:xfrm>
+            <a:off x="749808" y="2680716"/>
+            <a:ext cx="10692079" cy="537464"/>
+          </a:xfrm>
+          <a:prstGeom prst="rect">
+            <a:avLst/>
+          </a:prstGeom>
+          <a:solidFill>
+            <a:srgbClr val="F2F2F2"/>
+          </a:solidFill>
+          <a:ln>
+            <a:noFill/>
+          </a:ln>
+          <a:effectLst/>
+        </p:spPr>
+        <p:style>
+          <a:lnRef idx="1">
+            <a:schemeClr val="accent1"/>
+          </a:lnRef>
+          <a:fillRef idx="3">
+            <a:schemeClr val="accent1"/>
+          </a:fillRef>
+          <a:effectRef idx="2">
+            <a:schemeClr val="accent1"/>
+          </a:effectRef>
+          <a:fontRef idx="minor">
+            <a:schemeClr val="lt1"/>
+          </a:fontRef>
+        </p:style>
+        <p:txBody>
+          <a:bodyPr rtlCol="0" anchor="ctr"/>
+          <a:lstStyle/>
+          <a:p>
+            <a:pPr algn="ctr"/>
+          </a:p>
+        </p:txBody>
+      </p:sp>
+      <p:sp>
+        <p:nvSpPr>
+          <p:cNvPr id="27" name="Rectangle 26"/>
+          <p:cNvSpPr/>
+          <p:nvPr/>
+        </p:nvSpPr>
+        <p:spPr>
+          <a:xfrm>
+            <a:off x="749808" y="3211830"/>
+            <a:ext cx="10692079" cy="6350"/>
+          </a:xfrm>
+          <a:prstGeom prst="rect">
+            <a:avLst/>
+          </a:prstGeom>
+          <a:solidFill>
+            <a:srgbClr val="D9D9D9"/>
+          </a:solidFill>
+          <a:ln>
+            <a:noFill/>
+          </a:ln>
+          <a:effectLst/>
+        </p:spPr>
+        <p:style>
+          <a:lnRef idx="1">
+            <a:schemeClr val="accent1"/>
+          </a:lnRef>
+          <a:fillRef idx="3">
+            <a:schemeClr val="accent1"/>
+          </a:fillRef>
+          <a:effectRef idx="2">
+            <a:schemeClr val="accent1"/>
+          </a:effectRef>
+          <a:fontRef idx="minor">
+            <a:schemeClr val="lt1"/>
+          </a:fontRef>
+        </p:style>
+        <p:txBody>
+          <a:bodyPr rtlCol="0" anchor="ctr"/>
+          <a:lstStyle/>
+          <a:p>
+            <a:pPr algn="ctr"/>
+          </a:p>
+        </p:txBody>
+      </p:sp>
+      <p:sp>
+        <p:nvSpPr>
+          <p:cNvPr id="28" name="TextBox 27"/>
+          <p:cNvSpPr txBox="1"/>
+          <p:nvPr/>
+        </p:nvSpPr>
+        <p:spPr>
+          <a:xfrm>
+            <a:off x="841248" y="2680716"/>
+            <a:ext cx="3061319" cy="537464"/>
+          </a:xfrm>
+          <a:prstGeom prst="rect">
+            <a:avLst/>
+          </a:prstGeom>
+          <a:noFill/>
+        </p:spPr>
+        <p:txBody>
+          <a:bodyPr wrap="square" lIns="0" rIns="0" tIns="0" bIns="0" anchor="ctr">
+            <a:spAutoFit/>
+          </a:bodyPr>
+          <a:lstStyle/>
+          <a:p>
+            <a:pPr algn="l">
+              <a:spcBef>
+                <a:spcPts val="0"/>
+              </a:spcBef>
+            </a:pPr>
+            <a:r>
+              <a:rPr sz="1300" b="0" i="0">
+                <a:solidFill>
+                  <a:srgbClr val="122738"/>
+                </a:solidFill>
+                <a:latin typeface="Segoe UI"/>
+              </a:rPr>
+              <a:t>Indice de queue, ξ</a:t>
+            </a:r>
+          </a:p>
+        </p:txBody>
+      </p:sp>
+      <p:sp>
+        <p:nvSpPr>
+          <p:cNvPr id="29" name="TextBox 28"/>
+          <p:cNvSpPr txBox="1"/>
+          <p:nvPr/>
+        </p:nvSpPr>
+        <p:spPr>
+          <a:xfrm>
+            <a:off x="4048871" y="2680716"/>
+            <a:ext cx="2419794" cy="537464"/>
+          </a:xfrm>
+          <a:prstGeom prst="rect">
+            <a:avLst/>
+          </a:prstGeom>
+          <a:noFill/>
+        </p:spPr>
+        <p:txBody>
+          <a:bodyPr wrap="square" lIns="0" rIns="0" tIns="0" bIns="0" anchor="ctr">
+            <a:spAutoFit/>
+          </a:bodyPr>
+          <a:lstStyle/>
+          <a:p>
+            <a:pPr algn="l">
+              <a:spcBef>
+                <a:spcPts val="0"/>
+              </a:spcBef>
+            </a:pPr>
+            <a:r>
+              <a:rPr sz="1300" b="0" i="0">
+                <a:solidFill>
+                  <a:srgbClr val="122738"/>
+                </a:solidFill>
+                <a:latin typeface="Segoe UI"/>
+              </a:rPr>
+              <a:t>0,5954</a:t>
+            </a:r>
+          </a:p>
+        </p:txBody>
+      </p:sp>
+      <p:sp>
+        <p:nvSpPr>
+          <p:cNvPr id="30" name="TextBox 29"/>
+          <p:cNvSpPr txBox="1"/>
+          <p:nvPr/>
+        </p:nvSpPr>
+        <p:spPr>
+          <a:xfrm>
+            <a:off x="6614970" y="2680716"/>
+            <a:ext cx="1243666" cy="537464"/>
+          </a:xfrm>
+          <a:prstGeom prst="rect">
+            <a:avLst/>
+          </a:prstGeom>
+          <a:noFill/>
+        </p:spPr>
+        <p:txBody>
+          <a:bodyPr wrap="square" lIns="0" rIns="0" tIns="0" bIns="0" anchor="ctr">
+            <a:spAutoFit/>
+          </a:bodyPr>
+          <a:lstStyle/>
+          <a:p>
+            <a:pPr algn="l">
+              <a:spcBef>
+                <a:spcPts val="0"/>
+              </a:spcBef>
+            </a:pPr>
+            <a:r>
+              <a:rPr sz="1300" b="1" i="0">
+                <a:solidFill>
+                  <a:srgbClr val="223E55"/>
+                </a:solidFill>
+                <a:latin typeface="Segoe UI"/>
+              </a:rPr>
+              <a:t>estimé</a:t>
+            </a:r>
+          </a:p>
+        </p:txBody>
+      </p:sp>
+      <p:sp>
+        <p:nvSpPr>
+          <p:cNvPr id="31" name="TextBox 30"/>
+          <p:cNvSpPr txBox="1"/>
+          <p:nvPr/>
+        </p:nvSpPr>
+        <p:spPr>
+          <a:xfrm>
+            <a:off x="8004940" y="2680716"/>
+            <a:ext cx="3382082" cy="537464"/>
+          </a:xfrm>
+          <a:prstGeom prst="rect">
+            <a:avLst/>
+          </a:prstGeom>
+          <a:noFill/>
+        </p:spPr>
+        <p:txBody>
+          <a:bodyPr wrap="square" lIns="0" rIns="0" tIns="0" bIns="0" anchor="ctr">
+            <a:spAutoFit/>
+          </a:bodyPr>
+          <a:lstStyle/>
+          <a:p>
+            <a:pPr algn="l">
+              <a:spcBef>
+                <a:spcPts val="0"/>
+              </a:spcBef>
+            </a:pPr>
+            <a:r>
+              <a:rPr sz="1300" b="0" i="0">
+                <a:solidFill>
+                  <a:srgbClr val="122738"/>
+                </a:solidFill>
+                <a:latin typeface="Segoe UI"/>
+              </a:rPr>
+              <a:t>IC 90 % [0,304 ; 0,831], et c'est la plus grosse incertitude</a:t>
+            </a:r>
+          </a:p>
+        </p:txBody>
+      </p:sp>
+      <p:sp>
+        <p:nvSpPr>
+          <p:cNvPr id="32" name="Rectangle 31"/>
+          <p:cNvSpPr/>
+          <p:nvPr/>
+        </p:nvSpPr>
+        <p:spPr>
+          <a:xfrm>
+            <a:off x="749808" y="3544570"/>
+            <a:ext cx="10692079" cy="6350"/>
+          </a:xfrm>
+          <a:prstGeom prst="rect">
+            <a:avLst/>
+          </a:prstGeom>
+          <a:solidFill>
+            <a:srgbClr val="D9D9D9"/>
+          </a:solidFill>
+          <a:ln>
+            <a:noFill/>
+          </a:ln>
+          <a:effectLst/>
+        </p:spPr>
+        <p:style>
+          <a:lnRef idx="1">
+            <a:schemeClr val="accent1"/>
+          </a:lnRef>
+          <a:fillRef idx="3">
+            <a:schemeClr val="accent1"/>
+          </a:fillRef>
+          <a:effectRef idx="2">
+            <a:schemeClr val="accent1"/>
+          </a:effectRef>
+          <a:fontRef idx="minor">
+            <a:schemeClr val="lt1"/>
+          </a:fontRef>
+        </p:style>
+        <p:txBody>
+          <a:bodyPr rtlCol="0" anchor="ctr"/>
+          <a:lstStyle/>
+          <a:p>
+            <a:pPr algn="ctr"/>
+          </a:p>
+        </p:txBody>
+      </p:sp>
+      <p:sp>
+        <p:nvSpPr>
+          <p:cNvPr id="33" name="TextBox 32"/>
+          <p:cNvSpPr txBox="1"/>
+          <p:nvPr/>
+        </p:nvSpPr>
+        <p:spPr>
+          <a:xfrm>
+            <a:off x="841248" y="3218180"/>
+            <a:ext cx="3061319" cy="332740"/>
+          </a:xfrm>
+          <a:prstGeom prst="rect">
+            <a:avLst/>
+          </a:prstGeom>
+          <a:noFill/>
+        </p:spPr>
+        <p:txBody>
+          <a:bodyPr wrap="square" lIns="0" rIns="0" tIns="0" bIns="0" anchor="ctr">
+            <a:spAutoFit/>
+          </a:bodyPr>
+          <a:lstStyle/>
+          <a:p>
+            <a:pPr algn="l">
+              <a:spcBef>
+                <a:spcPts val="0"/>
+              </a:spcBef>
+            </a:pPr>
+            <a:r>
+              <a:rPr sz="1300" b="0" i="0">
+                <a:solidFill>
+                  <a:srgbClr val="122738"/>
+                </a:solidFill>
+                <a:latin typeface="Segoe UI"/>
+              </a:rPr>
+              <a:t>Échelle, σ</a:t>
+            </a:r>
+          </a:p>
+        </p:txBody>
+      </p:sp>
+      <p:sp>
+        <p:nvSpPr>
+          <p:cNvPr id="34" name="TextBox 33"/>
+          <p:cNvSpPr txBox="1"/>
+          <p:nvPr/>
+        </p:nvSpPr>
+        <p:spPr>
+          <a:xfrm>
+            <a:off x="4048871" y="3218180"/>
+            <a:ext cx="2419794" cy="332740"/>
+          </a:xfrm>
+          <a:prstGeom prst="rect">
+            <a:avLst/>
+          </a:prstGeom>
+          <a:noFill/>
+        </p:spPr>
+        <p:txBody>
+          <a:bodyPr wrap="square" lIns="0" rIns="0" tIns="0" bIns="0" anchor="ctr">
+            <a:spAutoFit/>
+          </a:bodyPr>
+          <a:lstStyle/>
+          <a:p>
+            <a:pPr algn="l">
+              <a:spcBef>
+                <a:spcPts val="0"/>
+              </a:spcBef>
+            </a:pPr>
+            <a:r>
+              <a:rPr sz="1300" b="0" i="0">
+                <a:solidFill>
+                  <a:srgbClr val="122738"/>
+                </a:solidFill>
+                <a:latin typeface="Segoe UI"/>
+              </a:rPr>
+              <a:t>57,97 M€</a:t>
+            </a:r>
+          </a:p>
+        </p:txBody>
+      </p:sp>
+      <p:sp>
+        <p:nvSpPr>
+          <p:cNvPr id="35" name="TextBox 34"/>
+          <p:cNvSpPr txBox="1"/>
+          <p:nvPr/>
+        </p:nvSpPr>
+        <p:spPr>
+          <a:xfrm>
+            <a:off x="6614970" y="3218180"/>
+            <a:ext cx="1243666" cy="332740"/>
+          </a:xfrm>
+          <a:prstGeom prst="rect">
+            <a:avLst/>
+          </a:prstGeom>
+          <a:noFill/>
+        </p:spPr>
+        <p:txBody>
+          <a:bodyPr wrap="square" lIns="0" rIns="0" tIns="0" bIns="0" anchor="ctr">
+            <a:spAutoFit/>
+          </a:bodyPr>
+          <a:lstStyle/>
+          <a:p>
+            <a:pPr algn="l">
+              <a:spcBef>
+                <a:spcPts val="0"/>
+              </a:spcBef>
+            </a:pPr>
+            <a:r>
+              <a:rPr sz="1300" b="1" i="0">
+                <a:solidFill>
+                  <a:srgbClr val="223E55"/>
+                </a:solidFill>
+                <a:latin typeface="Segoe UI"/>
+              </a:rPr>
+              <a:t>estimé</a:t>
+            </a:r>
+          </a:p>
+        </p:txBody>
+      </p:sp>
+      <p:sp>
+        <p:nvSpPr>
+          <p:cNvPr id="36" name="TextBox 35"/>
+          <p:cNvSpPr txBox="1"/>
+          <p:nvPr/>
+        </p:nvSpPr>
+        <p:spPr>
+          <a:xfrm>
+            <a:off x="8004940" y="3218180"/>
+            <a:ext cx="3382082" cy="332740"/>
+          </a:xfrm>
+          <a:prstGeom prst="rect">
+            <a:avLst/>
+          </a:prstGeom>
+          <a:noFill/>
+        </p:spPr>
+        <p:txBody>
+          <a:bodyPr wrap="square" lIns="0" rIns="0" tIns="0" bIns="0" anchor="ctr">
+            <a:spAutoFit/>
+          </a:bodyPr>
+          <a:lstStyle/>
+          <a:p>
+            <a:pPr algn="l">
+              <a:spcBef>
+                <a:spcPts val="0"/>
+              </a:spcBef>
+            </a:pPr>
+            <a:r>
+              <a:rPr sz="1300" b="0" i="0">
+                <a:solidFill>
+                  <a:srgbClr val="122738"/>
+                </a:solidFill>
+                <a:latin typeface="Segoe UI"/>
+              </a:rPr>
+              <a:t>maximum de vraisemblance, seuil imposé</a:t>
+            </a:r>
+          </a:p>
+        </p:txBody>
+      </p:sp>
+      <p:sp>
+        <p:nvSpPr>
+          <p:cNvPr id="37" name="Rectangle 36"/>
+          <p:cNvSpPr/>
+          <p:nvPr/>
+        </p:nvSpPr>
+        <p:spPr>
+          <a:xfrm>
+            <a:off x="749808" y="3550920"/>
+            <a:ext cx="10692079" cy="537464"/>
+          </a:xfrm>
+          <a:prstGeom prst="rect">
+            <a:avLst/>
+          </a:prstGeom>
+          <a:solidFill>
+            <a:srgbClr val="F2F2F2"/>
+          </a:solidFill>
+          <a:ln>
+            <a:noFill/>
+          </a:ln>
+          <a:effectLst/>
+        </p:spPr>
+        <p:style>
+          <a:lnRef idx="1">
+            <a:schemeClr val="accent1"/>
+          </a:lnRef>
+          <a:fillRef idx="3">
+            <a:schemeClr val="accent1"/>
+          </a:fillRef>
+          <a:effectRef idx="2">
+            <a:schemeClr val="accent1"/>
+          </a:effectRef>
+          <a:fontRef idx="minor">
+            <a:schemeClr val="lt1"/>
+          </a:fontRef>
+        </p:style>
+        <p:txBody>
+          <a:bodyPr rtlCol="0" anchor="ctr"/>
+          <a:lstStyle/>
+          <a:p>
+            <a:pPr algn="ctr"/>
+          </a:p>
+        </p:txBody>
+      </p:sp>
+      <p:sp>
+        <p:nvSpPr>
+          <p:cNvPr id="38" name="Rectangle 37"/>
+          <p:cNvSpPr/>
+          <p:nvPr/>
+        </p:nvSpPr>
+        <p:spPr>
+          <a:xfrm>
+            <a:off x="749808" y="4082034"/>
+            <a:ext cx="10692079" cy="6350"/>
+          </a:xfrm>
+          <a:prstGeom prst="rect">
+            <a:avLst/>
+          </a:prstGeom>
+          <a:solidFill>
+            <a:srgbClr val="D9D9D9"/>
+          </a:solidFill>
+          <a:ln>
+            <a:noFill/>
+          </a:ln>
+          <a:effectLst/>
+        </p:spPr>
+        <p:style>
+          <a:lnRef idx="1">
+            <a:schemeClr val="accent1"/>
+          </a:lnRef>
+          <a:fillRef idx="3">
+            <a:schemeClr val="accent1"/>
+          </a:fillRef>
+          <a:effectRef idx="2">
+            <a:schemeClr val="accent1"/>
+          </a:effectRef>
+          <a:fontRef idx="minor">
+            <a:schemeClr val="lt1"/>
+          </a:fontRef>
+        </p:style>
+        <p:txBody>
+          <a:bodyPr rtlCol="0" anchor="ctr"/>
+          <a:lstStyle/>
+          <a:p>
+            <a:pPr algn="ctr"/>
+          </a:p>
+        </p:txBody>
+      </p:sp>
+      <p:sp>
+        <p:nvSpPr>
+          <p:cNvPr id="39" name="TextBox 38"/>
+          <p:cNvSpPr txBox="1"/>
+          <p:nvPr/>
+        </p:nvSpPr>
+        <p:spPr>
+          <a:xfrm>
+            <a:off x="841248" y="3550920"/>
+            <a:ext cx="3061319" cy="537464"/>
+          </a:xfrm>
+          <a:prstGeom prst="rect">
+            <a:avLst/>
+          </a:prstGeom>
+          <a:noFill/>
+        </p:spPr>
+        <p:txBody>
+          <a:bodyPr wrap="square" lIns="0" rIns="0" tIns="0" bIns="0" anchor="ctr">
+            <a:spAutoFit/>
+          </a:bodyPr>
+          <a:lstStyle/>
+          <a:p>
+            <a:pPr algn="l">
+              <a:spcBef>
+                <a:spcPts val="0"/>
+              </a:spcBef>
+            </a:pPr>
+            <a:r>
+              <a:rPr sz="1300" b="0" i="0">
+                <a:solidFill>
+                  <a:srgbClr val="122738"/>
+                </a:solidFill>
+                <a:latin typeface="Segoe UI"/>
+              </a:rPr>
+              <a:t>Fréquence au secteur, λ</a:t>
+            </a:r>
+          </a:p>
+        </p:txBody>
+      </p:sp>
+      <p:sp>
+        <p:nvSpPr>
+          <p:cNvPr id="40" name="TextBox 39"/>
+          <p:cNvSpPr txBox="1"/>
+          <p:nvPr/>
+        </p:nvSpPr>
+        <p:spPr>
+          <a:xfrm>
+            <a:off x="4048871" y="3550920"/>
+            <a:ext cx="2419794" cy="537464"/>
+          </a:xfrm>
+          <a:prstGeom prst="rect">
+            <a:avLst/>
+          </a:prstGeom>
+          <a:noFill/>
+        </p:spPr>
+        <p:txBody>
+          <a:bodyPr wrap="square" lIns="0" rIns="0" tIns="0" bIns="0" anchor="ctr">
+            <a:spAutoFit/>
+          </a:bodyPr>
+          <a:lstStyle/>
+          <a:p>
+            <a:pPr algn="l">
+              <a:spcBef>
+                <a:spcPts val="0"/>
+              </a:spcBef>
+            </a:pPr>
+            <a:r>
+              <a:rPr sz="1300" b="0" i="0">
+                <a:solidFill>
+                  <a:srgbClr val="122738"/>
+                </a:solidFill>
+                <a:latin typeface="Segoe UI"/>
+              </a:rPr>
+              <a:t>21,56 par an</a:t>
+            </a:r>
+          </a:p>
+        </p:txBody>
+      </p:sp>
+      <p:sp>
+        <p:nvSpPr>
+          <p:cNvPr id="41" name="TextBox 40"/>
+          <p:cNvSpPr txBox="1"/>
+          <p:nvPr/>
+        </p:nvSpPr>
+        <p:spPr>
+          <a:xfrm>
+            <a:off x="6614970" y="3550920"/>
+            <a:ext cx="1243666" cy="537464"/>
+          </a:xfrm>
+          <a:prstGeom prst="rect">
+            <a:avLst/>
+          </a:prstGeom>
+          <a:noFill/>
+        </p:spPr>
+        <p:txBody>
+          <a:bodyPr wrap="square" lIns="0" rIns="0" tIns="0" bIns="0" anchor="ctr">
+            <a:spAutoFit/>
+          </a:bodyPr>
+          <a:lstStyle/>
+          <a:p>
+            <a:pPr algn="l">
+              <a:spcBef>
+                <a:spcPts val="0"/>
+              </a:spcBef>
+            </a:pPr>
+            <a:r>
+              <a:rPr sz="1300" b="1" i="0">
+                <a:solidFill>
+                  <a:srgbClr val="223E55"/>
+                </a:solidFill>
+                <a:latin typeface="Segoe UI"/>
+              </a:rPr>
+              <a:t>calibré</a:t>
+            </a:r>
+          </a:p>
+        </p:txBody>
+      </p:sp>
+      <p:sp>
+        <p:nvSpPr>
+          <p:cNvPr id="42" name="TextBox 41"/>
+          <p:cNvSpPr txBox="1"/>
+          <p:nvPr/>
+        </p:nvSpPr>
+        <p:spPr>
+          <a:xfrm>
+            <a:off x="8004940" y="3550920"/>
+            <a:ext cx="3382082" cy="537464"/>
+          </a:xfrm>
+          <a:prstGeom prst="rect">
+            <a:avLst/>
+          </a:prstGeom>
+          <a:noFill/>
+        </p:spPr>
+        <p:txBody>
+          <a:bodyPr wrap="square" lIns="0" rIns="0" tIns="0" bIns="0" anchor="ctr">
+            <a:spAutoFit/>
+          </a:bodyPr>
+          <a:lstStyle/>
+          <a:p>
+            <a:pPr algn="l">
+              <a:spcBef>
+                <a:spcPts val="0"/>
+              </a:spcBef>
+            </a:pPr>
+            <a:r>
+              <a:rPr sz="1300" b="0" i="0">
+                <a:solidFill>
+                  <a:srgbClr val="122738"/>
+                </a:solidFill>
+                <a:latin typeface="Segoe UI"/>
+              </a:rPr>
+              <a:t>descente d'échelle depuis le périmètre financier</a:t>
+            </a:r>
+          </a:p>
+        </p:txBody>
+      </p:sp>
+      <p:sp>
+        <p:nvSpPr>
+          <p:cNvPr id="43" name="Rectangle 42"/>
+          <p:cNvSpPr/>
+          <p:nvPr/>
+        </p:nvSpPr>
+        <p:spPr>
+          <a:xfrm>
+            <a:off x="749808" y="4619498"/>
+            <a:ext cx="10692079" cy="6350"/>
+          </a:xfrm>
+          <a:prstGeom prst="rect">
+            <a:avLst/>
+          </a:prstGeom>
+          <a:solidFill>
+            <a:srgbClr val="D9D9D9"/>
+          </a:solidFill>
+          <a:ln>
+            <a:noFill/>
+          </a:ln>
+          <a:effectLst/>
+        </p:spPr>
+        <p:style>
+          <a:lnRef idx="1">
+            <a:schemeClr val="accent1"/>
+          </a:lnRef>
+          <a:fillRef idx="3">
+            <a:schemeClr val="accent1"/>
+          </a:fillRef>
+          <a:effectRef idx="2">
+            <a:schemeClr val="accent1"/>
+          </a:effectRef>
+          <a:fontRef idx="minor">
+            <a:schemeClr val="lt1"/>
+          </a:fontRef>
+        </p:style>
+        <p:txBody>
+          <a:bodyPr rtlCol="0" anchor="ctr"/>
+          <a:lstStyle/>
+          <a:p>
+            <a:pPr algn="ctr"/>
+          </a:p>
+        </p:txBody>
+      </p:sp>
+      <p:sp>
+        <p:nvSpPr>
+          <p:cNvPr id="44" name="TextBox 43"/>
+          <p:cNvSpPr txBox="1"/>
+          <p:nvPr/>
+        </p:nvSpPr>
+        <p:spPr>
+          <a:xfrm>
+            <a:off x="841248" y="4088384"/>
+            <a:ext cx="3061319" cy="537464"/>
+          </a:xfrm>
+          <a:prstGeom prst="rect">
+            <a:avLst/>
+          </a:prstGeom>
+          <a:noFill/>
+        </p:spPr>
+        <p:txBody>
+          <a:bodyPr wrap="square" lIns="0" rIns="0" tIns="0" bIns="0" anchor="ctr">
+            <a:spAutoFit/>
+          </a:bodyPr>
+          <a:lstStyle/>
+          <a:p>
+            <a:pPr algn="l">
+              <a:spcBef>
+                <a:spcPts val="0"/>
+              </a:spcBef>
+            </a:pPr>
+            <a:r>
+              <a:rPr sz="1300" b="0" i="0">
+                <a:solidFill>
+                  <a:srgbClr val="122738"/>
+                </a:solidFill>
+                <a:latin typeface="Segoe UI"/>
+              </a:rPr>
+              <a:t>Surdispersion des comptes</a:t>
+            </a:r>
+          </a:p>
+        </p:txBody>
+      </p:sp>
+      <p:sp>
+        <p:nvSpPr>
+          <p:cNvPr id="45" name="TextBox 44"/>
+          <p:cNvSpPr txBox="1"/>
+          <p:nvPr/>
+        </p:nvSpPr>
+        <p:spPr>
+          <a:xfrm>
+            <a:off x="4048871" y="4088384"/>
+            <a:ext cx="2419794" cy="537464"/>
+          </a:xfrm>
+          <a:prstGeom prst="rect">
+            <a:avLst/>
+          </a:prstGeom>
+          <a:noFill/>
+        </p:spPr>
+        <p:txBody>
+          <a:bodyPr wrap="square" lIns="0" rIns="0" tIns="0" bIns="0" anchor="ctr">
+            <a:spAutoFit/>
+          </a:bodyPr>
+          <a:lstStyle/>
+          <a:p>
+            <a:pPr algn="l">
+              <a:spcBef>
+                <a:spcPts val="0"/>
+              </a:spcBef>
+            </a:pPr>
+            <a:r>
+              <a:rPr sz="1300" b="0" i="0">
+                <a:solidFill>
+                  <a:srgbClr val="122738"/>
+                </a:solidFill>
+                <a:latin typeface="Segoe UI"/>
+              </a:rPr>
+              <a:t>9,2</a:t>
+            </a:r>
+          </a:p>
+        </p:txBody>
+      </p:sp>
+      <p:sp>
+        <p:nvSpPr>
+          <p:cNvPr id="46" name="TextBox 45"/>
+          <p:cNvSpPr txBox="1"/>
+          <p:nvPr/>
+        </p:nvSpPr>
+        <p:spPr>
+          <a:xfrm>
+            <a:off x="6614970" y="4088384"/>
+            <a:ext cx="1243666" cy="537464"/>
+          </a:xfrm>
+          <a:prstGeom prst="rect">
+            <a:avLst/>
+          </a:prstGeom>
+          <a:noFill/>
+        </p:spPr>
+        <p:txBody>
+          <a:bodyPr wrap="square" lIns="0" rIns="0" tIns="0" bIns="0" anchor="ctr">
+            <a:spAutoFit/>
+          </a:bodyPr>
+          <a:lstStyle/>
+          <a:p>
+            <a:pPr algn="l">
+              <a:spcBef>
+                <a:spcPts val="0"/>
+              </a:spcBef>
+            </a:pPr>
+            <a:r>
+              <a:rPr sz="1300" b="1" i="0">
+                <a:solidFill>
+                  <a:srgbClr val="B10031"/>
+                </a:solidFill>
+                <a:latin typeface="Segoe UI"/>
+              </a:rPr>
+              <a:t>posé</a:t>
+            </a:r>
+          </a:p>
+        </p:txBody>
+      </p:sp>
+      <p:sp>
+        <p:nvSpPr>
+          <p:cNvPr id="47" name="TextBox 46"/>
+          <p:cNvSpPr txBox="1"/>
+          <p:nvPr/>
+        </p:nvSpPr>
+        <p:spPr>
+          <a:xfrm>
+            <a:off x="8004940" y="4088384"/>
+            <a:ext cx="3382082" cy="537464"/>
+          </a:xfrm>
+          <a:prstGeom prst="rect">
+            <a:avLst/>
+          </a:prstGeom>
+          <a:noFill/>
+        </p:spPr>
+        <p:txBody>
+          <a:bodyPr wrap="square" lIns="0" rIns="0" tIns="0" bIns="0" anchor="ctr">
+            <a:spAutoFit/>
+          </a:bodyPr>
+          <a:lstStyle/>
+          <a:p>
+            <a:pPr algn="l">
+              <a:spcBef>
+                <a:spcPts val="0"/>
+              </a:spcBef>
+            </a:pPr>
+            <a:r>
+              <a:rPr sz="1300" b="0" i="0">
+                <a:solidFill>
+                  <a:srgbClr val="122738"/>
+                </a:solidFill>
+                <a:latin typeface="Segoe UI"/>
+              </a:rPr>
+              <a:t>marge prudentielle assumée, et déclarée comme telle</a:t>
+            </a:r>
+          </a:p>
+        </p:txBody>
+      </p:sp>
+      <p:sp>
+        <p:nvSpPr>
+          <p:cNvPr id="48" name="Rectangle 47"/>
+          <p:cNvSpPr/>
+          <p:nvPr/>
+        </p:nvSpPr>
+        <p:spPr>
+          <a:xfrm>
+            <a:off x="749808" y="4625848"/>
+            <a:ext cx="10692079" cy="537464"/>
+          </a:xfrm>
+          <a:prstGeom prst="rect">
+            <a:avLst/>
+          </a:prstGeom>
+          <a:solidFill>
+            <a:srgbClr val="F2F2F2"/>
+          </a:solidFill>
+          <a:ln>
+            <a:noFill/>
+          </a:ln>
+          <a:effectLst/>
+        </p:spPr>
+        <p:style>
+          <a:lnRef idx="1">
+            <a:schemeClr val="accent1"/>
+          </a:lnRef>
+          <a:fillRef idx="3">
+            <a:schemeClr val="accent1"/>
+          </a:fillRef>
+          <a:effectRef idx="2">
+            <a:schemeClr val="accent1"/>
+          </a:effectRef>
+          <a:fontRef idx="minor">
+            <a:schemeClr val="lt1"/>
+          </a:fontRef>
+        </p:style>
+        <p:txBody>
+          <a:bodyPr rtlCol="0" anchor="ctr"/>
+          <a:lstStyle/>
+          <a:p>
+            <a:pPr algn="ctr"/>
+          </a:p>
+        </p:txBody>
+      </p:sp>
+      <p:sp>
+        <p:nvSpPr>
+          <p:cNvPr id="49" name="Rectangle 48"/>
+          <p:cNvSpPr/>
+          <p:nvPr/>
+        </p:nvSpPr>
+        <p:spPr>
+          <a:xfrm>
+            <a:off x="749808" y="5156962"/>
+            <a:ext cx="10692079" cy="6350"/>
+          </a:xfrm>
+          <a:prstGeom prst="rect">
+            <a:avLst/>
+          </a:prstGeom>
+          <a:solidFill>
+            <a:srgbClr val="D9D9D9"/>
+          </a:solidFill>
+          <a:ln>
+            <a:noFill/>
+          </a:ln>
+          <a:effectLst/>
+        </p:spPr>
+        <p:style>
+          <a:lnRef idx="1">
+            <a:schemeClr val="accent1"/>
+          </a:lnRef>
+          <a:fillRef idx="3">
+            <a:schemeClr val="accent1"/>
+          </a:fillRef>
+          <a:effectRef idx="2">
+            <a:schemeClr val="accent1"/>
+          </a:effectRef>
+          <a:fontRef idx="minor">
+            <a:schemeClr val="lt1"/>
+          </a:fontRef>
+        </p:style>
+        <p:txBody>
+          <a:bodyPr rtlCol="0" anchor="ctr"/>
+          <a:lstStyle/>
+          <a:p>
+            <a:pPr algn="ctr"/>
+          </a:p>
+        </p:txBody>
+      </p:sp>
+      <p:sp>
+        <p:nvSpPr>
+          <p:cNvPr id="50" name="TextBox 49"/>
+          <p:cNvSpPr txBox="1"/>
+          <p:nvPr/>
+        </p:nvSpPr>
+        <p:spPr>
+          <a:xfrm>
+            <a:off x="841248" y="4625848"/>
+            <a:ext cx="3061319" cy="537464"/>
+          </a:xfrm>
+          <a:prstGeom prst="rect">
+            <a:avLst/>
+          </a:prstGeom>
+          <a:noFill/>
+        </p:spPr>
+        <p:txBody>
+          <a:bodyPr wrap="square" lIns="0" rIns="0" tIns="0" bIns="0" anchor="ctr">
+            <a:spAutoFit/>
+          </a:bodyPr>
+          <a:lstStyle/>
+          <a:p>
+            <a:pPr algn="l">
+              <a:spcBef>
+                <a:spcPts val="0"/>
+              </a:spcBef>
+            </a:pPr>
+            <a:r>
+              <a:rPr sz="1300" b="0" i="0">
+                <a:solidFill>
+                  <a:srgbClr val="122738"/>
+                </a:solidFill>
+                <a:latin typeface="Segoe UI"/>
+              </a:rPr>
+              <a:t>Gain de propagation, g</a:t>
+            </a:r>
+          </a:p>
+        </p:txBody>
+      </p:sp>
+      <p:sp>
+        <p:nvSpPr>
+          <p:cNvPr id="51" name="TextBox 50"/>
+          <p:cNvSpPr txBox="1"/>
+          <p:nvPr/>
+        </p:nvSpPr>
+        <p:spPr>
+          <a:xfrm>
+            <a:off x="4048871" y="4625848"/>
+            <a:ext cx="2419794" cy="537464"/>
+          </a:xfrm>
+          <a:prstGeom prst="rect">
+            <a:avLst/>
+          </a:prstGeom>
+          <a:noFill/>
+        </p:spPr>
+        <p:txBody>
+          <a:bodyPr wrap="square" lIns="0" rIns="0" tIns="0" bIns="0" anchor="ctr">
+            <a:spAutoFit/>
+          </a:bodyPr>
+          <a:lstStyle/>
+          <a:p>
+            <a:pPr algn="l">
+              <a:spcBef>
+                <a:spcPts val="0"/>
+              </a:spcBef>
+            </a:pPr>
+            <a:r>
+              <a:rPr sz="1300" b="0" i="0">
+                <a:solidFill>
+                  <a:srgbClr val="122738"/>
+                </a:solidFill>
+                <a:latin typeface="Segoe UI"/>
+              </a:rPr>
+              <a:t>0,45  /  0,68  /  0,90</a:t>
+            </a:r>
+          </a:p>
+        </p:txBody>
+      </p:sp>
+      <p:sp>
+        <p:nvSpPr>
+          <p:cNvPr id="52" name="TextBox 51"/>
+          <p:cNvSpPr txBox="1"/>
+          <p:nvPr/>
+        </p:nvSpPr>
+        <p:spPr>
+          <a:xfrm>
+            <a:off x="6614970" y="4625848"/>
+            <a:ext cx="1243666" cy="537464"/>
+          </a:xfrm>
+          <a:prstGeom prst="rect">
+            <a:avLst/>
+          </a:prstGeom>
+          <a:noFill/>
+        </p:spPr>
+        <p:txBody>
+          <a:bodyPr wrap="square" lIns="0" rIns="0" tIns="0" bIns="0" anchor="ctr">
+            <a:spAutoFit/>
+          </a:bodyPr>
+          <a:lstStyle/>
+          <a:p>
+            <a:pPr algn="l">
+              <a:spcBef>
+                <a:spcPts val="0"/>
+              </a:spcBef>
+            </a:pPr>
+            <a:r>
+              <a:rPr sz="1300" b="1" i="0">
+                <a:solidFill>
+                  <a:srgbClr val="B10031"/>
+                </a:solidFill>
+                <a:latin typeface="Segoe UI"/>
+              </a:rPr>
+              <a:t>posé</a:t>
+            </a:r>
+          </a:p>
+        </p:txBody>
+      </p:sp>
+      <p:sp>
+        <p:nvSpPr>
+          <p:cNvPr id="53" name="TextBox 52"/>
+          <p:cNvSpPr txBox="1"/>
+          <p:nvPr/>
+        </p:nvSpPr>
+        <p:spPr>
+          <a:xfrm>
+            <a:off x="8004940" y="4625848"/>
+            <a:ext cx="3382082" cy="537464"/>
+          </a:xfrm>
+          <a:prstGeom prst="rect">
+            <a:avLst/>
+          </a:prstGeom>
+          <a:noFill/>
+        </p:spPr>
+        <p:txBody>
+          <a:bodyPr wrap="square" lIns="0" rIns="0" tIns="0" bIns="0" anchor="ctr">
+            <a:spAutoFit/>
+          </a:bodyPr>
+          <a:lstStyle/>
+          <a:p>
+            <a:pPr algn="l">
+              <a:spcBef>
+                <a:spcPts val="0"/>
+              </a:spcBef>
+            </a:pPr>
+            <a:r>
+              <a:rPr sz="1300" b="0" i="0">
+                <a:solidFill>
+                  <a:srgbClr val="122738"/>
+                </a:solidFill>
+                <a:latin typeface="Segoe UI"/>
+              </a:rPr>
+              <a:t>le capital est croissant en g : l'ordre suffit à produire l'écart</a:t>
+            </a:r>
+          </a:p>
+        </p:txBody>
+      </p:sp>
+      <p:sp>
+        <p:nvSpPr>
+          <p:cNvPr id="54" name="Rectangle 53"/>
+          <p:cNvSpPr/>
+          <p:nvPr/>
+        </p:nvSpPr>
+        <p:spPr>
+          <a:xfrm>
+            <a:off x="749808" y="5694426"/>
+            <a:ext cx="10692079" cy="6350"/>
+          </a:xfrm>
+          <a:prstGeom prst="rect">
+            <a:avLst/>
+          </a:prstGeom>
+          <a:solidFill>
+            <a:srgbClr val="D9D9D9"/>
+          </a:solidFill>
+          <a:ln>
+            <a:noFill/>
+          </a:ln>
+          <a:effectLst/>
+        </p:spPr>
+        <p:style>
+          <a:lnRef idx="1">
+            <a:schemeClr val="accent1"/>
+          </a:lnRef>
+          <a:fillRef idx="3">
+            <a:schemeClr val="accent1"/>
+          </a:fillRef>
+          <a:effectRef idx="2">
+            <a:schemeClr val="accent1"/>
+          </a:effectRef>
+          <a:fontRef idx="minor">
+            <a:schemeClr val="lt1"/>
+          </a:fontRef>
+        </p:style>
+        <p:txBody>
+          <a:bodyPr rtlCol="0" anchor="ctr"/>
+          <a:lstStyle/>
+          <a:p>
+            <a:pPr algn="ctr"/>
+          </a:p>
+        </p:txBody>
+      </p:sp>
+      <p:sp>
+        <p:nvSpPr>
+          <p:cNvPr id="55" name="TextBox 54"/>
+          <p:cNvSpPr txBox="1"/>
+          <p:nvPr/>
+        </p:nvSpPr>
+        <p:spPr>
+          <a:xfrm>
+            <a:off x="841248" y="5163312"/>
+            <a:ext cx="3061319" cy="537464"/>
+          </a:xfrm>
+          <a:prstGeom prst="rect">
+            <a:avLst/>
+          </a:prstGeom>
+          <a:noFill/>
+        </p:spPr>
+        <p:txBody>
+          <a:bodyPr wrap="square" lIns="0" rIns="0" tIns="0" bIns="0" anchor="ctr">
+            <a:spAutoFit/>
+          </a:bodyPr>
+          <a:lstStyle/>
+          <a:p>
+            <a:pPr algn="l">
+              <a:spcBef>
+                <a:spcPts val="0"/>
+              </a:spcBef>
+            </a:pPr>
+            <a:r>
+              <a:rPr sz="1300" b="0" i="0">
+                <a:solidFill>
+                  <a:srgbClr val="122738"/>
+                </a:solidFill>
+                <a:latin typeface="Segoe UI"/>
+              </a:rPr>
+              <a:t>Taux de dépassement, p_u</a:t>
+            </a:r>
+          </a:p>
+        </p:txBody>
+      </p:sp>
+      <p:sp>
+        <p:nvSpPr>
+          <p:cNvPr id="56" name="TextBox 55"/>
+          <p:cNvSpPr txBox="1"/>
+          <p:nvPr/>
+        </p:nvSpPr>
+        <p:spPr>
+          <a:xfrm>
+            <a:off x="4048871" y="5163312"/>
+            <a:ext cx="2419794" cy="537464"/>
+          </a:xfrm>
+          <a:prstGeom prst="rect">
+            <a:avLst/>
+          </a:prstGeom>
+          <a:noFill/>
+        </p:spPr>
+        <p:txBody>
+          <a:bodyPr wrap="square" lIns="0" rIns="0" tIns="0" bIns="0" anchor="ctr">
+            <a:spAutoFit/>
+          </a:bodyPr>
+          <a:lstStyle/>
+          <a:p>
+            <a:pPr algn="l">
+              <a:spcBef>
+                <a:spcPts val="0"/>
+              </a:spcBef>
+            </a:pPr>
+            <a:r>
+              <a:rPr sz="1300" b="0" i="0">
+                <a:solidFill>
+                  <a:srgbClr val="122738"/>
+                </a:solidFill>
+                <a:latin typeface="Segoe UI"/>
+              </a:rPr>
+              <a:t>0,1509</a:t>
+            </a:r>
+          </a:p>
+        </p:txBody>
+      </p:sp>
+      <p:sp>
+        <p:nvSpPr>
+          <p:cNvPr id="57" name="TextBox 56"/>
+          <p:cNvSpPr txBox="1"/>
+          <p:nvPr/>
+        </p:nvSpPr>
+        <p:spPr>
+          <a:xfrm>
+            <a:off x="6614970" y="5163312"/>
+            <a:ext cx="1243666" cy="537464"/>
+          </a:xfrm>
+          <a:prstGeom prst="rect">
+            <a:avLst/>
+          </a:prstGeom>
+          <a:noFill/>
+        </p:spPr>
+        <p:txBody>
+          <a:bodyPr wrap="square" lIns="0" rIns="0" tIns="0" bIns="0" anchor="ctr">
+            <a:spAutoFit/>
+          </a:bodyPr>
+          <a:lstStyle/>
+          <a:p>
+            <a:pPr algn="l">
+              <a:spcBef>
+                <a:spcPts val="0"/>
+              </a:spcBef>
+            </a:pPr>
+            <a:r>
+              <a:rPr sz="1300" b="1" i="0">
+                <a:solidFill>
+                  <a:srgbClr val="595959"/>
+                </a:solidFill>
+                <a:latin typeface="Segoe UI"/>
+              </a:rPr>
+              <a:t>gelé</a:t>
+            </a:r>
+          </a:p>
+        </p:txBody>
+      </p:sp>
+      <p:sp>
+        <p:nvSpPr>
+          <p:cNvPr id="58" name="TextBox 57"/>
+          <p:cNvSpPr txBox="1"/>
+          <p:nvPr/>
+        </p:nvSpPr>
+        <p:spPr>
+          <a:xfrm>
+            <a:off x="8004940" y="5163312"/>
+            <a:ext cx="3382082" cy="537464"/>
+          </a:xfrm>
+          <a:prstGeom prst="rect">
+            <a:avLst/>
+          </a:prstGeom>
+          <a:noFill/>
+        </p:spPr>
+        <p:txBody>
+          <a:bodyPr wrap="square" lIns="0" rIns="0" tIns="0" bIns="0" anchor="ctr">
+            <a:spAutoFit/>
+          </a:bodyPr>
+          <a:lstStyle/>
+          <a:p>
+            <a:pPr algn="l">
+              <a:spcBef>
+                <a:spcPts val="0"/>
+              </a:spcBef>
+            </a:pPr>
+            <a:r>
+              <a:rPr sz="1300" b="0" i="0">
+                <a:solidFill>
+                  <a:srgbClr val="122738"/>
+                </a:solidFill>
+                <a:latin typeface="Segoe UI"/>
+              </a:rPr>
+              <a:t>écart de +2,4 % sur la VaR, chiffré plutôt que corrigé</a:t>
+            </a:r>
+          </a:p>
+        </p:txBody>
+      </p:sp>
+      <p:sp>
+        <p:nvSpPr>
+          <p:cNvPr id="59" name="TextBox 58"/>
+          <p:cNvSpPr txBox="1"/>
+          <p:nvPr/>
+        </p:nvSpPr>
+        <p:spPr>
+          <a:xfrm>
+            <a:off x="749808" y="5938520"/>
+            <a:ext cx="10692079" cy="548640"/>
           </a:xfrm>
           <a:prstGeom prst="rect">
             <a:avLst/>
@@ -14425,117 +22602,26 @@
           </a:bodyPr>
           <a:lstStyle/>
           <a:p>
-            <a:pPr algn="l" marL="219456" indent="-219456">
+            <a:pPr algn="l">
               <a:spcBef>
                 <a:spcPts val="0"/>
               </a:spcBef>
             </a:pPr>
             <a:r>
-              <a:rPr sz="1600" b="0" i="0">
-                <a:solidFill>
-                  <a:srgbClr val="595959"/>
-                </a:solidFill>
-                <a:latin typeface="Segoe UI"/>
-              </a:rPr>
-              <a:t>•   </a:t>
-            </a:r>
-            <a:r>
-              <a:rPr sz="1600" b="0" i="0">
-                <a:solidFill>
-                  <a:srgbClr val="122738"/>
-                </a:solidFill>
-                <a:latin typeface="Segoe UI"/>
-              </a:rPr>
-              <a:t>Sévérité : loi de Pareto généralisée au-delà du seuil, indice de queue 0,5954</a:t>
-            </a:r>
-          </a:p>
-          <a:p>
-            <a:pPr algn="l" marL="219456" indent="-219456">
-              <a:spcBef>
-                <a:spcPts val="1400"/>
-              </a:spcBef>
-            </a:pPr>
-            <a:r>
-              <a:rPr sz="1600" b="0" i="0">
-                <a:solidFill>
-                  <a:srgbClr val="595959"/>
-                </a:solidFill>
-                <a:latin typeface="Segoe UI"/>
-              </a:rPr>
-              <a:t>•   </a:t>
-            </a:r>
-            <a:r>
-              <a:rPr sz="1600" b="0" i="0">
-                <a:solidFill>
-                  <a:srgbClr val="122738"/>
-                </a:solidFill>
-                <a:latin typeface="Segoe UI"/>
-              </a:rPr>
-              <a:t>Seuil 20,03 M€, 91 excès, calibration gelée depuis le 7 août 2026</a:t>
-            </a:r>
-          </a:p>
-          <a:p>
-            <a:pPr algn="l" marL="219456" indent="-219456">
-              <a:spcBef>
-                <a:spcPts val="1400"/>
-              </a:spcBef>
-            </a:pPr>
-            <a:r>
-              <a:rPr sz="1600" b="0" i="0">
-                <a:solidFill>
-                  <a:srgbClr val="595959"/>
-                </a:solidFill>
-                <a:latin typeface="Segoe UI"/>
-              </a:rPr>
-              <a:t>•   </a:t>
-            </a:r>
-            <a:r>
-              <a:rPr sz="1600" b="0" i="0">
-                <a:solidFill>
-                  <a:srgbClr val="122738"/>
-                </a:solidFill>
-                <a:latin typeface="Segoe UI"/>
-              </a:rPr>
-              <a:t>Fréquence : binomiale négative, validée hors échantillon</a:t>
-            </a:r>
-          </a:p>
-          <a:p>
-            <a:pPr algn="l">
-              <a:spcBef>
-                <a:spcPts val="1400"/>
-              </a:spcBef>
-            </a:pPr>
-            <a:r>
-              <a:rPr sz="1600" b="1" i="0">
+              <a:rPr sz="1400" b="1" i="0">
                 <a:solidFill>
                   <a:srgbClr val="B10031"/>
                 </a:solidFill>
                 <a:latin typeface="Segoe UI"/>
               </a:rPr>
-              <a:t>Gain de propagation : trois valeurs POSÉES, 0,45 / 0,68 / 0,90</a:t>
-            </a:r>
-          </a:p>
-          <a:p>
-            <a:pPr algn="l">
-              <a:spcBef>
-                <a:spcPts val="1400"/>
-              </a:spcBef>
-            </a:pPr>
-            <a:r>
-              <a:rPr sz="1600" b="1" i="0">
-                <a:solidFill>
-                  <a:srgbClr val="223E55"/>
-                </a:solidFill>
-                <a:latin typeface="Segoe UI"/>
-              </a:rPr>
-              <a:t>Le capital est croissant en ce gain : l'ordre suffit à produire l'écart, l'amplitude est un scénario</a:t>
-            </a:r>
-          </a:p>
-        </p:txBody>
-      </p:sp>
-      <p:sp>
-        <p:nvSpPr>
-          <p:cNvPr id="11" name="TextBox 10"/>
+              <a:t>Ce qui est POSÉ n'est pas une estimation déguisée : la thèse ne dépend pas du niveau de ces valeurs mais de leur ORDRE, et la monotonie du capital en g est démontrée.</a:t>
+            </a:r>
+          </a:p>
+        </p:txBody>
+      </p:sp>
+      <p:sp>
+        <p:nvSpPr>
+          <p:cNvPr id="60" name="TextBox 59"/>
           <p:cNvSpPr txBox="1"/>
           <p:nvPr/>
         </p:nvSpPr>
@@ -14567,7 +22653,7 @@
                 </a:solidFill>
                 <a:latin typeface="Segoe UI"/>
               </a:rPr>
-              <a:t>Sources : mémoire, annexe D ; scripts 07, 08b, 63 et 66.</a:t>
+              <a:t>Sources : mémoire, annexe D ; valeurs lues dans la sortie versionnée du script 63 ; monotonie, script 66.</a:t>
             </a:r>
           </a:p>
         </p:txBody>
@@ -18226,7 +26312,7 @@
 </p:sld>
 </file>
 
-<file path=ppt/slides/slide3.xml><?xml version="1.0" encoding="utf-8"?>
+<file path=ppt/slides/slide29.xml><?xml version="1.0" encoding="utf-8"?>
 <p:sld xmlns:a="http://schemas.openxmlformats.org/drawingml/2006/main" xmlns:p="http://schemas.openxmlformats.org/presentationml/2006/main" xmlns:r="http://schemas.openxmlformats.org/officeDocument/2006/relationships">
   <p:cSld>
     <p:spTree>
@@ -18439,6 +26525,438 @@
         </p:nvSpPr>
         <p:spPr>
           <a:xfrm>
+            <a:off x="749808" y="201168"/>
+            <a:ext cx="2743200" cy="237744"/>
+          </a:xfrm>
+          <a:prstGeom prst="rect">
+            <a:avLst/>
+          </a:prstGeom>
+          <a:noFill/>
+        </p:spPr>
+        <p:txBody>
+          <a:bodyPr wrap="square" lIns="0" rIns="0" tIns="0" bIns="0">
+            <a:spAutoFit/>
+          </a:bodyPr>
+          <a:lstStyle/>
+          <a:p>
+            <a:pPr algn="l">
+              <a:spcBef>
+                <a:spcPts val="0"/>
+              </a:spcBef>
+            </a:pPr>
+            <a:r>
+              <a:rPr sz="1100" b="1" i="0">
+                <a:solidFill>
+                  <a:srgbClr val="B10031"/>
+                </a:solidFill>
+                <a:latin typeface="Segoe UI"/>
+              </a:rPr>
+              <a:t>ANNEXE 11</a:t>
+            </a:r>
+          </a:p>
+        </p:txBody>
+      </p:sp>
+      <p:sp>
+        <p:nvSpPr>
+          <p:cNvPr id="7" name="TextBox 6"/>
+          <p:cNvSpPr txBox="1"/>
+          <p:nvPr/>
+        </p:nvSpPr>
+        <p:spPr>
+          <a:xfrm>
+            <a:off x="749808" y="475488"/>
+            <a:ext cx="8954719" cy="512064"/>
+          </a:xfrm>
+          <a:prstGeom prst="rect">
+            <a:avLst/>
+          </a:prstGeom>
+          <a:noFill/>
+        </p:spPr>
+        <p:txBody>
+          <a:bodyPr wrap="square" lIns="0" rIns="0" tIns="0" bIns="0">
+            <a:spAutoFit/>
+          </a:bodyPr>
+          <a:lstStyle/>
+          <a:p>
+            <a:pPr algn="l">
+              <a:spcBef>
+                <a:spcPts val="0"/>
+              </a:spcBef>
+            </a:pPr>
+            <a:r>
+              <a:rPr sz="2100" b="1" i="0">
+                <a:solidFill>
+                  <a:srgbClr val="223E55"/>
+                </a:solidFill>
+                <a:latin typeface="Georgia"/>
+              </a:rPr>
+              <a:t>La table complète des quatre canaux, telle qu'elle est au mémoire</a:t>
+            </a:r>
+          </a:p>
+        </p:txBody>
+      </p:sp>
+      <p:sp>
+        <p:nvSpPr>
+          <p:cNvPr id="8" name="TextBox 7"/>
+          <p:cNvSpPr txBox="1"/>
+          <p:nvPr/>
+        </p:nvSpPr>
+        <p:spPr>
+          <a:xfrm>
+            <a:off x="749808" y="950976"/>
+            <a:ext cx="8954719" cy="347472"/>
+          </a:xfrm>
+          <a:prstGeom prst="rect">
+            <a:avLst/>
+          </a:prstGeom>
+          <a:noFill/>
+        </p:spPr>
+        <p:txBody>
+          <a:bodyPr wrap="square" lIns="0" rIns="0" tIns="0" bIns="0">
+            <a:spAutoFit/>
+          </a:bodyPr>
+          <a:lstStyle/>
+          <a:p>
+            <a:pPr algn="l">
+              <a:spcBef>
+                <a:spcPts val="0"/>
+              </a:spcBef>
+            </a:pPr>
+            <a:r>
+              <a:rPr sz="1600" b="1" i="0">
+                <a:solidFill>
+                  <a:srgbClr val="B10031"/>
+                </a:solidFill>
+                <a:latin typeface="Georgia"/>
+              </a:rPr>
+              <a:t>Les quinze termes, les trois lectures, et où vit l'interaction</a:t>
+            </a:r>
+          </a:p>
+        </p:txBody>
+      </p:sp>
+      <p:sp>
+        <p:nvSpPr>
+          <p:cNvPr id="9" name="TextBox 8"/>
+          <p:cNvSpPr txBox="1"/>
+          <p:nvPr/>
+        </p:nvSpPr>
+        <p:spPr>
+          <a:xfrm>
+            <a:off x="11002975" y="6428232"/>
+            <a:ext cx="685800" cy="256032"/>
+          </a:xfrm>
+          <a:prstGeom prst="rect">
+            <a:avLst/>
+          </a:prstGeom>
+          <a:noFill/>
+        </p:spPr>
+        <p:txBody>
+          <a:bodyPr wrap="square" lIns="0" rIns="0" tIns="0" bIns="0">
+            <a:spAutoFit/>
+          </a:bodyPr>
+          <a:lstStyle/>
+          <a:p>
+            <a:pPr algn="r">
+              <a:spcBef>
+                <a:spcPts val="0"/>
+              </a:spcBef>
+            </a:pPr>
+            <a:r>
+              <a:rPr sz="1000" b="0" i="0">
+                <a:solidFill>
+                  <a:srgbClr val="A5A5A5"/>
+                </a:solidFill>
+                <a:latin typeface="Segoe UI"/>
+              </a:rPr>
+              <a:t>A11</a:t>
+            </a:r>
+          </a:p>
+        </p:txBody>
+      </p:sp>
+      <p:pic>
+        <p:nvPicPr>
+          <p:cNvPr id="10" name="Picture 9" descr="S24_interaction_canaux.png"/>
+          <p:cNvPicPr>
+            <a:picLocks noChangeAspect="1"/>
+          </p:cNvPicPr>
+          <p:nvPr/>
+        </p:nvPicPr>
+        <p:blipFill>
+          <a:blip r:embed="rId3"/>
+          <a:stretch>
+            <a:fillRect/>
+          </a:stretch>
+        </p:blipFill>
+        <p:spPr>
+          <a:xfrm>
+            <a:off x="749808" y="2104187"/>
+            <a:ext cx="10692079" cy="3564026"/>
+          </a:xfrm>
+          <a:prstGeom prst="rect">
+            <a:avLst/>
+          </a:prstGeom>
+        </p:spPr>
+      </p:pic>
+      <p:sp>
+        <p:nvSpPr>
+          <p:cNvPr id="11" name="TextBox 10"/>
+          <p:cNvSpPr txBox="1"/>
+          <p:nvPr/>
+        </p:nvSpPr>
+        <p:spPr>
+          <a:xfrm>
+            <a:off x="566928" y="6428232"/>
+            <a:ext cx="10051999" cy="256032"/>
+          </a:xfrm>
+          <a:prstGeom prst="rect">
+            <a:avLst/>
+          </a:prstGeom>
+          <a:noFill/>
+        </p:spPr>
+        <p:txBody>
+          <a:bodyPr wrap="square" lIns="0" rIns="0" tIns="0" bIns="0">
+            <a:spAutoFit/>
+          </a:bodyPr>
+          <a:lstStyle/>
+          <a:p>
+            <a:pPr algn="l">
+              <a:spcBef>
+                <a:spcPts val="0"/>
+              </a:spcBef>
+            </a:pPr>
+            <a:r>
+              <a:rPr sz="900" b="0" i="1">
+                <a:solidFill>
+                  <a:srgbClr val="A5A5A5"/>
+                </a:solidFill>
+                <a:latin typeface="Segoe UI"/>
+              </a:rPr>
+              <a:t>Sources : mémoire, chapitre 10, figure S24 ; scripts 43 et 68.</a:t>
+            </a:r>
+          </a:p>
+        </p:txBody>
+      </p:sp>
+    </p:spTree>
+  </p:cSld>
+  <p:clrMapOvr>
+    <a:masterClrMapping/>
+  </p:clrMapOvr>
+</p:sld>
+</file>
+
+<file path=ppt/slides/slide3.xml><?xml version="1.0" encoding="utf-8"?>
+<p:sld xmlns:a="http://schemas.openxmlformats.org/drawingml/2006/main" xmlns:p="http://schemas.openxmlformats.org/presentationml/2006/main" xmlns:r="http://schemas.openxmlformats.org/officeDocument/2006/relationships">
+  <p:cSld>
+    <p:spTree>
+      <p:nvGrpSpPr>
+        <p:cNvPr id="1" name=""/>
+        <p:cNvGrpSpPr/>
+        <p:nvPr/>
+      </p:nvGrpSpPr>
+      <p:grpSpPr/>
+      <p:sp>
+        <p:nvSpPr>
+          <p:cNvPr id="2" name="Rectangle 1"/>
+          <p:cNvSpPr/>
+          <p:nvPr/>
+        </p:nvSpPr>
+        <p:spPr>
+          <a:xfrm>
+            <a:off x="0" y="0"/>
+            <a:ext cx="12191695" cy="6858000"/>
+          </a:xfrm>
+          <a:prstGeom prst="rect">
+            <a:avLst/>
+          </a:prstGeom>
+          <a:solidFill>
+            <a:srgbClr val="FFFFFF"/>
+          </a:solidFill>
+          <a:ln>
+            <a:noFill/>
+          </a:ln>
+          <a:effectLst/>
+        </p:spPr>
+        <p:style>
+          <a:lnRef idx="1">
+            <a:schemeClr val="accent1"/>
+          </a:lnRef>
+          <a:fillRef idx="3">
+            <a:schemeClr val="accent1"/>
+          </a:fillRef>
+          <a:effectRef idx="2">
+            <a:schemeClr val="accent1"/>
+          </a:effectRef>
+          <a:fontRef idx="minor">
+            <a:schemeClr val="lt1"/>
+          </a:fontRef>
+        </p:style>
+        <p:txBody>
+          <a:bodyPr rtlCol="0" anchor="ctr"/>
+          <a:lstStyle/>
+          <a:p>
+            <a:pPr algn="ctr"/>
+          </a:p>
+        </p:txBody>
+      </p:sp>
+      <p:sp>
+        <p:nvSpPr>
+          <p:cNvPr id="3" name="Freeform 2"/>
+          <p:cNvSpPr/>
+          <p:nvPr/>
+        </p:nvSpPr>
+        <p:spPr>
+          <a:xfrm>
+            <a:off x="0" y="0"/>
+            <a:ext cx="566928" cy="841248"/>
+          </a:xfrm>
+          <a:custGeom>
+            <a:avLst/>
+            <a:gdLst/>
+            <a:ahLst/>
+            <a:cxnLst/>
+            <a:rect l="l" t="t" r="r" b="b"/>
+            <a:pathLst>
+              <a:path w="566928" h="841248">
+                <a:moveTo>
+                  <a:pt x="0" y="0"/>
+                </a:moveTo>
+                <a:lnTo>
+                  <a:pt x="566928" y="0"/>
+                </a:lnTo>
+                <a:lnTo>
+                  <a:pt x="0" y="841248"/>
+                </a:lnTo>
+                <a:close/>
+              </a:path>
+            </a:pathLst>
+          </a:custGeom>
+          <a:solidFill>
+            <a:srgbClr val="B10031"/>
+          </a:solidFill>
+          <a:ln>
+            <a:noFill/>
+          </a:ln>
+          <a:effectLst/>
+        </p:spPr>
+        <p:style>
+          <a:lnRef idx="1">
+            <a:schemeClr val="accent1"/>
+          </a:lnRef>
+          <a:fillRef idx="3">
+            <a:schemeClr val="accent1"/>
+          </a:fillRef>
+          <a:effectRef idx="2">
+            <a:schemeClr val="accent1"/>
+          </a:effectRef>
+          <a:fontRef idx="minor">
+            <a:schemeClr val="lt1"/>
+          </a:fontRef>
+        </p:style>
+        <p:txBody>
+          <a:bodyPr rtlCol="0" anchor="ctr"/>
+          <a:lstStyle/>
+          <a:p>
+            <a:pPr algn="ctr"/>
+          </a:p>
+        </p:txBody>
+      </p:sp>
+      <p:sp>
+        <p:nvSpPr>
+          <p:cNvPr id="4" name="Freeform 3"/>
+          <p:cNvSpPr/>
+          <p:nvPr/>
+        </p:nvSpPr>
+        <p:spPr>
+          <a:xfrm>
+            <a:off x="0" y="0"/>
+            <a:ext cx="566928" cy="841248"/>
+          </a:xfrm>
+          <a:custGeom>
+            <a:avLst/>
+            <a:gdLst/>
+            <a:ahLst/>
+            <a:cxnLst/>
+            <a:rect l="l" t="t" r="r" b="b"/>
+            <a:pathLst>
+              <a:path w="566928" h="841248">
+                <a:moveTo>
+                  <a:pt x="274320" y="0"/>
+                </a:moveTo>
+                <a:lnTo>
+                  <a:pt x="566928" y="0"/>
+                </a:lnTo>
+                <a:lnTo>
+                  <a:pt x="0" y="841248"/>
+                </a:lnTo>
+                <a:lnTo>
+                  <a:pt x="0" y="438912"/>
+                </a:lnTo>
+                <a:close/>
+              </a:path>
+            </a:pathLst>
+          </a:custGeom>
+          <a:solidFill>
+            <a:srgbClr val="B10031"/>
+          </a:solidFill>
+          <a:ln>
+            <a:noFill/>
+          </a:ln>
+          <a:effectLst/>
+        </p:spPr>
+        <p:style>
+          <a:lnRef idx="1">
+            <a:schemeClr val="accent1"/>
+          </a:lnRef>
+          <a:fillRef idx="3">
+            <a:schemeClr val="accent1"/>
+          </a:fillRef>
+          <a:effectRef idx="2">
+            <a:schemeClr val="accent1"/>
+          </a:effectRef>
+          <a:fontRef idx="minor">
+            <a:schemeClr val="lt1"/>
+          </a:fontRef>
+        </p:style>
+        <p:txBody>
+          <a:bodyPr rtlCol="0" anchor="ctr"/>
+          <a:lstStyle/>
+          <a:p>
+            <a:pPr algn="ctr"/>
+          </a:p>
+        </p:txBody>
+      </p:sp>
+      <p:pic>
+        <p:nvPicPr>
+          <p:cNvPr id="5" name="Picture 4" descr="nexialog.png"/>
+          <p:cNvPicPr>
+            <a:picLocks noChangeAspect="1"/>
+          </p:cNvPicPr>
+          <p:nvPr/>
+        </p:nvPicPr>
+        <p:blipFill>
+          <a:blip r:embed="rId2"/>
+          <a:stretch>
+            <a:fillRect/>
+          </a:stretch>
+        </p:blipFill>
+        <p:spPr>
+          <a:xfrm>
+            <a:off x="10207447" y="182880"/>
+            <a:ext cx="1481328" cy="539496"/>
+          </a:xfrm>
+          <a:prstGeom prst="rect">
+            <a:avLst/>
+          </a:prstGeom>
+        </p:spPr>
+      </p:pic>
+      <p:sp>
+        <p:nvSpPr>
+          <p:cNvPr id="6" name="TextBox 5"/>
+          <p:cNvSpPr txBox="1"/>
+          <p:nvPr/>
+        </p:nvSpPr>
+        <p:spPr>
+          <a:xfrm>
             <a:off x="11185855" y="6428232"/>
             <a:ext cx="502920" cy="256032"/>
           </a:xfrm>
@@ -19690,6 +28208,438 @@
                 <a:latin typeface="Segoe UI"/>
               </a:rPr>
               <a:t>Sources : mémoire, chapitres 1 et 2.</a:t>
+            </a:r>
+          </a:p>
+        </p:txBody>
+      </p:sp>
+    </p:spTree>
+  </p:cSld>
+  <p:clrMapOvr>
+    <a:masterClrMapping/>
+  </p:clrMapOvr>
+</p:sld>
+</file>
+
+<file path=ppt/slides/slide30.xml><?xml version="1.0" encoding="utf-8"?>
+<p:sld xmlns:a="http://schemas.openxmlformats.org/drawingml/2006/main" xmlns:p="http://schemas.openxmlformats.org/presentationml/2006/main" xmlns:r="http://schemas.openxmlformats.org/officeDocument/2006/relationships">
+  <p:cSld>
+    <p:spTree>
+      <p:nvGrpSpPr>
+        <p:cNvPr id="1" name=""/>
+        <p:cNvGrpSpPr/>
+        <p:nvPr/>
+      </p:nvGrpSpPr>
+      <p:grpSpPr/>
+      <p:sp>
+        <p:nvSpPr>
+          <p:cNvPr id="2" name="Rectangle 1"/>
+          <p:cNvSpPr/>
+          <p:nvPr/>
+        </p:nvSpPr>
+        <p:spPr>
+          <a:xfrm>
+            <a:off x="0" y="0"/>
+            <a:ext cx="12191695" cy="6858000"/>
+          </a:xfrm>
+          <a:prstGeom prst="rect">
+            <a:avLst/>
+          </a:prstGeom>
+          <a:solidFill>
+            <a:srgbClr val="FFFFFF"/>
+          </a:solidFill>
+          <a:ln>
+            <a:noFill/>
+          </a:ln>
+          <a:effectLst/>
+        </p:spPr>
+        <p:style>
+          <a:lnRef idx="1">
+            <a:schemeClr val="accent1"/>
+          </a:lnRef>
+          <a:fillRef idx="3">
+            <a:schemeClr val="accent1"/>
+          </a:fillRef>
+          <a:effectRef idx="2">
+            <a:schemeClr val="accent1"/>
+          </a:effectRef>
+          <a:fontRef idx="minor">
+            <a:schemeClr val="lt1"/>
+          </a:fontRef>
+        </p:style>
+        <p:txBody>
+          <a:bodyPr rtlCol="0" anchor="ctr"/>
+          <a:lstStyle/>
+          <a:p>
+            <a:pPr algn="ctr"/>
+          </a:p>
+        </p:txBody>
+      </p:sp>
+      <p:sp>
+        <p:nvSpPr>
+          <p:cNvPr id="3" name="Freeform 2"/>
+          <p:cNvSpPr/>
+          <p:nvPr/>
+        </p:nvSpPr>
+        <p:spPr>
+          <a:xfrm>
+            <a:off x="0" y="0"/>
+            <a:ext cx="566928" cy="841248"/>
+          </a:xfrm>
+          <a:custGeom>
+            <a:avLst/>
+            <a:gdLst/>
+            <a:ahLst/>
+            <a:cxnLst/>
+            <a:rect l="l" t="t" r="r" b="b"/>
+            <a:pathLst>
+              <a:path w="566928" h="841248">
+                <a:moveTo>
+                  <a:pt x="0" y="0"/>
+                </a:moveTo>
+                <a:lnTo>
+                  <a:pt x="566928" y="0"/>
+                </a:lnTo>
+                <a:lnTo>
+                  <a:pt x="0" y="841248"/>
+                </a:lnTo>
+                <a:close/>
+              </a:path>
+            </a:pathLst>
+          </a:custGeom>
+          <a:solidFill>
+            <a:srgbClr val="B10031"/>
+          </a:solidFill>
+          <a:ln>
+            <a:noFill/>
+          </a:ln>
+          <a:effectLst/>
+        </p:spPr>
+        <p:style>
+          <a:lnRef idx="1">
+            <a:schemeClr val="accent1"/>
+          </a:lnRef>
+          <a:fillRef idx="3">
+            <a:schemeClr val="accent1"/>
+          </a:fillRef>
+          <a:effectRef idx="2">
+            <a:schemeClr val="accent1"/>
+          </a:effectRef>
+          <a:fontRef idx="minor">
+            <a:schemeClr val="lt1"/>
+          </a:fontRef>
+        </p:style>
+        <p:txBody>
+          <a:bodyPr rtlCol="0" anchor="ctr"/>
+          <a:lstStyle/>
+          <a:p>
+            <a:pPr algn="ctr"/>
+          </a:p>
+        </p:txBody>
+      </p:sp>
+      <p:sp>
+        <p:nvSpPr>
+          <p:cNvPr id="4" name="Freeform 3"/>
+          <p:cNvSpPr/>
+          <p:nvPr/>
+        </p:nvSpPr>
+        <p:spPr>
+          <a:xfrm>
+            <a:off x="0" y="0"/>
+            <a:ext cx="566928" cy="841248"/>
+          </a:xfrm>
+          <a:custGeom>
+            <a:avLst/>
+            <a:gdLst/>
+            <a:ahLst/>
+            <a:cxnLst/>
+            <a:rect l="l" t="t" r="r" b="b"/>
+            <a:pathLst>
+              <a:path w="566928" h="841248">
+                <a:moveTo>
+                  <a:pt x="274320" y="0"/>
+                </a:moveTo>
+                <a:lnTo>
+                  <a:pt x="566928" y="0"/>
+                </a:lnTo>
+                <a:lnTo>
+                  <a:pt x="0" y="841248"/>
+                </a:lnTo>
+                <a:lnTo>
+                  <a:pt x="0" y="438912"/>
+                </a:lnTo>
+                <a:close/>
+              </a:path>
+            </a:pathLst>
+          </a:custGeom>
+          <a:solidFill>
+            <a:srgbClr val="B10031"/>
+          </a:solidFill>
+          <a:ln>
+            <a:noFill/>
+          </a:ln>
+          <a:effectLst/>
+        </p:spPr>
+        <p:style>
+          <a:lnRef idx="1">
+            <a:schemeClr val="accent1"/>
+          </a:lnRef>
+          <a:fillRef idx="3">
+            <a:schemeClr val="accent1"/>
+          </a:fillRef>
+          <a:effectRef idx="2">
+            <a:schemeClr val="accent1"/>
+          </a:effectRef>
+          <a:fontRef idx="minor">
+            <a:schemeClr val="lt1"/>
+          </a:fontRef>
+        </p:style>
+        <p:txBody>
+          <a:bodyPr rtlCol="0" anchor="ctr"/>
+          <a:lstStyle/>
+          <a:p>
+            <a:pPr algn="ctr"/>
+          </a:p>
+        </p:txBody>
+      </p:sp>
+      <p:pic>
+        <p:nvPicPr>
+          <p:cNvPr id="5" name="Picture 4" descr="nexialog.png"/>
+          <p:cNvPicPr>
+            <a:picLocks noChangeAspect="1"/>
+          </p:cNvPicPr>
+          <p:nvPr/>
+        </p:nvPicPr>
+        <p:blipFill>
+          <a:blip r:embed="rId2"/>
+          <a:stretch>
+            <a:fillRect/>
+          </a:stretch>
+        </p:blipFill>
+        <p:spPr>
+          <a:xfrm>
+            <a:off x="10207447" y="182880"/>
+            <a:ext cx="1481328" cy="539496"/>
+          </a:xfrm>
+          <a:prstGeom prst="rect">
+            <a:avLst/>
+          </a:prstGeom>
+        </p:spPr>
+      </p:pic>
+      <p:sp>
+        <p:nvSpPr>
+          <p:cNvPr id="6" name="TextBox 5"/>
+          <p:cNvSpPr txBox="1"/>
+          <p:nvPr/>
+        </p:nvSpPr>
+        <p:spPr>
+          <a:xfrm>
+            <a:off x="749808" y="201168"/>
+            <a:ext cx="2743200" cy="237744"/>
+          </a:xfrm>
+          <a:prstGeom prst="rect">
+            <a:avLst/>
+          </a:prstGeom>
+          <a:noFill/>
+        </p:spPr>
+        <p:txBody>
+          <a:bodyPr wrap="square" lIns="0" rIns="0" tIns="0" bIns="0">
+            <a:spAutoFit/>
+          </a:bodyPr>
+          <a:lstStyle/>
+          <a:p>
+            <a:pPr algn="l">
+              <a:spcBef>
+                <a:spcPts val="0"/>
+              </a:spcBef>
+            </a:pPr>
+            <a:r>
+              <a:rPr sz="1100" b="1" i="0">
+                <a:solidFill>
+                  <a:srgbClr val="B10031"/>
+                </a:solidFill>
+                <a:latin typeface="Segoe UI"/>
+              </a:rPr>
+              <a:t>ANNEXE 12</a:t>
+            </a:r>
+          </a:p>
+        </p:txBody>
+      </p:sp>
+      <p:sp>
+        <p:nvSpPr>
+          <p:cNvPr id="7" name="TextBox 6"/>
+          <p:cNvSpPr txBox="1"/>
+          <p:nvPr/>
+        </p:nvSpPr>
+        <p:spPr>
+          <a:xfrm>
+            <a:off x="749808" y="475488"/>
+            <a:ext cx="8954719" cy="512064"/>
+          </a:xfrm>
+          <a:prstGeom prst="rect">
+            <a:avLst/>
+          </a:prstGeom>
+          <a:noFill/>
+        </p:spPr>
+        <p:txBody>
+          <a:bodyPr wrap="square" lIns="0" rIns="0" tIns="0" bIns="0">
+            <a:spAutoFit/>
+          </a:bodyPr>
+          <a:lstStyle/>
+          <a:p>
+            <a:pPr algn="l">
+              <a:spcBef>
+                <a:spcPts val="0"/>
+              </a:spcBef>
+            </a:pPr>
+            <a:r>
+              <a:rPr sz="2200" b="1" i="0">
+                <a:solidFill>
+                  <a:srgbClr val="223E55"/>
+                </a:solidFill>
+                <a:latin typeface="Georgia"/>
+              </a:rPr>
+              <a:t>L'ensemble d'identification partielle, tel qu'il est au mémoire</a:t>
+            </a:r>
+          </a:p>
+        </p:txBody>
+      </p:sp>
+      <p:sp>
+        <p:nvSpPr>
+          <p:cNvPr id="8" name="TextBox 7"/>
+          <p:cNvSpPr txBox="1"/>
+          <p:nvPr/>
+        </p:nvSpPr>
+        <p:spPr>
+          <a:xfrm>
+            <a:off x="749808" y="950976"/>
+            <a:ext cx="8954719" cy="347472"/>
+          </a:xfrm>
+          <a:prstGeom prst="rect">
+            <a:avLst/>
+          </a:prstGeom>
+          <a:noFill/>
+        </p:spPr>
+        <p:txBody>
+          <a:bodyPr wrap="square" lIns="0" rIns="0" tIns="0" bIns="0">
+            <a:spAutoFit/>
+          </a:bodyPr>
+          <a:lstStyle/>
+          <a:p>
+            <a:pPr algn="l">
+              <a:spcBef>
+                <a:spcPts val="0"/>
+              </a:spcBef>
+            </a:pPr>
+            <a:r>
+              <a:rPr sz="1600" b="1" i="0">
+                <a:solidFill>
+                  <a:srgbClr val="B10031"/>
+                </a:solidFill>
+                <a:latin typeface="Georgia"/>
+              </a:rPr>
+              <a:t>Le pavé, la lecture centrale, la priorité robuste et la hiérarchie</a:t>
+            </a:r>
+          </a:p>
+        </p:txBody>
+      </p:sp>
+      <p:sp>
+        <p:nvSpPr>
+          <p:cNvPr id="9" name="TextBox 8"/>
+          <p:cNvSpPr txBox="1"/>
+          <p:nvPr/>
+        </p:nvSpPr>
+        <p:spPr>
+          <a:xfrm>
+            <a:off x="11002975" y="6428232"/>
+            <a:ext cx="685800" cy="256032"/>
+          </a:xfrm>
+          <a:prstGeom prst="rect">
+            <a:avLst/>
+          </a:prstGeom>
+          <a:noFill/>
+        </p:spPr>
+        <p:txBody>
+          <a:bodyPr wrap="square" lIns="0" rIns="0" tIns="0" bIns="0">
+            <a:spAutoFit/>
+          </a:bodyPr>
+          <a:lstStyle/>
+          <a:p>
+            <a:pPr algn="r">
+              <a:spcBef>
+                <a:spcPts val="0"/>
+              </a:spcBef>
+            </a:pPr>
+            <a:r>
+              <a:rPr sz="1000" b="0" i="0">
+                <a:solidFill>
+                  <a:srgbClr val="A5A5A5"/>
+                </a:solidFill>
+                <a:latin typeface="Segoe UI"/>
+              </a:rPr>
+              <a:t>A12</a:t>
+            </a:r>
+          </a:p>
+        </p:txBody>
+      </p:sp>
+      <p:pic>
+        <p:nvPicPr>
+          <p:cNvPr id="10" name="Picture 9" descr="Z_identification_partielle.png"/>
+          <p:cNvPicPr>
+            <a:picLocks noChangeAspect="1"/>
+          </p:cNvPicPr>
+          <p:nvPr/>
+        </p:nvPicPr>
+        <p:blipFill>
+          <a:blip r:embed="rId3"/>
+          <a:stretch>
+            <a:fillRect/>
+          </a:stretch>
+        </p:blipFill>
+        <p:spPr>
+          <a:xfrm>
+            <a:off x="3454025" y="1481328"/>
+            <a:ext cx="5283645" cy="4809744"/>
+          </a:xfrm>
+          <a:prstGeom prst="rect">
+            <a:avLst/>
+          </a:prstGeom>
+        </p:spPr>
+      </p:pic>
+      <p:sp>
+        <p:nvSpPr>
+          <p:cNvPr id="11" name="TextBox 10"/>
+          <p:cNvSpPr txBox="1"/>
+          <p:nvPr/>
+        </p:nvSpPr>
+        <p:spPr>
+          <a:xfrm>
+            <a:off x="566928" y="6428232"/>
+            <a:ext cx="10051999" cy="256032"/>
+          </a:xfrm>
+          <a:prstGeom prst="rect">
+            <a:avLst/>
+          </a:prstGeom>
+          <a:noFill/>
+        </p:spPr>
+        <p:txBody>
+          <a:bodyPr wrap="square" lIns="0" rIns="0" tIns="0" bIns="0">
+            <a:spAutoFit/>
+          </a:bodyPr>
+          <a:lstStyle/>
+          <a:p>
+            <a:pPr algn="l">
+              <a:spcBef>
+                <a:spcPts val="0"/>
+              </a:spcBef>
+            </a:pPr>
+            <a:r>
+              <a:rPr sz="900" b="0" i="1">
+                <a:solidFill>
+                  <a:srgbClr val="A5A5A5"/>
+                </a:solidFill>
+                <a:latin typeface="Segoe UI"/>
+              </a:rPr>
+              <a:t>Sources : mémoire, chapitre 9, figure Z ; scripts 30 et 40.</a:t>
             </a:r>
           </a:p>
         </p:txBody>
